--- a/PhysioNet Challenge 2026 - Scoring Metrics.pptx
+++ b/PhysioNet Challenge 2026 - Scoring Metrics.pptx
@@ -32,6 +32,8 @@
     <p:sldId id="277" r:id="rId29"/>
     <p:sldId id="278" r:id="rId30"/>
     <p:sldId id="279" r:id="rId31"/>
+    <p:sldId id="281" r:id="rId33"/>
+    <p:sldId id="282" r:id="rId34"/>
     <p:sldId id="280" r:id="rId32"/>
     <p:sldId id="271" r:id="rId23"/>
     <p:sldId id="272" r:id="rId24"/>
@@ -1991,6 +1993,146 @@
           <a:p>
             <a:r>
               <a:t>Finally, data quality, because it drives real modeling decisions. The demographics we can count on — age and sex are complete, race and ethnicity nearly so. But BMI is missing for three-quarters of patients and time-to-event for over 90%, recorded only for the positives, so neither can be a load-bearing feature. On the signal side, 1,090 of 1,103 recordings carry CAISR annotations; the 13 that don't fall back to global features. Eighteen recordings are too short — nine under an hour — and we flag those for the pipeline. The one thing that is perfectly clean is the linkage between the demographics table and the EDF files: zero orphans in either direction, so every patient's metadata lines up with their recording.</a:t>
+            </a:r>
+          </a:p>
+        </p:txBody>
+      </p:sp>
+      <p:sp>
+        <p:nvSpPr>
+          <p:cNvPr id="4" name="Slide Number Placeholder 3"/>
+          <p:cNvSpPr>
+            <a:spLocks noGrp="1"/>
+          </p:cNvSpPr>
+          <p:nvPr>
+            <p:ph type="sldNum" idx="5" sz="quarter"/>
+          </p:nvPr>
+        </p:nvSpPr>
+        <p:spPr/>
+      </p:sp>
+    </p:spTree>
+  </p:cSld>
+  <p:clrMapOvr>
+    <a:masterClrMapping/>
+  </p:clrMapOvr>
+</p:notes>
+</file>
+
+<file path=ppt/notesSlides/notesSlide26.xml><?xml version="1.0" encoding="utf-8"?>
+<p:notes xmlns:a="http://schemas.openxmlformats.org/drawingml/2006/main" xmlns:p="http://schemas.openxmlformats.org/presentationml/2006/main" xmlns:r="http://schemas.openxmlformats.org/officeDocument/2006/relationships">
+  <p:cSld>
+    <p:spTree>
+      <p:nvGrpSpPr>
+        <p:cNvPr id="1" name=""/>
+        <p:cNvGrpSpPr/>
+        <p:nvPr/>
+      </p:nvGrpSpPr>
+      <p:grpSpPr>
+        <a:xfrm>
+          <a:off x="0" y="0"/>
+          <a:ext cx="0" cy="0"/>
+          <a:chOff x="0" y="0"/>
+          <a:chExt cx="0" cy="0"/>
+        </a:xfrm>
+      </p:grpSpPr>
+      <p:sp>
+        <p:nvSpPr>
+          <p:cNvPr id="2" name="Slide Image Placeholder 1"/>
+          <p:cNvSpPr>
+            <a:spLocks noGrp="1"/>
+          </p:cNvSpPr>
+          <p:nvPr>
+            <p:ph type="sldImg" idx="2"/>
+          </p:nvPr>
+        </p:nvSpPr>
+        <p:spPr/>
+      </p:sp>
+      <p:sp>
+        <p:nvSpPr>
+          <p:cNvPr id="3" name="Notes Placeholder 2"/>
+          <p:cNvSpPr>
+            <a:spLocks noGrp="1"/>
+          </p:cNvSpPr>
+          <p:nvPr>
+            <p:ph type="body" idx="3" sz="quarter"/>
+          </p:nvPr>
+        </p:nvSpPr>
+        <p:spPr/>
+        <p:txBody>
+          <a:bodyPr/>
+          <a:lstStyle/>
+          <a:p>
+            <a:r>
+              <a:t>We can go deeper than 'how much' of each stage — into how the night moves between stages. This is the epoch-to-epoch transition matrix: each cell is the probability that a stage is followed by another. The left panel is the whole cohort — sleep is mostly stable, the diagonal is high. The right panel is what's different about the impaired patients, in percentage points. The striking cell is deep sleep: their N3 is far less stable — it drops back to N2 six points more often and holds only 5 points less — and their REM is less stable too. So the fragmentation we saw in the summary metrics has a concrete mechanism: impaired patients can't hold onto their deep, restorative sleep.</a:t>
+            </a:r>
+          </a:p>
+        </p:txBody>
+      </p:sp>
+      <p:sp>
+        <p:nvSpPr>
+          <p:cNvPr id="4" name="Slide Number Placeholder 3"/>
+          <p:cNvSpPr>
+            <a:spLocks noGrp="1"/>
+          </p:cNvSpPr>
+          <p:nvPr>
+            <p:ph type="sldNum" idx="5" sz="quarter"/>
+          </p:nvPr>
+        </p:nvSpPr>
+        <p:spPr/>
+      </p:sp>
+    </p:spTree>
+  </p:cSld>
+  <p:clrMapOvr>
+    <a:masterClrMapping/>
+  </p:clrMapOvr>
+</p:notes>
+</file>
+
+<file path=ppt/notesSlides/notesSlide27.xml><?xml version="1.0" encoding="utf-8"?>
+<p:notes xmlns:a="http://schemas.openxmlformats.org/drawingml/2006/main" xmlns:p="http://schemas.openxmlformats.org/presentationml/2006/main" xmlns:r="http://schemas.openxmlformats.org/officeDocument/2006/relationships">
+  <p:cSld>
+    <p:spTree>
+      <p:nvGrpSpPr>
+        <p:cNvPr id="1" name=""/>
+        <p:cNvGrpSpPr/>
+        <p:nvPr/>
+      </p:nvGrpSpPr>
+      <p:grpSpPr>
+        <a:xfrm>
+          <a:off x="0" y="0"/>
+          <a:ext cx="0" cy="0"/>
+          <a:chOff x="0" y="0"/>
+          <a:chExt cx="0" cy="0"/>
+        </a:xfrm>
+      </p:grpSpPr>
+      <p:sp>
+        <p:nvSpPr>
+          <p:cNvPr id="2" name="Slide Image Placeholder 1"/>
+          <p:cNvSpPr>
+            <a:spLocks noGrp="1"/>
+          </p:cNvSpPr>
+          <p:nvPr>
+            <p:ph type="sldImg" idx="2"/>
+          </p:nvPr>
+        </p:nvSpPr>
+        <p:spPr/>
+      </p:sp>
+      <p:sp>
+        <p:nvSpPr>
+          <p:cNvPr id="3" name="Notes Placeholder 2"/>
+          <p:cNvSpPr>
+            <a:spLocks noGrp="1"/>
+          </p:cNvSpPr>
+          <p:nvPr>
+            <p:ph type="body" idx="3" sz="quarter"/>
+          </p:nvPr>
+        </p:nvSpPr>
+        <p:spPr/>
+        <p:txBody>
+          <a:bodyPr/>
+          <a:lstStyle/>
+          <a:p>
+            <a:r>
+              <a:t>Finally, a formal answer to 'which features actually matter.' We tested every feature against the impairment label — a t-test for numeric features, chi-square for categorical — and corrected for testing 48 of them at once with a false-discovery-rate adjustment. Fourteen survive at q below 0.05. Age has by far the largest effect, a full standard deviation of separation — which is precisely the shortcut the age-conditioned metric strips away, so we can't lean on it. After age come the sleep features: periodic limb movements, reduced REM, more time awake, lower efficiency and stage entropy, fewer REM cycles, less deep sleep. The important negative result is that the apnea-hypopnea index is NOT significant — so the real signal lives in sleep architecture and continuity, not in how many breathing events a patient has. That directly justifies our feature design.</a:t>
             </a:r>
           </a:p>
         </p:txBody>
@@ -23142,769 +23284,7 @@
           <a:lstStyle/>
           <a:p>
             <a:r>
-              <a:rPr b="1">
-                <a:latin typeface="Arial"/>
-              </a:rPr>
-              <a:t>What this means for our approach</a:t>
-            </a:r>
-          </a:p>
-        </p:txBody>
-      </p:sp>
-      <p:sp>
-        <p:nvSpPr>
-          <p:cNvPr id="3" name="Content Placeholder 2"/>
-          <p:cNvSpPr>
-            <a:spLocks noGrp="1"/>
-          </p:cNvSpPr>
-          <p:nvPr>
-            <p:ph idx="1"/>
-          </p:nvPr>
-        </p:nvSpPr>
-        <p:spPr/>
-        <p:txBody>
-          <a:bodyPr/>
-          <a:lstStyle/>
-          <a:p/>
-        </p:txBody>
-      </p:sp>
-      <p:sp>
-        <p:nvSpPr>
-          <p:cNvPr id="4" name="TextBox 3"/>
-          <p:cNvSpPr txBox="1"/>
-          <p:nvPr/>
-        </p:nvSpPr>
-        <p:spPr>
-          <a:xfrm>
-            <a:off x="548640" y="1024128"/>
-            <a:ext cx="6446520" cy="274320"/>
-          </a:xfrm>
-          <a:prstGeom prst="rect">
-            <a:avLst/>
-          </a:prstGeom>
-          <a:noFill/>
-        </p:spPr>
-        <p:txBody>
-          <a:bodyPr wrap="square" anchor="t" lIns="45720" rIns="45720" tIns="18288" bIns="18288">
-            <a:spAutoFit/>
-          </a:bodyPr>
-          <a:lstStyle/>
-          <a:p>
-            <a:pPr algn="l">
-              <a:spcBef>
-                <a:spcPts val="0"/>
-              </a:spcBef>
-              <a:spcAft>
-                <a:spcPts val="0"/>
-              </a:spcAft>
-              <a:buNone/>
-            </a:pPr>
-            <a:r>
-              <a:rPr sz="1100" b="1" i="0">
-                <a:solidFill>
-                  <a:srgbClr val="C8102E"/>
-                </a:solidFill>
-                <a:latin typeface="Arial"/>
-              </a:rPr>
-              <a:t>TAKEAWAYS</a:t>
-            </a:r>
-          </a:p>
-        </p:txBody>
-      </p:sp>
-      <p:sp>
-        <p:nvSpPr>
-          <p:cNvPr id="5" name="Rounded Rectangle 4"/>
-          <p:cNvSpPr/>
-          <p:nvPr/>
-        </p:nvSpPr>
-        <p:spPr>
-          <a:xfrm>
-            <a:off x="548640" y="1417320"/>
-            <a:ext cx="6446520" cy="758952"/>
-          </a:xfrm>
-          <a:prstGeom prst="roundRect">
-            <a:avLst>
-              <a:gd name="adj" fmla="val 6000"/>
-            </a:avLst>
-          </a:prstGeom>
-          <a:solidFill>
-            <a:srgbClr val="F2F4F4"/>
-          </a:solidFill>
-          <a:ln>
-            <a:noFill/>
-          </a:ln>
-          <a:effectLst/>
-        </p:spPr>
-        <p:style>
-          <a:lnRef idx="1">
-            <a:schemeClr val="accent1"/>
-          </a:lnRef>
-          <a:fillRef idx="3">
-            <a:schemeClr val="accent1"/>
-          </a:fillRef>
-          <a:effectRef idx="2">
-            <a:schemeClr val="accent1"/>
-          </a:effectRef>
-          <a:fontRef idx="minor">
-            <a:schemeClr val="lt1"/>
-          </a:fontRef>
-        </p:style>
-        <p:txBody>
-          <a:bodyPr rtlCol="0" anchor="ctr"/>
-          <a:lstStyle/>
-          <a:p>
-            <a:pPr algn="ctr"/>
-          </a:p>
-        </p:txBody>
-      </p:sp>
-      <p:sp>
-        <p:nvSpPr>
-          <p:cNvPr id="6" name="Rounded Rectangle 5"/>
-          <p:cNvSpPr/>
-          <p:nvPr/>
-        </p:nvSpPr>
-        <p:spPr>
-          <a:xfrm>
-            <a:off x="685800" y="1563624"/>
-            <a:ext cx="457200" cy="457200"/>
-          </a:xfrm>
-          <a:prstGeom prst="roundRect">
-            <a:avLst>
-              <a:gd name="adj" fmla="val 25000"/>
-            </a:avLst>
-          </a:prstGeom>
-          <a:solidFill>
-            <a:srgbClr val="C8102E"/>
-          </a:solidFill>
-          <a:ln>
-            <a:noFill/>
-          </a:ln>
-          <a:effectLst/>
-        </p:spPr>
-        <p:style>
-          <a:lnRef idx="1">
-            <a:schemeClr val="accent1"/>
-          </a:lnRef>
-          <a:fillRef idx="3">
-            <a:schemeClr val="accent1"/>
-          </a:fillRef>
-          <a:effectRef idx="2">
-            <a:schemeClr val="accent1"/>
-          </a:effectRef>
-          <a:fontRef idx="minor">
-            <a:schemeClr val="lt1"/>
-          </a:fontRef>
-        </p:style>
-        <p:txBody>
-          <a:bodyPr rtlCol="0" anchor="ctr"/>
-          <a:lstStyle/>
-          <a:p>
-            <a:pPr algn="ctr"/>
-            <a:r>
-              <a:rPr b="1" sz="1500">
-                <a:solidFill>
-                  <a:srgbClr val="FFFFFF"/>
-                </a:solidFill>
-                <a:latin typeface="Arial"/>
-              </a:rPr>
-              <a:t>1</a:t>
-            </a:r>
-          </a:p>
-        </p:txBody>
-      </p:sp>
-      <p:sp>
-        <p:nvSpPr>
-          <p:cNvPr id="7" name="TextBox 6"/>
-          <p:cNvSpPr txBox="1"/>
-          <p:nvPr/>
-        </p:nvSpPr>
-        <p:spPr>
-          <a:xfrm>
-            <a:off x="1325880" y="1417320"/>
-            <a:ext cx="5532120" cy="758952"/>
-          </a:xfrm>
-          <a:prstGeom prst="rect">
-            <a:avLst/>
-          </a:prstGeom>
-          <a:noFill/>
-        </p:spPr>
-        <p:txBody>
-          <a:bodyPr wrap="square" anchor="ctr" lIns="45720" rIns="45720" tIns="18288" bIns="18288">
-            <a:spAutoFit/>
-          </a:bodyPr>
-          <a:lstStyle/>
-          <a:p>
-            <a:pPr algn="l">
-              <a:spcBef>
-                <a:spcPts val="0"/>
-              </a:spcBef>
-              <a:spcAft>
-                <a:spcPts val="100"/>
-              </a:spcAft>
-              <a:buNone/>
-            </a:pPr>
-            <a:r>
-              <a:rPr sz="1300" b="1" i="0">
-                <a:solidFill>
-                  <a:srgbClr val="2A2E30"/>
-                </a:solidFill>
-                <a:latin typeface="Arial"/>
-              </a:rPr>
-              <a:t>Optimize the Reward, not accuracy</a:t>
-            </a:r>
-          </a:p>
-          <a:p>
-            <a:pPr algn="l">
-              <a:spcBef>
-                <a:spcPts val="0"/>
-              </a:spcBef>
-              <a:spcAft>
-                <a:spcPts val="0"/>
-              </a:spcAft>
-              <a:buNone/>
-            </a:pPr>
-            <a:r>
-              <a:rPr sz="1050" b="0" i="0">
-                <a:solidFill>
-                  <a:srgbClr val="505759"/>
-                </a:solidFill>
-                <a:latin typeface="Arial"/>
-              </a:rPr>
-              <a:t>Tune the decision threshold to maximize prevalence-weighted payoff — accuracy will look worse and that's fine.</a:t>
-            </a:r>
-          </a:p>
-        </p:txBody>
-      </p:sp>
-      <p:sp>
-        <p:nvSpPr>
-          <p:cNvPr id="8" name="Rounded Rectangle 7"/>
-          <p:cNvSpPr/>
-          <p:nvPr/>
-        </p:nvSpPr>
-        <p:spPr>
-          <a:xfrm>
-            <a:off x="548640" y="2249424"/>
-            <a:ext cx="6446520" cy="758952"/>
-          </a:xfrm>
-          <a:prstGeom prst="roundRect">
-            <a:avLst>
-              <a:gd name="adj" fmla="val 6000"/>
-            </a:avLst>
-          </a:prstGeom>
-          <a:solidFill>
-            <a:srgbClr val="F2F4F4"/>
-          </a:solidFill>
-          <a:ln>
-            <a:noFill/>
-          </a:ln>
-          <a:effectLst/>
-        </p:spPr>
-        <p:style>
-          <a:lnRef idx="1">
-            <a:schemeClr val="accent1"/>
-          </a:lnRef>
-          <a:fillRef idx="3">
-            <a:schemeClr val="accent1"/>
-          </a:fillRef>
-          <a:effectRef idx="2">
-            <a:schemeClr val="accent1"/>
-          </a:effectRef>
-          <a:fontRef idx="minor">
-            <a:schemeClr val="lt1"/>
-          </a:fontRef>
-        </p:style>
-        <p:txBody>
-          <a:bodyPr rtlCol="0" anchor="ctr"/>
-          <a:lstStyle/>
-          <a:p>
-            <a:pPr algn="ctr"/>
-          </a:p>
-        </p:txBody>
-      </p:sp>
-      <p:sp>
-        <p:nvSpPr>
-          <p:cNvPr id="9" name="Rounded Rectangle 8"/>
-          <p:cNvSpPr/>
-          <p:nvPr/>
-        </p:nvSpPr>
-        <p:spPr>
-          <a:xfrm>
-            <a:off x="685800" y="2395728"/>
-            <a:ext cx="457200" cy="457200"/>
-          </a:xfrm>
-          <a:prstGeom prst="roundRect">
-            <a:avLst>
-              <a:gd name="adj" fmla="val 25000"/>
-            </a:avLst>
-          </a:prstGeom>
-          <a:solidFill>
-            <a:srgbClr val="C8102E"/>
-          </a:solidFill>
-          <a:ln>
-            <a:noFill/>
-          </a:ln>
-          <a:effectLst/>
-        </p:spPr>
-        <p:style>
-          <a:lnRef idx="1">
-            <a:schemeClr val="accent1"/>
-          </a:lnRef>
-          <a:fillRef idx="3">
-            <a:schemeClr val="accent1"/>
-          </a:fillRef>
-          <a:effectRef idx="2">
-            <a:schemeClr val="accent1"/>
-          </a:effectRef>
-          <a:fontRef idx="minor">
-            <a:schemeClr val="lt1"/>
-          </a:fontRef>
-        </p:style>
-        <p:txBody>
-          <a:bodyPr rtlCol="0" anchor="ctr"/>
-          <a:lstStyle/>
-          <a:p>
-            <a:pPr algn="ctr"/>
-            <a:r>
-              <a:rPr b="1" sz="1500">
-                <a:solidFill>
-                  <a:srgbClr val="FFFFFF"/>
-                </a:solidFill>
-                <a:latin typeface="Arial"/>
-              </a:rPr>
-              <a:t>2</a:t>
-            </a:r>
-          </a:p>
-        </p:txBody>
-      </p:sp>
-      <p:sp>
-        <p:nvSpPr>
-          <p:cNvPr id="10" name="TextBox 9"/>
-          <p:cNvSpPr txBox="1"/>
-          <p:nvPr/>
-        </p:nvSpPr>
-        <p:spPr>
-          <a:xfrm>
-            <a:off x="1325880" y="2249424"/>
-            <a:ext cx="5532120" cy="758952"/>
-          </a:xfrm>
-          <a:prstGeom prst="rect">
-            <a:avLst/>
-          </a:prstGeom>
-          <a:noFill/>
-        </p:spPr>
-        <p:txBody>
-          <a:bodyPr wrap="square" anchor="ctr" lIns="45720" rIns="45720" tIns="18288" bIns="18288">
-            <a:spAutoFit/>
-          </a:bodyPr>
-          <a:lstStyle/>
-          <a:p>
-            <a:pPr algn="l">
-              <a:spcBef>
-                <a:spcPts val="0"/>
-              </a:spcBef>
-              <a:spcAft>
-                <a:spcPts val="100"/>
-              </a:spcAft>
-              <a:buNone/>
-            </a:pPr>
-            <a:r>
-              <a:rPr sz="1300" b="1" i="0">
-                <a:solidFill>
-                  <a:srgbClr val="2A2E30"/>
-                </a:solidFill>
-                <a:latin typeface="Arial"/>
-              </a:rPr>
-              <a:t>Protect recall on the rare class</a:t>
-            </a:r>
-          </a:p>
-          <a:p>
-            <a:pPr algn="l">
-              <a:spcBef>
-                <a:spcPts val="0"/>
-              </a:spcBef>
-              <a:spcAft>
-                <a:spcPts val="0"/>
-              </a:spcAft>
-              <a:buNone/>
-            </a:pPr>
-            <a:r>
-              <a:rPr sz="1050" b="0" i="0">
-                <a:solidFill>
-                  <a:srgbClr val="505759"/>
-                </a:solidFill>
-                <a:latin typeface="Arial"/>
-              </a:rPr>
-              <a:t>Each caught positive is worth 1/p − 1; a missed one costs −1. Missing impairment is expensive.</a:t>
-            </a:r>
-          </a:p>
-        </p:txBody>
-      </p:sp>
-      <p:sp>
-        <p:nvSpPr>
-          <p:cNvPr id="11" name="Rounded Rectangle 10"/>
-          <p:cNvSpPr/>
-          <p:nvPr/>
-        </p:nvSpPr>
-        <p:spPr>
-          <a:xfrm>
-            <a:off x="548640" y="3081528"/>
-            <a:ext cx="6446520" cy="758952"/>
-          </a:xfrm>
-          <a:prstGeom prst="roundRect">
-            <a:avLst>
-              <a:gd name="adj" fmla="val 6000"/>
-            </a:avLst>
-          </a:prstGeom>
-          <a:solidFill>
-            <a:srgbClr val="F2F4F4"/>
-          </a:solidFill>
-          <a:ln>
-            <a:noFill/>
-          </a:ln>
-          <a:effectLst/>
-        </p:spPr>
-        <p:style>
-          <a:lnRef idx="1">
-            <a:schemeClr val="accent1"/>
-          </a:lnRef>
-          <a:fillRef idx="3">
-            <a:schemeClr val="accent1"/>
-          </a:fillRef>
-          <a:effectRef idx="2">
-            <a:schemeClr val="accent1"/>
-          </a:effectRef>
-          <a:fontRef idx="minor">
-            <a:schemeClr val="lt1"/>
-          </a:fontRef>
-        </p:style>
-        <p:txBody>
-          <a:bodyPr rtlCol="0" anchor="ctr"/>
-          <a:lstStyle/>
-          <a:p>
-            <a:pPr algn="ctr"/>
-          </a:p>
-        </p:txBody>
-      </p:sp>
-      <p:sp>
-        <p:nvSpPr>
-          <p:cNvPr id="12" name="Rounded Rectangle 11"/>
-          <p:cNvSpPr/>
-          <p:nvPr/>
-        </p:nvSpPr>
-        <p:spPr>
-          <a:xfrm>
-            <a:off x="685800" y="3227832"/>
-            <a:ext cx="457200" cy="457200"/>
-          </a:xfrm>
-          <a:prstGeom prst="roundRect">
-            <a:avLst>
-              <a:gd name="adj" fmla="val 25000"/>
-            </a:avLst>
-          </a:prstGeom>
-          <a:solidFill>
-            <a:srgbClr val="C8102E"/>
-          </a:solidFill>
-          <a:ln>
-            <a:noFill/>
-          </a:ln>
-          <a:effectLst/>
-        </p:spPr>
-        <p:style>
-          <a:lnRef idx="1">
-            <a:schemeClr val="accent1"/>
-          </a:lnRef>
-          <a:fillRef idx="3">
-            <a:schemeClr val="accent1"/>
-          </a:fillRef>
-          <a:effectRef idx="2">
-            <a:schemeClr val="accent1"/>
-          </a:effectRef>
-          <a:fontRef idx="minor">
-            <a:schemeClr val="lt1"/>
-          </a:fontRef>
-        </p:style>
-        <p:txBody>
-          <a:bodyPr rtlCol="0" anchor="ctr"/>
-          <a:lstStyle/>
-          <a:p>
-            <a:pPr algn="ctr"/>
-            <a:r>
-              <a:rPr b="1" sz="1500">
-                <a:solidFill>
-                  <a:srgbClr val="FFFFFF"/>
-                </a:solidFill>
-                <a:latin typeface="Arial"/>
-              </a:rPr>
-              <a:t>3</a:t>
-            </a:r>
-          </a:p>
-        </p:txBody>
-      </p:sp>
-      <p:sp>
-        <p:nvSpPr>
-          <p:cNvPr id="13" name="TextBox 12"/>
-          <p:cNvSpPr txBox="1"/>
-          <p:nvPr/>
-        </p:nvSpPr>
-        <p:spPr>
-          <a:xfrm>
-            <a:off x="1325880" y="3081528"/>
-            <a:ext cx="5532120" cy="758952"/>
-          </a:xfrm>
-          <a:prstGeom prst="rect">
-            <a:avLst/>
-          </a:prstGeom>
-          <a:noFill/>
-        </p:spPr>
-        <p:txBody>
-          <a:bodyPr wrap="square" anchor="ctr" lIns="45720" rIns="45720" tIns="18288" bIns="18288">
-            <a:spAutoFit/>
-          </a:bodyPr>
-          <a:lstStyle/>
-          <a:p>
-            <a:pPr algn="l">
-              <a:spcBef>
-                <a:spcPts val="0"/>
-              </a:spcBef>
-              <a:spcAft>
-                <a:spcPts val="100"/>
-              </a:spcAft>
-              <a:buNone/>
-            </a:pPr>
-            <a:r>
-              <a:rPr sz="1300" b="1" i="0">
-                <a:solidFill>
-                  <a:srgbClr val="2A2E30"/>
-                </a:solidFill>
-                <a:latin typeface="Arial"/>
-              </a:rPr>
-              <a:t>Don't lean on age</a:t>
-            </a:r>
-          </a:p>
-          <a:p>
-            <a:pPr algn="l">
-              <a:spcBef>
-                <a:spcPts val="0"/>
-              </a:spcBef>
-              <a:spcAft>
-                <a:spcPts val="0"/>
-              </a:spcAft>
-              <a:buNone/>
-            </a:pPr>
-            <a:r>
-              <a:rPr sz="1050" b="0" i="0">
-                <a:solidFill>
-                  <a:srgbClr val="505759"/>
-                </a:solidFill>
-                <a:latin typeface="Arial"/>
-              </a:rPr>
-              <a:t>The age-aware AUROCs strip the age shortcut. Features must carry real signal within an age band.</a:t>
-            </a:r>
-          </a:p>
-        </p:txBody>
-      </p:sp>
-      <p:sp>
-        <p:nvSpPr>
-          <p:cNvPr id="14" name="Rounded Rectangle 13"/>
-          <p:cNvSpPr/>
-          <p:nvPr/>
-        </p:nvSpPr>
-        <p:spPr>
-          <a:xfrm>
-            <a:off x="548640" y="3913632"/>
-            <a:ext cx="6446520" cy="758952"/>
-          </a:xfrm>
-          <a:prstGeom prst="roundRect">
-            <a:avLst>
-              <a:gd name="adj" fmla="val 6000"/>
-            </a:avLst>
-          </a:prstGeom>
-          <a:solidFill>
-            <a:srgbClr val="F2F4F4"/>
-          </a:solidFill>
-          <a:ln>
-            <a:noFill/>
-          </a:ln>
-          <a:effectLst/>
-        </p:spPr>
-        <p:style>
-          <a:lnRef idx="1">
-            <a:schemeClr val="accent1"/>
-          </a:lnRef>
-          <a:fillRef idx="3">
-            <a:schemeClr val="accent1"/>
-          </a:fillRef>
-          <a:effectRef idx="2">
-            <a:schemeClr val="accent1"/>
-          </a:effectRef>
-          <a:fontRef idx="minor">
-            <a:schemeClr val="lt1"/>
-          </a:fontRef>
-        </p:style>
-        <p:txBody>
-          <a:bodyPr rtlCol="0" anchor="ctr"/>
-          <a:lstStyle/>
-          <a:p>
-            <a:pPr algn="ctr"/>
-          </a:p>
-        </p:txBody>
-      </p:sp>
-      <p:sp>
-        <p:nvSpPr>
-          <p:cNvPr id="15" name="Rounded Rectangle 14"/>
-          <p:cNvSpPr/>
-          <p:nvPr/>
-        </p:nvSpPr>
-        <p:spPr>
-          <a:xfrm>
-            <a:off x="685800" y="4059936"/>
-            <a:ext cx="457200" cy="457200"/>
-          </a:xfrm>
-          <a:prstGeom prst="roundRect">
-            <a:avLst>
-              <a:gd name="adj" fmla="val 25000"/>
-            </a:avLst>
-          </a:prstGeom>
-          <a:solidFill>
-            <a:srgbClr val="C8102E"/>
-          </a:solidFill>
-          <a:ln>
-            <a:noFill/>
-          </a:ln>
-          <a:effectLst/>
-        </p:spPr>
-        <p:style>
-          <a:lnRef idx="1">
-            <a:schemeClr val="accent1"/>
-          </a:lnRef>
-          <a:fillRef idx="3">
-            <a:schemeClr val="accent1"/>
-          </a:fillRef>
-          <a:effectRef idx="2">
-            <a:schemeClr val="accent1"/>
-          </a:effectRef>
-          <a:fontRef idx="minor">
-            <a:schemeClr val="lt1"/>
-          </a:fontRef>
-        </p:style>
-        <p:txBody>
-          <a:bodyPr rtlCol="0" anchor="ctr"/>
-          <a:lstStyle/>
-          <a:p>
-            <a:pPr algn="ctr"/>
-            <a:r>
-              <a:rPr b="1" sz="1500">
-                <a:solidFill>
-                  <a:srgbClr val="FFFFFF"/>
-                </a:solidFill>
-                <a:latin typeface="Arial"/>
-              </a:rPr>
-              <a:t>4</a:t>
-            </a:r>
-          </a:p>
-        </p:txBody>
-      </p:sp>
-      <p:sp>
-        <p:nvSpPr>
-          <p:cNvPr id="16" name="TextBox 15"/>
-          <p:cNvSpPr txBox="1"/>
-          <p:nvPr/>
-        </p:nvSpPr>
-        <p:spPr>
-          <a:xfrm>
-            <a:off x="1325880" y="3913632"/>
-            <a:ext cx="5532120" cy="758952"/>
-          </a:xfrm>
-          <a:prstGeom prst="rect">
-            <a:avLst/>
-          </a:prstGeom>
-          <a:noFill/>
-        </p:spPr>
-        <p:txBody>
-          <a:bodyPr wrap="square" anchor="ctr" lIns="45720" rIns="45720" tIns="18288" bIns="18288">
-            <a:spAutoFit/>
-          </a:bodyPr>
-          <a:lstStyle/>
-          <a:p>
-            <a:pPr algn="l">
-              <a:spcBef>
-                <a:spcPts val="0"/>
-              </a:spcBef>
-              <a:spcAft>
-                <a:spcPts val="100"/>
-              </a:spcAft>
-              <a:buNone/>
-            </a:pPr>
-            <a:r>
-              <a:rPr sz="1300" b="1" i="0">
-                <a:solidFill>
-                  <a:srgbClr val="2A2E30"/>
-                </a:solidFill>
-                <a:latin typeface="Arial"/>
-              </a:rPr>
-              <a:t>Validate with the official code</a:t>
-            </a:r>
-          </a:p>
-          <a:p>
-            <a:pPr algn="l">
-              <a:spcBef>
-                <a:spcPts val="0"/>
-              </a:spcBef>
-              <a:spcAft>
-                <a:spcPts val="0"/>
-              </a:spcAft>
-              <a:buNone/>
-            </a:pPr>
-            <a:r>
-              <a:rPr sz="1050" b="0" i="0">
-                <a:solidFill>
-                  <a:srgbClr val="505759"/>
-                </a:solidFill>
-                <a:latin typeface="Arial"/>
-              </a:rPr>
-              <a:t>Score cross-validation folds with evaluate_model.py so our internal numbers match the leaderboard.</a:t>
-            </a:r>
-          </a:p>
-        </p:txBody>
-      </p:sp>
-      <p:sp>
-        <p:nvSpPr>
-          <p:cNvPr id="17" name="TextBox 16"/>
-          <p:cNvSpPr txBox="1"/>
-          <p:nvPr/>
-        </p:nvSpPr>
-        <p:spPr>
-          <a:xfrm>
-            <a:off x="548640" y="4828032"/>
-            <a:ext cx="6035040" cy="228600"/>
-          </a:xfrm>
-          <a:prstGeom prst="rect">
-            <a:avLst/>
-          </a:prstGeom>
-          <a:noFill/>
-        </p:spPr>
-        <p:txBody>
-          <a:bodyPr wrap="square" anchor="t" lIns="45720" rIns="45720" tIns="18288" bIns="18288">
-            <a:spAutoFit/>
-          </a:bodyPr>
-          <a:lstStyle/>
-          <a:p>
-            <a:pPr algn="l">
-              <a:spcBef>
-                <a:spcPts val="0"/>
-              </a:spcBef>
-              <a:spcAft>
-                <a:spcPts val="0"/>
-              </a:spcAft>
-              <a:buNone/>
-            </a:pPr>
-            <a:r>
-              <a:rPr sz="800" b="0" i="0">
-                <a:solidFill>
-                  <a:srgbClr val="898D8D"/>
-                </a:solidFill>
-                <a:latin typeface="Arial"/>
-              </a:rPr>
-              <a:t>PhysioNet Challenge 2026  ·  Scoring Metrics</a:t>
+              <a:t>The dataset behind the metric</a:t>
             </a:r>
           </a:p>
         </p:txBody>
@@ -23918,1403 +23298,6 @@
 </file>
 
 <file path=ppt/slides/slide17.xml><?xml version="1.0" encoding="utf-8"?>
-<p:sld xmlns:a="http://schemas.openxmlformats.org/drawingml/2006/main" xmlns:p="http://schemas.openxmlformats.org/presentationml/2006/main" xmlns:r="http://schemas.openxmlformats.org/officeDocument/2006/relationships">
-  <p:cSld>
-    <p:spTree>
-      <p:nvGrpSpPr>
-        <p:cNvPr id="1" name=""/>
-        <p:cNvGrpSpPr/>
-        <p:nvPr/>
-      </p:nvGrpSpPr>
-      <p:grpSpPr/>
-      <p:sp>
-        <p:nvSpPr>
-          <p:cNvPr id="2" name="Title 1"/>
-          <p:cNvSpPr>
-            <a:spLocks noGrp="1"/>
-          </p:cNvSpPr>
-          <p:nvPr>
-            <p:ph type="title"/>
-          </p:nvPr>
-        </p:nvSpPr>
-        <p:spPr/>
-        <p:txBody>
-          <a:bodyPr/>
-          <a:lstStyle/>
-          <a:p>
-            <a:r>
-              <a:rPr b="1">
-                <a:latin typeface="Arial"/>
-              </a:rPr>
-              <a:t>References</a:t>
-            </a:r>
-          </a:p>
-        </p:txBody>
-      </p:sp>
-      <p:sp>
-        <p:nvSpPr>
-          <p:cNvPr id="3" name="Content Placeholder 2"/>
-          <p:cNvSpPr>
-            <a:spLocks noGrp="1"/>
-          </p:cNvSpPr>
-          <p:nvPr>
-            <p:ph idx="1"/>
-          </p:nvPr>
-        </p:nvSpPr>
-        <p:spPr/>
-        <p:txBody>
-          <a:bodyPr/>
-          <a:lstStyle/>
-          <a:p/>
-        </p:txBody>
-      </p:sp>
-      <p:sp>
-        <p:nvSpPr>
-          <p:cNvPr id="4" name="TextBox 3"/>
-          <p:cNvSpPr txBox="1"/>
-          <p:nvPr/>
-        </p:nvSpPr>
-        <p:spPr>
-          <a:xfrm>
-            <a:off x="548640" y="1024128"/>
-            <a:ext cx="6446520" cy="274320"/>
-          </a:xfrm>
-          <a:prstGeom prst="rect">
-            <a:avLst/>
-          </a:prstGeom>
-          <a:noFill/>
-        </p:spPr>
-        <p:txBody>
-          <a:bodyPr wrap="square" anchor="t" lIns="45720" rIns="45720" tIns="18288" bIns="18288">
-            <a:spAutoFit/>
-          </a:bodyPr>
-          <a:lstStyle/>
-          <a:p>
-            <a:pPr algn="l">
-              <a:spcBef>
-                <a:spcPts val="0"/>
-              </a:spcBef>
-              <a:spcAft>
-                <a:spcPts val="0"/>
-              </a:spcAft>
-              <a:buNone/>
-            </a:pPr>
-            <a:r>
-              <a:rPr sz="1100" b="1" i="0">
-                <a:solidFill>
-                  <a:srgbClr val="C8102E"/>
-                </a:solidFill>
-                <a:latin typeface="Arial"/>
-              </a:rPr>
-              <a:t>SOURCES</a:t>
-            </a:r>
-          </a:p>
-        </p:txBody>
-      </p:sp>
-      <p:sp>
-        <p:nvSpPr>
-          <p:cNvPr id="5" name="TextBox 4"/>
-          <p:cNvSpPr txBox="1"/>
-          <p:nvPr/>
-        </p:nvSpPr>
-        <p:spPr>
-          <a:xfrm>
-            <a:off x="548640" y="1417320"/>
-            <a:ext cx="6446520" cy="3108960"/>
-          </a:xfrm>
-          <a:prstGeom prst="rect">
-            <a:avLst/>
-          </a:prstGeom>
-          <a:noFill/>
-        </p:spPr>
-        <p:txBody>
-          <a:bodyPr wrap="square" anchor="t" lIns="45720" rIns="45720" tIns="18288" bIns="18288">
-            <a:spAutoFit/>
-          </a:bodyPr>
-          <a:lstStyle/>
-          <a:p>
-            <a:pPr>
-              <a:spcBef>
-                <a:spcPts val="600"/>
-              </a:spcBef>
-              <a:spcAft>
-                <a:spcPts val="100"/>
-              </a:spcAft>
-              <a:buNone/>
-            </a:pPr>
-            <a:r>
-              <a:rPr sz="1300" b="1">
-                <a:solidFill>
-                  <a:srgbClr val="C8102E"/>
-                </a:solidFill>
-                <a:latin typeface="Arial"/>
-              </a:rPr>
-              <a:t>Challenge website  —  </a:t>
-            </a:r>
-            <a:r>
-              <a:rPr sz="1300" b="0">
-                <a:solidFill>
-                  <a:srgbClr val="2A2E30"/>
-                </a:solidFill>
-                <a:latin typeface="Arial"/>
-              </a:rPr>
-              <a:t>George B. Moody PhysioNet Challenge 2026</a:t>
-            </a:r>
-          </a:p>
-          <a:p>
-            <a:pPr algn="l">
-              <a:spcBef>
-                <a:spcPts val="0"/>
-              </a:spcBef>
-              <a:spcAft>
-                <a:spcPts val="600"/>
-              </a:spcAft>
-              <a:buNone/>
-            </a:pPr>
-            <a:r>
-              <a:rPr sz="1100" b="0" i="0">
-                <a:solidFill>
-                  <a:srgbClr val="346583"/>
-                </a:solidFill>
-                <a:latin typeface="Arial"/>
-              </a:rPr>
-              <a:t>physionetchallenges.org/2026/</a:t>
-            </a:r>
-          </a:p>
-          <a:p>
-            <a:pPr>
-              <a:spcBef>
-                <a:spcPts val="600"/>
-              </a:spcBef>
-              <a:spcAft>
-                <a:spcPts val="100"/>
-              </a:spcAft>
-              <a:buNone/>
-            </a:pPr>
-            <a:r>
-              <a:rPr sz="1300" b="1">
-                <a:solidFill>
-                  <a:srgbClr val="C8102E"/>
-                </a:solidFill>
-                <a:latin typeface="Arial"/>
-              </a:rPr>
-              <a:t>Evaluation code  —  </a:t>
-            </a:r>
-            <a:r>
-              <a:rPr sz="1300" b="0">
-                <a:solidFill>
-                  <a:srgbClr val="2A2E30"/>
-                </a:solidFill>
-                <a:latin typeface="Arial"/>
-              </a:rPr>
-              <a:t>Official scoring implementation</a:t>
-            </a:r>
-          </a:p>
-          <a:p>
-            <a:pPr algn="l">
-              <a:spcBef>
-                <a:spcPts val="0"/>
-              </a:spcBef>
-              <a:spcAft>
-                <a:spcPts val="600"/>
-              </a:spcAft>
-              <a:buNone/>
-            </a:pPr>
-            <a:r>
-              <a:rPr sz="1100" b="0" i="0">
-                <a:solidFill>
-                  <a:srgbClr val="346583"/>
-                </a:solidFill>
-                <a:latin typeface="Arial"/>
-              </a:rPr>
-              <a:t>github.com/physionetchallenges/evaluation-2026</a:t>
-            </a:r>
-          </a:p>
-          <a:p>
-            <a:pPr>
-              <a:spcBef>
-                <a:spcPts val="600"/>
-              </a:spcBef>
-              <a:spcAft>
-                <a:spcPts val="100"/>
-              </a:spcAft>
-              <a:buNone/>
-            </a:pPr>
-            <a:r>
-              <a:rPr sz="1300" b="1">
-                <a:solidFill>
-                  <a:srgbClr val="C8102E"/>
-                </a:solidFill>
-                <a:latin typeface="Arial"/>
-              </a:rPr>
-              <a:t>Example code  —  </a:t>
-            </a:r>
-            <a:r>
-              <a:rPr sz="1300" b="0">
-                <a:solidFill>
-                  <a:srgbClr val="2A2E30"/>
-                </a:solidFill>
-                <a:latin typeface="Arial"/>
-              </a:rPr>
-              <a:t>Python entry template</a:t>
-            </a:r>
-          </a:p>
-          <a:p>
-            <a:pPr algn="l">
-              <a:spcBef>
-                <a:spcPts val="0"/>
-              </a:spcBef>
-              <a:spcAft>
-                <a:spcPts val="600"/>
-              </a:spcAft>
-              <a:buNone/>
-            </a:pPr>
-            <a:r>
-              <a:rPr sz="1100" b="0" i="0">
-                <a:solidFill>
-                  <a:srgbClr val="346583"/>
-                </a:solidFill>
-                <a:latin typeface="Arial"/>
-              </a:rPr>
-              <a:t>github.com/physionetchallenges/python-example-2026</a:t>
-            </a:r>
-          </a:p>
-          <a:p>
-            <a:pPr>
-              <a:spcBef>
-                <a:spcPts val="600"/>
-              </a:spcBef>
-              <a:spcAft>
-                <a:spcPts val="100"/>
-              </a:spcAft>
-              <a:buNone/>
-            </a:pPr>
-            <a:r>
-              <a:rPr sz="1300" b="1">
-                <a:solidFill>
-                  <a:srgbClr val="C8102E"/>
-                </a:solidFill>
-                <a:latin typeface="Arial"/>
-              </a:rPr>
-              <a:t>This deck  —  </a:t>
-            </a:r>
-            <a:r>
-              <a:rPr sz="1300" b="0">
-                <a:solidFill>
-                  <a:srgbClr val="2A2E30"/>
-                </a:solidFill>
-                <a:latin typeface="Arial"/>
-              </a:rPr>
-              <a:t>Metric definitions taken directly from evaluate_model.py in our repository</a:t>
-            </a:r>
-          </a:p>
-        </p:txBody>
-      </p:sp>
-      <p:sp>
-        <p:nvSpPr>
-          <p:cNvPr id="6" name="TextBox 5"/>
-          <p:cNvSpPr txBox="1"/>
-          <p:nvPr/>
-        </p:nvSpPr>
-        <p:spPr>
-          <a:xfrm>
-            <a:off x="548640" y="4828032"/>
-            <a:ext cx="6035040" cy="228600"/>
-          </a:xfrm>
-          <a:prstGeom prst="rect">
-            <a:avLst/>
-          </a:prstGeom>
-          <a:noFill/>
-        </p:spPr>
-        <p:txBody>
-          <a:bodyPr wrap="square" anchor="t" lIns="45720" rIns="45720" tIns="18288" bIns="18288">
-            <a:spAutoFit/>
-          </a:bodyPr>
-          <a:lstStyle/>
-          <a:p>
-            <a:pPr algn="l">
-              <a:spcBef>
-                <a:spcPts val="0"/>
-              </a:spcBef>
-              <a:spcAft>
-                <a:spcPts val="0"/>
-              </a:spcAft>
-              <a:buNone/>
-            </a:pPr>
-            <a:r>
-              <a:rPr sz="800" b="0" i="0">
-                <a:solidFill>
-                  <a:srgbClr val="898D8D"/>
-                </a:solidFill>
-                <a:latin typeface="Arial"/>
-              </a:rPr>
-              <a:t>PhysioNet Challenge 2026  ·  Scoring Metrics</a:t>
-            </a:r>
-          </a:p>
-        </p:txBody>
-      </p:sp>
-    </p:spTree>
-  </p:cSld>
-  <p:clrMapOvr>
-    <a:masterClrMapping/>
-  </p:clrMapOvr>
-</p:sld>
-</file>
-
-<file path=ppt/slides/slide18.xml><?xml version="1.0" encoding="utf-8"?>
-<p:sld xmlns:a="http://schemas.openxmlformats.org/drawingml/2006/main" xmlns:p="http://schemas.openxmlformats.org/presentationml/2006/main" xmlns:r="http://schemas.openxmlformats.org/officeDocument/2006/relationships">
-  <p:cSld>
-    <p:spTree>
-      <p:nvGrpSpPr>
-        <p:cNvPr id="1" name=""/>
-        <p:cNvGrpSpPr/>
-        <p:nvPr/>
-      </p:nvGrpSpPr>
-      <p:grpSpPr/>
-      <p:sp>
-        <p:nvSpPr>
-          <p:cNvPr id="2" name="Title 1"/>
-          <p:cNvSpPr>
-            <a:spLocks noGrp="1"/>
-          </p:cNvSpPr>
-          <p:nvPr>
-            <p:ph type="title"/>
-          </p:nvPr>
-        </p:nvSpPr>
-        <p:spPr/>
-        <p:txBody>
-          <a:bodyPr/>
-          <a:lstStyle/>
-          <a:p>
-            <a:r>
-              <a:rPr b="1">
-                <a:solidFill>
-                  <a:srgbClr val="FFFFFF"/>
-                </a:solidFill>
-                <a:latin typeface="Arial"/>
-              </a:rPr>
-              <a:t>Questions?</a:t>
-            </a:r>
-          </a:p>
-        </p:txBody>
-      </p:sp>
-      <p:sp>
-        <p:nvSpPr>
-          <p:cNvPr id="3" name="TextBox 2"/>
-          <p:cNvSpPr txBox="1"/>
-          <p:nvPr/>
-        </p:nvSpPr>
-        <p:spPr>
-          <a:xfrm>
-            <a:off x="548640" y="1417320"/>
-            <a:ext cx="7863840" cy="1280160"/>
-          </a:xfrm>
-          <a:prstGeom prst="rect">
-            <a:avLst/>
-          </a:prstGeom>
-          <a:noFill/>
-        </p:spPr>
-        <p:txBody>
-          <a:bodyPr wrap="square" anchor="t" lIns="45720" rIns="45720" tIns="18288" bIns="18288">
-            <a:spAutoFit/>
-          </a:bodyPr>
-          <a:lstStyle/>
-          <a:p>
-            <a:pPr algn="l">
-              <a:spcBef>
-                <a:spcPts val="0"/>
-              </a:spcBef>
-              <a:spcAft>
-                <a:spcPts val="400"/>
-              </a:spcAft>
-              <a:buNone/>
-            </a:pPr>
-            <a:r>
-              <a:rPr sz="1200" b="1" i="0">
-                <a:solidFill>
-                  <a:srgbClr val="CEB888"/>
-                </a:solidFill>
-                <a:latin typeface="Arial"/>
-              </a:rPr>
-              <a:t>Key takeaway</a:t>
-            </a:r>
-          </a:p>
-          <a:p>
-            <a:pPr algn="l">
-              <a:spcBef>
-                <a:spcPts val="0"/>
-              </a:spcBef>
-              <a:spcAft>
-                <a:spcPts val="600"/>
-              </a:spcAft>
-              <a:buNone/>
-            </a:pPr>
-            <a:r>
-              <a:rPr sz="1700" b="1" i="0">
-                <a:solidFill>
-                  <a:srgbClr val="FFFFFF"/>
-                </a:solidFill>
-                <a:latin typeface="Arial"/>
-              </a:rPr>
-              <a:t>Optimize for the Reward — catch the rare cases, and don't lean on age.</a:t>
-            </a:r>
-          </a:p>
-          <a:p>
-            <a:pPr algn="l">
-              <a:spcBef>
-                <a:spcPts val="0"/>
-              </a:spcBef>
-              <a:spcAft>
-                <a:spcPts val="0"/>
-              </a:spcAft>
-              <a:buNone/>
-            </a:pPr>
-            <a:r>
-              <a:rPr sz="1100" b="0" i="0">
-                <a:solidFill>
-                  <a:srgbClr val="FFFFFF"/>
-                </a:solidFill>
-                <a:latin typeface="Arial"/>
-              </a:rPr>
-              <a:t>Arshia Ilaty  ·  SDG  ·  PhysioNet Challenge 2026</a:t>
-            </a:r>
-          </a:p>
-        </p:txBody>
-      </p:sp>
-    </p:spTree>
-  </p:cSld>
-  <p:clrMapOvr>
-    <a:masterClrMapping/>
-  </p:clrMapOvr>
-</p:sld>
-</file>
-
-<file path=ppt/slides/slide19.xml><?xml version="1.0" encoding="utf-8"?>
-<p:sld xmlns:a="http://schemas.openxmlformats.org/drawingml/2006/main" xmlns:p="http://schemas.openxmlformats.org/presentationml/2006/main" xmlns:r="http://schemas.openxmlformats.org/officeDocument/2006/relationships">
-  <p:cSld>
-    <p:spTree>
-      <p:nvGrpSpPr>
-        <p:cNvPr id="1" name=""/>
-        <p:cNvGrpSpPr/>
-        <p:nvPr/>
-      </p:nvGrpSpPr>
-      <p:grpSpPr/>
-      <p:sp>
-        <p:nvSpPr>
-          <p:cNvPr id="2" name="Title 1"/>
-          <p:cNvSpPr>
-            <a:spLocks noGrp="1"/>
-          </p:cNvSpPr>
-          <p:nvPr>
-            <p:ph type="title"/>
-          </p:nvPr>
-        </p:nvSpPr>
-        <p:spPr/>
-        <p:txBody>
-          <a:bodyPr/>
-          <a:lstStyle/>
-          <a:p>
-            <a:r>
-              <a:t>The dataset behind the metric</a:t>
-            </a:r>
-          </a:p>
-        </p:txBody>
-      </p:sp>
-    </p:spTree>
-  </p:cSld>
-  <p:clrMapOvr>
-    <a:masterClrMapping/>
-  </p:clrMapOvr>
-</p:sld>
-</file>
-
-<file path=ppt/slides/slide2.xml><?xml version="1.0" encoding="utf-8"?>
-<p:sld xmlns:a="http://schemas.openxmlformats.org/drawingml/2006/main" xmlns:p="http://schemas.openxmlformats.org/presentationml/2006/main" xmlns:r="http://schemas.openxmlformats.org/officeDocument/2006/relationships">
-  <p:cSld>
-    <p:spTree>
-      <p:nvGrpSpPr>
-        <p:cNvPr id="1" name=""/>
-        <p:cNvGrpSpPr/>
-        <p:nvPr/>
-      </p:nvGrpSpPr>
-      <p:grpSpPr/>
-      <p:sp>
-        <p:nvSpPr>
-          <p:cNvPr id="2" name="Title 1"/>
-          <p:cNvSpPr>
-            <a:spLocks noGrp="1"/>
-          </p:cNvSpPr>
-          <p:nvPr>
-            <p:ph type="title"/>
-          </p:nvPr>
-        </p:nvSpPr>
-        <p:spPr/>
-        <p:txBody>
-          <a:bodyPr/>
-          <a:lstStyle/>
-          <a:p>
-            <a:r>
-              <a:rPr b="1">
-                <a:latin typeface="Arial"/>
-              </a:rPr>
-              <a:t>What we'll cover</a:t>
-            </a:r>
-          </a:p>
-        </p:txBody>
-      </p:sp>
-      <p:sp>
-        <p:nvSpPr>
-          <p:cNvPr id="3" name="Content Placeholder 2"/>
-          <p:cNvSpPr>
-            <a:spLocks noGrp="1"/>
-          </p:cNvSpPr>
-          <p:nvPr>
-            <p:ph idx="1"/>
-          </p:nvPr>
-        </p:nvSpPr>
-        <p:spPr/>
-        <p:txBody>
-          <a:bodyPr/>
-          <a:lstStyle/>
-          <a:p/>
-        </p:txBody>
-      </p:sp>
-      <p:sp>
-        <p:nvSpPr>
-          <p:cNvPr id="4" name="TextBox 3"/>
-          <p:cNvSpPr txBox="1"/>
-          <p:nvPr/>
-        </p:nvSpPr>
-        <p:spPr>
-          <a:xfrm>
-            <a:off x="548640" y="1024128"/>
-            <a:ext cx="6446520" cy="274320"/>
-          </a:xfrm>
-          <a:prstGeom prst="rect">
-            <a:avLst/>
-          </a:prstGeom>
-          <a:noFill/>
-        </p:spPr>
-        <p:txBody>
-          <a:bodyPr wrap="square" anchor="t" lIns="45720" rIns="45720" tIns="18288" bIns="18288">
-            <a:spAutoFit/>
-          </a:bodyPr>
-          <a:lstStyle/>
-          <a:p>
-            <a:pPr algn="l">
-              <a:spcBef>
-                <a:spcPts val="0"/>
-              </a:spcBef>
-              <a:spcAft>
-                <a:spcPts val="0"/>
-              </a:spcAft>
-              <a:buNone/>
-            </a:pPr>
-            <a:r>
-              <a:rPr sz="1100" b="1" i="0">
-                <a:solidFill>
-                  <a:srgbClr val="C8102E"/>
-                </a:solidFill>
-                <a:latin typeface="Arial"/>
-              </a:rPr>
-              <a:t>AGENDA</a:t>
-            </a:r>
-          </a:p>
-        </p:txBody>
-      </p:sp>
-      <p:sp>
-        <p:nvSpPr>
-          <p:cNvPr id="5" name="Rounded Rectangle 4"/>
-          <p:cNvSpPr/>
-          <p:nvPr/>
-        </p:nvSpPr>
-        <p:spPr>
-          <a:xfrm>
-            <a:off x="548640" y="1417320"/>
-            <a:ext cx="457200" cy="502920"/>
-          </a:xfrm>
-          <a:prstGeom prst="roundRect">
-            <a:avLst>
-              <a:gd name="adj" fmla="val 25000"/>
-            </a:avLst>
-          </a:prstGeom>
-          <a:solidFill>
-            <a:srgbClr val="C8102E"/>
-          </a:solidFill>
-          <a:ln>
-            <a:noFill/>
-          </a:ln>
-          <a:effectLst/>
-        </p:spPr>
-        <p:style>
-          <a:lnRef idx="1">
-            <a:schemeClr val="accent1"/>
-          </a:lnRef>
-          <a:fillRef idx="3">
-            <a:schemeClr val="accent1"/>
-          </a:fillRef>
-          <a:effectRef idx="2">
-            <a:schemeClr val="accent1"/>
-          </a:effectRef>
-          <a:fontRef idx="minor">
-            <a:schemeClr val="lt1"/>
-          </a:fontRef>
-        </p:style>
-        <p:txBody>
-          <a:bodyPr rtlCol="0" anchor="ctr" wrap="square"/>
-          <a:lstStyle/>
-          <a:p>
-            <a:pPr algn="ctr"/>
-            <a:r>
-              <a:rPr b="1" sz="1600">
-                <a:solidFill>
-                  <a:srgbClr val="FFFFFF"/>
-                </a:solidFill>
-                <a:latin typeface="Arial"/>
-              </a:rPr>
-              <a:t>1</a:t>
-            </a:r>
-          </a:p>
-        </p:txBody>
-      </p:sp>
-      <p:sp>
-        <p:nvSpPr>
-          <p:cNvPr id="6" name="TextBox 5"/>
-          <p:cNvSpPr txBox="1"/>
-          <p:nvPr/>
-        </p:nvSpPr>
-        <p:spPr>
-          <a:xfrm>
-            <a:off x="1143000" y="1417320"/>
-            <a:ext cx="5760720" cy="502920"/>
-          </a:xfrm>
-          <a:prstGeom prst="rect">
-            <a:avLst/>
-          </a:prstGeom>
-          <a:noFill/>
-        </p:spPr>
-        <p:txBody>
-          <a:bodyPr wrap="square" anchor="ctr" lIns="45720" rIns="45720" tIns="18288" bIns="18288">
-            <a:spAutoFit/>
-          </a:bodyPr>
-          <a:lstStyle/>
-          <a:p>
-            <a:pPr>
-              <a:spcBef>
-                <a:spcPts val="0"/>
-              </a:spcBef>
-              <a:spcAft>
-                <a:spcPts val="0"/>
-              </a:spcAft>
-              <a:buNone/>
-            </a:pPr>
-            <a:r>
-              <a:rPr sz="1300" b="1">
-                <a:solidFill>
-                  <a:srgbClr val="2A2E30"/>
-                </a:solidFill>
-                <a:latin typeface="Arial"/>
-              </a:rPr>
-              <a:t>The prediction task  </a:t>
-            </a:r>
-            <a:r>
-              <a:rPr sz="1300" b="0">
-                <a:solidFill>
-                  <a:srgbClr val="505759"/>
-                </a:solidFill>
-                <a:latin typeface="Arial"/>
-              </a:rPr>
-              <a:t>What the challenge asks our model to output</a:t>
-            </a:r>
-          </a:p>
-        </p:txBody>
-      </p:sp>
-      <p:sp>
-        <p:nvSpPr>
-          <p:cNvPr id="7" name="Rounded Rectangle 6"/>
-          <p:cNvSpPr/>
-          <p:nvPr/>
-        </p:nvSpPr>
-        <p:spPr>
-          <a:xfrm>
-            <a:off x="548640" y="1892807"/>
-            <a:ext cx="457200" cy="502920"/>
-          </a:xfrm>
-          <a:prstGeom prst="roundRect">
-            <a:avLst>
-              <a:gd name="adj" fmla="val 25000"/>
-            </a:avLst>
-          </a:prstGeom>
-          <a:solidFill>
-            <a:srgbClr val="C8102E"/>
-          </a:solidFill>
-          <a:ln>
-            <a:noFill/>
-          </a:ln>
-          <a:effectLst/>
-        </p:spPr>
-        <p:style>
-          <a:lnRef idx="1">
-            <a:schemeClr val="accent1"/>
-          </a:lnRef>
-          <a:fillRef idx="3">
-            <a:schemeClr val="accent1"/>
-          </a:fillRef>
-          <a:effectRef idx="2">
-            <a:schemeClr val="accent1"/>
-          </a:effectRef>
-          <a:fontRef idx="minor">
-            <a:schemeClr val="lt1"/>
-          </a:fontRef>
-        </p:style>
-        <p:txBody>
-          <a:bodyPr rtlCol="0" anchor="ctr" wrap="square"/>
-          <a:lstStyle/>
-          <a:p>
-            <a:pPr algn="ctr"/>
-            <a:r>
-              <a:rPr b="1" sz="1600">
-                <a:solidFill>
-                  <a:srgbClr val="FFFFFF"/>
-                </a:solidFill>
-                <a:latin typeface="Arial"/>
-              </a:rPr>
-              <a:t>2</a:t>
-            </a:r>
-          </a:p>
-        </p:txBody>
-      </p:sp>
-      <p:sp>
-        <p:nvSpPr>
-          <p:cNvPr id="8" name="TextBox 7"/>
-          <p:cNvSpPr txBox="1"/>
-          <p:nvPr/>
-        </p:nvSpPr>
-        <p:spPr>
-          <a:xfrm>
-            <a:off x="1143000" y="1892807"/>
-            <a:ext cx="5760720" cy="502920"/>
-          </a:xfrm>
-          <a:prstGeom prst="rect">
-            <a:avLst/>
-          </a:prstGeom>
-          <a:noFill/>
-        </p:spPr>
-        <p:txBody>
-          <a:bodyPr wrap="square" anchor="ctr" lIns="45720" rIns="45720" tIns="18288" bIns="18288">
-            <a:spAutoFit/>
-          </a:bodyPr>
-          <a:lstStyle/>
-          <a:p>
-            <a:pPr>
-              <a:spcBef>
-                <a:spcPts val="0"/>
-              </a:spcBef>
-              <a:spcAft>
-                <a:spcPts val="0"/>
-              </a:spcAft>
-              <a:buNone/>
-            </a:pPr>
-            <a:r>
-              <a:rPr sz="1300" b="1">
-                <a:solidFill>
-                  <a:srgbClr val="2A2E30"/>
-                </a:solidFill>
-                <a:latin typeface="Arial"/>
-              </a:rPr>
-              <a:t>Why a custom metric  </a:t>
-            </a:r>
-            <a:r>
-              <a:rPr sz="1300" b="0">
-                <a:solidFill>
-                  <a:srgbClr val="505759"/>
-                </a:solidFill>
-                <a:latin typeface="Arial"/>
-              </a:rPr>
-              <a:t>Class imbalance and age act as confounders</a:t>
-            </a:r>
-          </a:p>
-        </p:txBody>
-      </p:sp>
-      <p:sp>
-        <p:nvSpPr>
-          <p:cNvPr id="9" name="Rounded Rectangle 8"/>
-          <p:cNvSpPr/>
-          <p:nvPr/>
-        </p:nvSpPr>
-        <p:spPr>
-          <a:xfrm>
-            <a:off x="548640" y="2368296"/>
-            <a:ext cx="457200" cy="502920"/>
-          </a:xfrm>
-          <a:prstGeom prst="roundRect">
-            <a:avLst>
-              <a:gd name="adj" fmla="val 25000"/>
-            </a:avLst>
-          </a:prstGeom>
-          <a:solidFill>
-            <a:srgbClr val="C8102E"/>
-          </a:solidFill>
-          <a:ln>
-            <a:noFill/>
-          </a:ln>
-          <a:effectLst/>
-        </p:spPr>
-        <p:style>
-          <a:lnRef idx="1">
-            <a:schemeClr val="accent1"/>
-          </a:lnRef>
-          <a:fillRef idx="3">
-            <a:schemeClr val="accent1"/>
-          </a:fillRef>
-          <a:effectRef idx="2">
-            <a:schemeClr val="accent1"/>
-          </a:effectRef>
-          <a:fontRef idx="minor">
-            <a:schemeClr val="lt1"/>
-          </a:fontRef>
-        </p:style>
-        <p:txBody>
-          <a:bodyPr rtlCol="0" anchor="ctr" wrap="square"/>
-          <a:lstStyle/>
-          <a:p>
-            <a:pPr algn="ctr"/>
-            <a:r>
-              <a:rPr b="1" sz="1600">
-                <a:solidFill>
-                  <a:srgbClr val="FFFFFF"/>
-                </a:solidFill>
-                <a:latin typeface="Arial"/>
-              </a:rPr>
-              <a:t>3</a:t>
-            </a:r>
-          </a:p>
-        </p:txBody>
-      </p:sp>
-      <p:sp>
-        <p:nvSpPr>
-          <p:cNvPr id="10" name="TextBox 9"/>
-          <p:cNvSpPr txBox="1"/>
-          <p:nvPr/>
-        </p:nvSpPr>
-        <p:spPr>
-          <a:xfrm>
-            <a:off x="1143000" y="2368296"/>
-            <a:ext cx="5760720" cy="502920"/>
-          </a:xfrm>
-          <a:prstGeom prst="rect">
-            <a:avLst/>
-          </a:prstGeom>
-          <a:noFill/>
-        </p:spPr>
-        <p:txBody>
-          <a:bodyPr wrap="square" anchor="ctr" lIns="45720" rIns="45720" tIns="18288" bIns="18288">
-            <a:spAutoFit/>
-          </a:bodyPr>
-          <a:lstStyle/>
-          <a:p>
-            <a:pPr>
-              <a:spcBef>
-                <a:spcPts val="0"/>
-              </a:spcBef>
-              <a:spcAft>
-                <a:spcPts val="0"/>
-              </a:spcAft>
-              <a:buNone/>
-            </a:pPr>
-            <a:r>
-              <a:rPr sz="1300" b="1">
-                <a:solidFill>
-                  <a:srgbClr val="2A2E30"/>
-                </a:solidFill>
-                <a:latin typeface="Arial"/>
-              </a:rPr>
-              <a:t>The seven scores  </a:t>
-            </a:r>
-            <a:r>
-              <a:rPr sz="1300" b="0">
-                <a:solidFill>
-                  <a:srgbClr val="505759"/>
-                </a:solidFill>
-                <a:latin typeface="Arial"/>
-              </a:rPr>
-              <a:t>One primary ranking metric, six diagnostics</a:t>
-            </a:r>
-          </a:p>
-        </p:txBody>
-      </p:sp>
-      <p:sp>
-        <p:nvSpPr>
-          <p:cNvPr id="11" name="Rounded Rectangle 10"/>
-          <p:cNvSpPr/>
-          <p:nvPr/>
-        </p:nvSpPr>
-        <p:spPr>
-          <a:xfrm>
-            <a:off x="548640" y="2843784"/>
-            <a:ext cx="457200" cy="502920"/>
-          </a:xfrm>
-          <a:prstGeom prst="roundRect">
-            <a:avLst>
-              <a:gd name="adj" fmla="val 25000"/>
-            </a:avLst>
-          </a:prstGeom>
-          <a:solidFill>
-            <a:srgbClr val="C8102E"/>
-          </a:solidFill>
-          <a:ln>
-            <a:noFill/>
-          </a:ln>
-          <a:effectLst/>
-        </p:spPr>
-        <p:style>
-          <a:lnRef idx="1">
-            <a:schemeClr val="accent1"/>
-          </a:lnRef>
-          <a:fillRef idx="3">
-            <a:schemeClr val="accent1"/>
-          </a:fillRef>
-          <a:effectRef idx="2">
-            <a:schemeClr val="accent1"/>
-          </a:effectRef>
-          <a:fontRef idx="minor">
-            <a:schemeClr val="lt1"/>
-          </a:fontRef>
-        </p:style>
-        <p:txBody>
-          <a:bodyPr rtlCol="0" anchor="ctr" wrap="square"/>
-          <a:lstStyle/>
-          <a:p>
-            <a:pPr algn="ctr"/>
-            <a:r>
-              <a:rPr b="1" sz="1600">
-                <a:solidFill>
-                  <a:srgbClr val="FFFFFF"/>
-                </a:solidFill>
-                <a:latin typeface="Arial"/>
-              </a:rPr>
-              <a:t>4</a:t>
-            </a:r>
-          </a:p>
-        </p:txBody>
-      </p:sp>
-      <p:sp>
-        <p:nvSpPr>
-          <p:cNvPr id="12" name="TextBox 11"/>
-          <p:cNvSpPr txBox="1"/>
-          <p:nvPr/>
-        </p:nvSpPr>
-        <p:spPr>
-          <a:xfrm>
-            <a:off x="1143000" y="2843784"/>
-            <a:ext cx="5760720" cy="502920"/>
-          </a:xfrm>
-          <a:prstGeom prst="rect">
-            <a:avLst/>
-          </a:prstGeom>
-          <a:noFill/>
-        </p:spPr>
-        <p:txBody>
-          <a:bodyPr wrap="square" anchor="ctr" lIns="45720" rIns="45720" tIns="18288" bIns="18288">
-            <a:spAutoFit/>
-          </a:bodyPr>
-          <a:lstStyle/>
-          <a:p>
-            <a:pPr>
-              <a:spcBef>
-                <a:spcPts val="0"/>
-              </a:spcBef>
-              <a:spcAft>
-                <a:spcPts val="0"/>
-              </a:spcAft>
-              <a:buNone/>
-            </a:pPr>
-            <a:r>
-              <a:rPr sz="1300" b="1">
-                <a:solidFill>
-                  <a:srgbClr val="2A2E30"/>
-                </a:solidFill>
-                <a:latin typeface="Arial"/>
-              </a:rPr>
-              <a:t>The Reward metric  </a:t>
-            </a:r>
-            <a:r>
-              <a:rPr sz="1300" b="0">
-                <a:solidFill>
-                  <a:srgbClr val="505759"/>
-                </a:solidFill>
-                <a:latin typeface="Arial"/>
-              </a:rPr>
-              <a:t>Prevalence-weighted payoff — the metric that ranks us</a:t>
-            </a:r>
-          </a:p>
-        </p:txBody>
-      </p:sp>
-      <p:sp>
-        <p:nvSpPr>
-          <p:cNvPr id="13" name="Rounded Rectangle 12"/>
-          <p:cNvSpPr/>
-          <p:nvPr/>
-        </p:nvSpPr>
-        <p:spPr>
-          <a:xfrm>
-            <a:off x="548640" y="3319272"/>
-            <a:ext cx="457200" cy="502920"/>
-          </a:xfrm>
-          <a:prstGeom prst="roundRect">
-            <a:avLst>
-              <a:gd name="adj" fmla="val 25000"/>
-            </a:avLst>
-          </a:prstGeom>
-          <a:solidFill>
-            <a:srgbClr val="C8102E"/>
-          </a:solidFill>
-          <a:ln>
-            <a:noFill/>
-          </a:ln>
-          <a:effectLst/>
-        </p:spPr>
-        <p:style>
-          <a:lnRef idx="1">
-            <a:schemeClr val="accent1"/>
-          </a:lnRef>
-          <a:fillRef idx="3">
-            <a:schemeClr val="accent1"/>
-          </a:fillRef>
-          <a:effectRef idx="2">
-            <a:schemeClr val="accent1"/>
-          </a:effectRef>
-          <a:fontRef idx="minor">
-            <a:schemeClr val="lt1"/>
-          </a:fontRef>
-        </p:style>
-        <p:txBody>
-          <a:bodyPr rtlCol="0" anchor="ctr" wrap="square"/>
-          <a:lstStyle/>
-          <a:p>
-            <a:pPr algn="ctr"/>
-            <a:r>
-              <a:rPr b="1" sz="1600">
-                <a:solidFill>
-                  <a:srgbClr val="FFFFFF"/>
-                </a:solidFill>
-                <a:latin typeface="Arial"/>
-              </a:rPr>
-              <a:t>5</a:t>
-            </a:r>
-          </a:p>
-        </p:txBody>
-      </p:sp>
-      <p:sp>
-        <p:nvSpPr>
-          <p:cNvPr id="14" name="TextBox 13"/>
-          <p:cNvSpPr txBox="1"/>
-          <p:nvPr/>
-        </p:nvSpPr>
-        <p:spPr>
-          <a:xfrm>
-            <a:off x="1143000" y="3319272"/>
-            <a:ext cx="5760720" cy="502920"/>
-          </a:xfrm>
-          <a:prstGeom prst="rect">
-            <a:avLst/>
-          </a:prstGeom>
-          <a:noFill/>
-        </p:spPr>
-        <p:txBody>
-          <a:bodyPr wrap="square" anchor="ctr" lIns="45720" rIns="45720" tIns="18288" bIns="18288">
-            <a:spAutoFit/>
-          </a:bodyPr>
-          <a:lstStyle/>
-          <a:p>
-            <a:pPr>
-              <a:spcBef>
-                <a:spcPts val="0"/>
-              </a:spcBef>
-              <a:spcAft>
-                <a:spcPts val="0"/>
-              </a:spcAft>
-              <a:buNone/>
-            </a:pPr>
-            <a:r>
-              <a:rPr sz="1300" b="1">
-                <a:solidFill>
-                  <a:srgbClr val="2A2E30"/>
-                </a:solidFill>
-                <a:latin typeface="Arial"/>
-              </a:rPr>
-              <a:t>Age-aware AUROC  </a:t>
-            </a:r>
-            <a:r>
-              <a:rPr sz="1300" b="0">
-                <a:solidFill>
-                  <a:srgbClr val="505759"/>
-                </a:solidFill>
-                <a:latin typeface="Arial"/>
-              </a:rPr>
-              <a:t>Conditioned and age-weighted variants</a:t>
-            </a:r>
-          </a:p>
-        </p:txBody>
-      </p:sp>
-      <p:sp>
-        <p:nvSpPr>
-          <p:cNvPr id="15" name="Rounded Rectangle 14"/>
-          <p:cNvSpPr/>
-          <p:nvPr/>
-        </p:nvSpPr>
-        <p:spPr>
-          <a:xfrm>
-            <a:off x="548640" y="4270248"/>
-            <a:ext cx="457200" cy="502920"/>
-          </a:xfrm>
-          <a:prstGeom prst="roundRect">
-            <a:avLst>
-              <a:gd name="adj" fmla="val 25000"/>
-            </a:avLst>
-          </a:prstGeom>
-          <a:solidFill>
-            <a:srgbClr val="C8102E"/>
-          </a:solidFill>
-          <a:ln>
-            <a:noFill/>
-          </a:ln>
-          <a:effectLst/>
-        </p:spPr>
-        <p:style>
-          <a:lnRef idx="1">
-            <a:schemeClr val="accent1"/>
-          </a:lnRef>
-          <a:fillRef idx="3">
-            <a:schemeClr val="accent1"/>
-          </a:fillRef>
-          <a:effectRef idx="2">
-            <a:schemeClr val="accent1"/>
-          </a:effectRef>
-          <a:fontRef idx="minor">
-            <a:schemeClr val="lt1"/>
-          </a:fontRef>
-        </p:style>
-        <p:txBody>
-          <a:bodyPr rtlCol="0" anchor="ctr" wrap="square"/>
-          <a:lstStyle/>
-          <a:p>
-            <a:pPr algn="ctr"/>
-            <a:r>
-              <a:rPr b="1" sz="1600">
-                <a:solidFill>
-                  <a:srgbClr val="FFFFFF"/>
-                </a:solidFill>
-                <a:latin typeface="Arial"/>
-              </a:rPr>
-              <a:t>7</a:t>
-            </a:r>
-          </a:p>
-        </p:txBody>
-      </p:sp>
-      <p:sp>
-        <p:nvSpPr>
-          <p:cNvPr id="16" name="TextBox 15"/>
-          <p:cNvSpPr txBox="1"/>
-          <p:nvPr/>
-        </p:nvSpPr>
-        <p:spPr>
-          <a:xfrm>
-            <a:off x="1143000" y="4270248"/>
-            <a:ext cx="5760720" cy="502920"/>
-          </a:xfrm>
-          <a:prstGeom prst="rect">
-            <a:avLst/>
-          </a:prstGeom>
-          <a:noFill/>
-        </p:spPr>
-        <p:txBody>
-          <a:bodyPr wrap="square" anchor="ctr" lIns="45720" rIns="45720" tIns="18288" bIns="18288">
-            <a:spAutoFit/>
-          </a:bodyPr>
-          <a:lstStyle/>
-          <a:p>
-            <a:pPr>
-              <a:spcBef>
-                <a:spcPts val="0"/>
-              </a:spcBef>
-              <a:spcAft>
-                <a:spcPts val="0"/>
-              </a:spcAft>
-              <a:buNone/>
-            </a:pPr>
-            <a:r>
-              <a:rPr sz="1300" b="1">
-                <a:solidFill>
-                  <a:srgbClr val="2A2E30"/>
-                </a:solidFill>
-                <a:latin typeface="Arial"/>
-              </a:rPr>
-              <a:t>What it means for us  </a:t>
-            </a:r>
-            <a:r>
-              <a:rPr sz="1300" b="0">
-                <a:solidFill>
-                  <a:srgbClr val="505759"/>
-                </a:solidFill>
-                <a:latin typeface="Arial"/>
-              </a:rPr>
-              <a:t>How we tune and validate against the metric</a:t>
-            </a:r>
-          </a:p>
-        </p:txBody>
-      </p:sp>
-      <p:sp>
-        <p:nvSpPr>
-          <p:cNvPr id="17" name="TextBox 16"/>
-          <p:cNvSpPr txBox="1"/>
-          <p:nvPr/>
-        </p:nvSpPr>
-        <p:spPr>
-          <a:xfrm>
-            <a:off x="548640" y="4828032"/>
-            <a:ext cx="6035040" cy="228600"/>
-          </a:xfrm>
-          <a:prstGeom prst="rect">
-            <a:avLst/>
-          </a:prstGeom>
-          <a:noFill/>
-        </p:spPr>
-        <p:txBody>
-          <a:bodyPr wrap="square" anchor="t" lIns="45720" rIns="45720" tIns="18288" bIns="18288">
-            <a:spAutoFit/>
-          </a:bodyPr>
-          <a:lstStyle/>
-          <a:p>
-            <a:pPr algn="l">
-              <a:spcBef>
-                <a:spcPts val="0"/>
-              </a:spcBef>
-              <a:spcAft>
-                <a:spcPts val="0"/>
-              </a:spcAft>
-              <a:buNone/>
-            </a:pPr>
-            <a:r>
-              <a:rPr sz="800" b="0" i="0">
-                <a:solidFill>
-                  <a:srgbClr val="898D8D"/>
-                </a:solidFill>
-                <a:latin typeface="Arial"/>
-              </a:rPr>
-              <a:t>PhysioNet Challenge 2026  ·  Scoring Metrics</a:t>
-            </a:r>
-          </a:p>
-        </p:txBody>
-      </p:sp>
-      <p:sp>
-        <p:nvSpPr>
-          <p:cNvPr id="18" name="Rounded Rectangle 17"/>
-          <p:cNvSpPr/>
-          <p:nvPr/>
-        </p:nvSpPr>
-        <p:spPr>
-          <a:xfrm>
-            <a:off x="548640" y="3794760"/>
-            <a:ext cx="457200" cy="502920"/>
-          </a:xfrm>
-          <a:prstGeom prst="roundRect">
-            <a:avLst>
-              <a:gd name="adj" fmla="val 25000"/>
-            </a:avLst>
-          </a:prstGeom>
-          <a:solidFill>
-            <a:srgbClr val="C8102E"/>
-          </a:solidFill>
-          <a:ln>
-            <a:noFill/>
-          </a:ln>
-          <a:effectLst/>
-        </p:spPr>
-        <p:style>
-          <a:lnRef idx="1">
-            <a:schemeClr val="accent1"/>
-          </a:lnRef>
-          <a:fillRef idx="3">
-            <a:schemeClr val="accent1"/>
-          </a:fillRef>
-          <a:effectRef idx="2">
-            <a:schemeClr val="accent1"/>
-          </a:effectRef>
-          <a:fontRef idx="minor">
-            <a:schemeClr val="lt1"/>
-          </a:fontRef>
-        </p:style>
-        <p:txBody>
-          <a:bodyPr rtlCol="0" anchor="ctr" wrap="none"/>
-          <a:lstStyle/>
-          <a:p>
-            <a:pPr algn="ctr"/>
-            <a:r>
-              <a:rPr sz="1600" b="1">
-                <a:solidFill>
-                  <a:srgbClr val="FFFFFF"/>
-                </a:solidFill>
-                <a:latin typeface="Arial"/>
-              </a:rPr>
-              <a:t>6</a:t>
-            </a:r>
-          </a:p>
-        </p:txBody>
-      </p:sp>
-      <p:sp>
-        <p:nvSpPr>
-          <p:cNvPr id="19" name="TextBox 18"/>
-          <p:cNvSpPr txBox="1"/>
-          <p:nvPr/>
-        </p:nvSpPr>
-        <p:spPr>
-          <a:xfrm>
-            <a:off x="1143000" y="3794760"/>
-            <a:ext cx="5760720" cy="502920"/>
-          </a:xfrm>
-          <a:prstGeom prst="rect">
-            <a:avLst/>
-          </a:prstGeom>
-          <a:noFill/>
-        </p:spPr>
-        <p:txBody>
-          <a:bodyPr wrap="square">
-            <a:spAutoFit/>
-          </a:bodyPr>
-          <a:lstStyle/>
-          <a:p>
-            <a:pPr algn="l"/>
-            <a:r>
-              <a:rPr sz="1300" b="1">
-                <a:solidFill>
-                  <a:srgbClr val="2A2E30"/>
-                </a:solidFill>
-                <a:latin typeface="Arial"/>
-              </a:rPr>
-              <a:t>The dataset behind the metric  </a:t>
-            </a:r>
-            <a:r>
-              <a:rPr sz="1300" b="0">
-                <a:solidFill>
-                  <a:srgbClr val="505759"/>
-                </a:solidFill>
-                <a:latin typeface="Arial"/>
-              </a:rPr>
-              <a:t>The cohort the model actually sees — and the confounders it must beat</a:t>
-            </a:r>
-          </a:p>
-        </p:txBody>
-      </p:sp>
-    </p:spTree>
-  </p:cSld>
-  <p:clrMapOvr>
-    <a:masterClrMapping/>
-  </p:clrMapOvr>
-</p:sld>
-</file>
-
-<file path=ppt/slides/slide20.xml><?xml version="1.0" encoding="utf-8"?>
 <p:sld xmlns:a="http://schemas.openxmlformats.org/drawingml/2006/main" xmlns:p="http://schemas.openxmlformats.org/presentationml/2006/main" xmlns:r="http://schemas.openxmlformats.org/officeDocument/2006/relationships">
   <p:cSld>
     <p:spTree>
@@ -26291,7 +24274,7 @@
 </p:sld>
 </file>
 
-<file path=ppt/slides/slide21.xml><?xml version="1.0" encoding="utf-8"?>
+<file path=ppt/slides/slide18.xml><?xml version="1.0" encoding="utf-8"?>
 <p:sld xmlns:a="http://schemas.openxmlformats.org/drawingml/2006/main" xmlns:p="http://schemas.openxmlformats.org/presentationml/2006/main" xmlns:r="http://schemas.openxmlformats.org/officeDocument/2006/relationships">
   <p:cSld>
     <p:spTree>
@@ -26527,7 +24510,7 @@
 </p:sld>
 </file>
 
-<file path=ppt/slides/slide22.xml><?xml version="1.0" encoding="utf-8"?>
+<file path=ppt/slides/slide19.xml><?xml version="1.0" encoding="utf-8"?>
 <p:sld xmlns:a="http://schemas.openxmlformats.org/drawingml/2006/main" xmlns:p="http://schemas.openxmlformats.org/presentationml/2006/main" xmlns:r="http://schemas.openxmlformats.org/officeDocument/2006/relationships">
   <p:cSld>
     <p:spTree>
@@ -26906,7 +24889,893 @@
 </p:sld>
 </file>
 
-<file path=ppt/slides/slide23.xml><?xml version="1.0" encoding="utf-8"?>
+<file path=ppt/slides/slide2.xml><?xml version="1.0" encoding="utf-8"?>
+<p:sld xmlns:a="http://schemas.openxmlformats.org/drawingml/2006/main" xmlns:p="http://schemas.openxmlformats.org/presentationml/2006/main" xmlns:r="http://schemas.openxmlformats.org/officeDocument/2006/relationships">
+  <p:cSld>
+    <p:spTree>
+      <p:nvGrpSpPr>
+        <p:cNvPr id="1" name=""/>
+        <p:cNvGrpSpPr/>
+        <p:nvPr/>
+      </p:nvGrpSpPr>
+      <p:grpSpPr/>
+      <p:sp>
+        <p:nvSpPr>
+          <p:cNvPr id="2" name="Title 1"/>
+          <p:cNvSpPr>
+            <a:spLocks noGrp="1"/>
+          </p:cNvSpPr>
+          <p:nvPr>
+            <p:ph type="title"/>
+          </p:nvPr>
+        </p:nvSpPr>
+        <p:spPr/>
+        <p:txBody>
+          <a:bodyPr/>
+          <a:lstStyle/>
+          <a:p>
+            <a:r>
+              <a:rPr b="1">
+                <a:latin typeface="Arial"/>
+              </a:rPr>
+              <a:t>What we'll cover</a:t>
+            </a:r>
+          </a:p>
+        </p:txBody>
+      </p:sp>
+      <p:sp>
+        <p:nvSpPr>
+          <p:cNvPr id="3" name="Content Placeholder 2"/>
+          <p:cNvSpPr>
+            <a:spLocks noGrp="1"/>
+          </p:cNvSpPr>
+          <p:nvPr>
+            <p:ph idx="1"/>
+          </p:nvPr>
+        </p:nvSpPr>
+        <p:spPr/>
+        <p:txBody>
+          <a:bodyPr/>
+          <a:lstStyle/>
+          <a:p/>
+        </p:txBody>
+      </p:sp>
+      <p:sp>
+        <p:nvSpPr>
+          <p:cNvPr id="4" name="TextBox 3"/>
+          <p:cNvSpPr txBox="1"/>
+          <p:nvPr/>
+        </p:nvSpPr>
+        <p:spPr>
+          <a:xfrm>
+            <a:off x="548640" y="1024128"/>
+            <a:ext cx="6446520" cy="274320"/>
+          </a:xfrm>
+          <a:prstGeom prst="rect">
+            <a:avLst/>
+          </a:prstGeom>
+          <a:noFill/>
+        </p:spPr>
+        <p:txBody>
+          <a:bodyPr wrap="square" anchor="t" lIns="45720" rIns="45720" tIns="18288" bIns="18288">
+            <a:spAutoFit/>
+          </a:bodyPr>
+          <a:lstStyle/>
+          <a:p>
+            <a:pPr algn="l">
+              <a:spcBef>
+                <a:spcPts val="0"/>
+              </a:spcBef>
+              <a:spcAft>
+                <a:spcPts val="0"/>
+              </a:spcAft>
+              <a:buNone/>
+            </a:pPr>
+            <a:r>
+              <a:rPr sz="1100" b="1" i="0">
+                <a:solidFill>
+                  <a:srgbClr val="C8102E"/>
+                </a:solidFill>
+                <a:latin typeface="Arial"/>
+              </a:rPr>
+              <a:t>AGENDA</a:t>
+            </a:r>
+          </a:p>
+        </p:txBody>
+      </p:sp>
+      <p:sp>
+        <p:nvSpPr>
+          <p:cNvPr id="5" name="Rounded Rectangle 4"/>
+          <p:cNvSpPr/>
+          <p:nvPr/>
+        </p:nvSpPr>
+        <p:spPr>
+          <a:xfrm>
+            <a:off x="548640" y="1417320"/>
+            <a:ext cx="457200" cy="502920"/>
+          </a:xfrm>
+          <a:prstGeom prst="roundRect">
+            <a:avLst>
+              <a:gd name="adj" fmla="val 25000"/>
+            </a:avLst>
+          </a:prstGeom>
+          <a:solidFill>
+            <a:srgbClr val="C8102E"/>
+          </a:solidFill>
+          <a:ln>
+            <a:noFill/>
+          </a:ln>
+          <a:effectLst/>
+        </p:spPr>
+        <p:style>
+          <a:lnRef idx="1">
+            <a:schemeClr val="accent1"/>
+          </a:lnRef>
+          <a:fillRef idx="3">
+            <a:schemeClr val="accent1"/>
+          </a:fillRef>
+          <a:effectRef idx="2">
+            <a:schemeClr val="accent1"/>
+          </a:effectRef>
+          <a:fontRef idx="minor">
+            <a:schemeClr val="lt1"/>
+          </a:fontRef>
+        </p:style>
+        <p:txBody>
+          <a:bodyPr rtlCol="0" anchor="ctr" wrap="square"/>
+          <a:lstStyle/>
+          <a:p>
+            <a:pPr algn="ctr"/>
+            <a:r>
+              <a:rPr b="1" sz="1600">
+                <a:solidFill>
+                  <a:srgbClr val="FFFFFF"/>
+                </a:solidFill>
+                <a:latin typeface="Arial"/>
+              </a:rPr>
+              <a:t>1</a:t>
+            </a:r>
+          </a:p>
+        </p:txBody>
+      </p:sp>
+      <p:sp>
+        <p:nvSpPr>
+          <p:cNvPr id="6" name="TextBox 5"/>
+          <p:cNvSpPr txBox="1"/>
+          <p:nvPr/>
+        </p:nvSpPr>
+        <p:spPr>
+          <a:xfrm>
+            <a:off x="1143000" y="1417320"/>
+            <a:ext cx="5760720" cy="502920"/>
+          </a:xfrm>
+          <a:prstGeom prst="rect">
+            <a:avLst/>
+          </a:prstGeom>
+          <a:noFill/>
+        </p:spPr>
+        <p:txBody>
+          <a:bodyPr wrap="square" anchor="ctr" lIns="45720" rIns="45720" tIns="18288" bIns="18288">
+            <a:spAutoFit/>
+          </a:bodyPr>
+          <a:lstStyle/>
+          <a:p>
+            <a:pPr>
+              <a:spcBef>
+                <a:spcPts val="0"/>
+              </a:spcBef>
+              <a:spcAft>
+                <a:spcPts val="0"/>
+              </a:spcAft>
+              <a:buNone/>
+            </a:pPr>
+            <a:r>
+              <a:rPr sz="1300" b="1">
+                <a:solidFill>
+                  <a:srgbClr val="2A2E30"/>
+                </a:solidFill>
+                <a:latin typeface="Arial"/>
+              </a:rPr>
+              <a:t>The prediction task  </a:t>
+            </a:r>
+            <a:r>
+              <a:rPr sz="1300" b="0">
+                <a:solidFill>
+                  <a:srgbClr val="505759"/>
+                </a:solidFill>
+                <a:latin typeface="Arial"/>
+              </a:rPr>
+              <a:t>What the challenge asks our model to output</a:t>
+            </a:r>
+          </a:p>
+        </p:txBody>
+      </p:sp>
+      <p:sp>
+        <p:nvSpPr>
+          <p:cNvPr id="7" name="Rounded Rectangle 6"/>
+          <p:cNvSpPr/>
+          <p:nvPr/>
+        </p:nvSpPr>
+        <p:spPr>
+          <a:xfrm>
+            <a:off x="548640" y="1892807"/>
+            <a:ext cx="457200" cy="502920"/>
+          </a:xfrm>
+          <a:prstGeom prst="roundRect">
+            <a:avLst>
+              <a:gd name="adj" fmla="val 25000"/>
+            </a:avLst>
+          </a:prstGeom>
+          <a:solidFill>
+            <a:srgbClr val="C8102E"/>
+          </a:solidFill>
+          <a:ln>
+            <a:noFill/>
+          </a:ln>
+          <a:effectLst/>
+        </p:spPr>
+        <p:style>
+          <a:lnRef idx="1">
+            <a:schemeClr val="accent1"/>
+          </a:lnRef>
+          <a:fillRef idx="3">
+            <a:schemeClr val="accent1"/>
+          </a:fillRef>
+          <a:effectRef idx="2">
+            <a:schemeClr val="accent1"/>
+          </a:effectRef>
+          <a:fontRef idx="minor">
+            <a:schemeClr val="lt1"/>
+          </a:fontRef>
+        </p:style>
+        <p:txBody>
+          <a:bodyPr rtlCol="0" anchor="ctr" wrap="square"/>
+          <a:lstStyle/>
+          <a:p>
+            <a:pPr algn="ctr"/>
+            <a:r>
+              <a:rPr b="1" sz="1600">
+                <a:solidFill>
+                  <a:srgbClr val="FFFFFF"/>
+                </a:solidFill>
+                <a:latin typeface="Arial"/>
+              </a:rPr>
+              <a:t>2</a:t>
+            </a:r>
+          </a:p>
+        </p:txBody>
+      </p:sp>
+      <p:sp>
+        <p:nvSpPr>
+          <p:cNvPr id="8" name="TextBox 7"/>
+          <p:cNvSpPr txBox="1"/>
+          <p:nvPr/>
+        </p:nvSpPr>
+        <p:spPr>
+          <a:xfrm>
+            <a:off x="1143000" y="1892807"/>
+            <a:ext cx="5760720" cy="502920"/>
+          </a:xfrm>
+          <a:prstGeom prst="rect">
+            <a:avLst/>
+          </a:prstGeom>
+          <a:noFill/>
+        </p:spPr>
+        <p:txBody>
+          <a:bodyPr wrap="square" anchor="ctr" lIns="45720" rIns="45720" tIns="18288" bIns="18288">
+            <a:spAutoFit/>
+          </a:bodyPr>
+          <a:lstStyle/>
+          <a:p>
+            <a:pPr>
+              <a:spcBef>
+                <a:spcPts val="0"/>
+              </a:spcBef>
+              <a:spcAft>
+                <a:spcPts val="0"/>
+              </a:spcAft>
+              <a:buNone/>
+            </a:pPr>
+            <a:r>
+              <a:rPr sz="1300" b="1">
+                <a:solidFill>
+                  <a:srgbClr val="2A2E30"/>
+                </a:solidFill>
+                <a:latin typeface="Arial"/>
+              </a:rPr>
+              <a:t>Why a custom metric  </a:t>
+            </a:r>
+            <a:r>
+              <a:rPr sz="1300" b="0">
+                <a:solidFill>
+                  <a:srgbClr val="505759"/>
+                </a:solidFill>
+                <a:latin typeface="Arial"/>
+              </a:rPr>
+              <a:t>Class imbalance and age act as confounders</a:t>
+            </a:r>
+          </a:p>
+        </p:txBody>
+      </p:sp>
+      <p:sp>
+        <p:nvSpPr>
+          <p:cNvPr id="9" name="Rounded Rectangle 8"/>
+          <p:cNvSpPr/>
+          <p:nvPr/>
+        </p:nvSpPr>
+        <p:spPr>
+          <a:xfrm>
+            <a:off x="548640" y="2368296"/>
+            <a:ext cx="457200" cy="502920"/>
+          </a:xfrm>
+          <a:prstGeom prst="roundRect">
+            <a:avLst>
+              <a:gd name="adj" fmla="val 25000"/>
+            </a:avLst>
+          </a:prstGeom>
+          <a:solidFill>
+            <a:srgbClr val="C8102E"/>
+          </a:solidFill>
+          <a:ln>
+            <a:noFill/>
+          </a:ln>
+          <a:effectLst/>
+        </p:spPr>
+        <p:style>
+          <a:lnRef idx="1">
+            <a:schemeClr val="accent1"/>
+          </a:lnRef>
+          <a:fillRef idx="3">
+            <a:schemeClr val="accent1"/>
+          </a:fillRef>
+          <a:effectRef idx="2">
+            <a:schemeClr val="accent1"/>
+          </a:effectRef>
+          <a:fontRef idx="minor">
+            <a:schemeClr val="lt1"/>
+          </a:fontRef>
+        </p:style>
+        <p:txBody>
+          <a:bodyPr rtlCol="0" anchor="ctr" wrap="square"/>
+          <a:lstStyle/>
+          <a:p>
+            <a:pPr algn="ctr"/>
+            <a:r>
+              <a:rPr b="1" sz="1600">
+                <a:solidFill>
+                  <a:srgbClr val="FFFFFF"/>
+                </a:solidFill>
+                <a:latin typeface="Arial"/>
+              </a:rPr>
+              <a:t>3</a:t>
+            </a:r>
+          </a:p>
+        </p:txBody>
+      </p:sp>
+      <p:sp>
+        <p:nvSpPr>
+          <p:cNvPr id="10" name="TextBox 9"/>
+          <p:cNvSpPr txBox="1"/>
+          <p:nvPr/>
+        </p:nvSpPr>
+        <p:spPr>
+          <a:xfrm>
+            <a:off x="1143000" y="2368296"/>
+            <a:ext cx="5760720" cy="502920"/>
+          </a:xfrm>
+          <a:prstGeom prst="rect">
+            <a:avLst/>
+          </a:prstGeom>
+          <a:noFill/>
+        </p:spPr>
+        <p:txBody>
+          <a:bodyPr wrap="square" anchor="ctr" lIns="45720" rIns="45720" tIns="18288" bIns="18288">
+            <a:spAutoFit/>
+          </a:bodyPr>
+          <a:lstStyle/>
+          <a:p>
+            <a:pPr>
+              <a:spcBef>
+                <a:spcPts val="0"/>
+              </a:spcBef>
+              <a:spcAft>
+                <a:spcPts val="0"/>
+              </a:spcAft>
+              <a:buNone/>
+            </a:pPr>
+            <a:r>
+              <a:rPr sz="1300" b="1">
+                <a:solidFill>
+                  <a:srgbClr val="2A2E30"/>
+                </a:solidFill>
+                <a:latin typeface="Arial"/>
+              </a:rPr>
+              <a:t>The seven scores  </a:t>
+            </a:r>
+            <a:r>
+              <a:rPr sz="1300" b="0">
+                <a:solidFill>
+                  <a:srgbClr val="505759"/>
+                </a:solidFill>
+                <a:latin typeface="Arial"/>
+              </a:rPr>
+              <a:t>One primary ranking metric, six diagnostics</a:t>
+            </a:r>
+          </a:p>
+        </p:txBody>
+      </p:sp>
+      <p:sp>
+        <p:nvSpPr>
+          <p:cNvPr id="11" name="Rounded Rectangle 10"/>
+          <p:cNvSpPr/>
+          <p:nvPr/>
+        </p:nvSpPr>
+        <p:spPr>
+          <a:xfrm>
+            <a:off x="548640" y="2843784"/>
+            <a:ext cx="457200" cy="502920"/>
+          </a:xfrm>
+          <a:prstGeom prst="roundRect">
+            <a:avLst>
+              <a:gd name="adj" fmla="val 25000"/>
+            </a:avLst>
+          </a:prstGeom>
+          <a:solidFill>
+            <a:srgbClr val="C8102E"/>
+          </a:solidFill>
+          <a:ln>
+            <a:noFill/>
+          </a:ln>
+          <a:effectLst/>
+        </p:spPr>
+        <p:style>
+          <a:lnRef idx="1">
+            <a:schemeClr val="accent1"/>
+          </a:lnRef>
+          <a:fillRef idx="3">
+            <a:schemeClr val="accent1"/>
+          </a:fillRef>
+          <a:effectRef idx="2">
+            <a:schemeClr val="accent1"/>
+          </a:effectRef>
+          <a:fontRef idx="minor">
+            <a:schemeClr val="lt1"/>
+          </a:fontRef>
+        </p:style>
+        <p:txBody>
+          <a:bodyPr rtlCol="0" anchor="ctr" wrap="square"/>
+          <a:lstStyle/>
+          <a:p>
+            <a:pPr algn="ctr"/>
+            <a:r>
+              <a:rPr b="1" sz="1600">
+                <a:solidFill>
+                  <a:srgbClr val="FFFFFF"/>
+                </a:solidFill>
+                <a:latin typeface="Arial"/>
+              </a:rPr>
+              <a:t>4</a:t>
+            </a:r>
+          </a:p>
+        </p:txBody>
+      </p:sp>
+      <p:sp>
+        <p:nvSpPr>
+          <p:cNvPr id="12" name="TextBox 11"/>
+          <p:cNvSpPr txBox="1"/>
+          <p:nvPr/>
+        </p:nvSpPr>
+        <p:spPr>
+          <a:xfrm>
+            <a:off x="1143000" y="2843784"/>
+            <a:ext cx="5760720" cy="502920"/>
+          </a:xfrm>
+          <a:prstGeom prst="rect">
+            <a:avLst/>
+          </a:prstGeom>
+          <a:noFill/>
+        </p:spPr>
+        <p:txBody>
+          <a:bodyPr wrap="square" anchor="ctr" lIns="45720" rIns="45720" tIns="18288" bIns="18288">
+            <a:spAutoFit/>
+          </a:bodyPr>
+          <a:lstStyle/>
+          <a:p>
+            <a:pPr>
+              <a:spcBef>
+                <a:spcPts val="0"/>
+              </a:spcBef>
+              <a:spcAft>
+                <a:spcPts val="0"/>
+              </a:spcAft>
+              <a:buNone/>
+            </a:pPr>
+            <a:r>
+              <a:rPr sz="1300" b="1">
+                <a:solidFill>
+                  <a:srgbClr val="2A2E30"/>
+                </a:solidFill>
+                <a:latin typeface="Arial"/>
+              </a:rPr>
+              <a:t>The Reward metric  </a:t>
+            </a:r>
+            <a:r>
+              <a:rPr sz="1300" b="0">
+                <a:solidFill>
+                  <a:srgbClr val="505759"/>
+                </a:solidFill>
+                <a:latin typeface="Arial"/>
+              </a:rPr>
+              <a:t>Prevalence-weighted payoff — the metric that ranks us</a:t>
+            </a:r>
+          </a:p>
+        </p:txBody>
+      </p:sp>
+      <p:sp>
+        <p:nvSpPr>
+          <p:cNvPr id="13" name="Rounded Rectangle 12"/>
+          <p:cNvSpPr/>
+          <p:nvPr/>
+        </p:nvSpPr>
+        <p:spPr>
+          <a:xfrm>
+            <a:off x="548640" y="3319272"/>
+            <a:ext cx="457200" cy="502920"/>
+          </a:xfrm>
+          <a:prstGeom prst="roundRect">
+            <a:avLst>
+              <a:gd name="adj" fmla="val 25000"/>
+            </a:avLst>
+          </a:prstGeom>
+          <a:solidFill>
+            <a:srgbClr val="C8102E"/>
+          </a:solidFill>
+          <a:ln>
+            <a:noFill/>
+          </a:ln>
+          <a:effectLst/>
+        </p:spPr>
+        <p:style>
+          <a:lnRef idx="1">
+            <a:schemeClr val="accent1"/>
+          </a:lnRef>
+          <a:fillRef idx="3">
+            <a:schemeClr val="accent1"/>
+          </a:fillRef>
+          <a:effectRef idx="2">
+            <a:schemeClr val="accent1"/>
+          </a:effectRef>
+          <a:fontRef idx="minor">
+            <a:schemeClr val="lt1"/>
+          </a:fontRef>
+        </p:style>
+        <p:txBody>
+          <a:bodyPr rtlCol="0" anchor="ctr" wrap="square"/>
+          <a:lstStyle/>
+          <a:p>
+            <a:pPr algn="ctr"/>
+            <a:r>
+              <a:rPr b="1" sz="1600">
+                <a:solidFill>
+                  <a:srgbClr val="FFFFFF"/>
+                </a:solidFill>
+                <a:latin typeface="Arial"/>
+              </a:rPr>
+              <a:t>5</a:t>
+            </a:r>
+          </a:p>
+        </p:txBody>
+      </p:sp>
+      <p:sp>
+        <p:nvSpPr>
+          <p:cNvPr id="14" name="TextBox 13"/>
+          <p:cNvSpPr txBox="1"/>
+          <p:nvPr/>
+        </p:nvSpPr>
+        <p:spPr>
+          <a:xfrm>
+            <a:off x="1143000" y="3319272"/>
+            <a:ext cx="5760720" cy="502920"/>
+          </a:xfrm>
+          <a:prstGeom prst="rect">
+            <a:avLst/>
+          </a:prstGeom>
+          <a:noFill/>
+        </p:spPr>
+        <p:txBody>
+          <a:bodyPr wrap="square" anchor="ctr" lIns="45720" rIns="45720" tIns="18288" bIns="18288">
+            <a:spAutoFit/>
+          </a:bodyPr>
+          <a:lstStyle/>
+          <a:p>
+            <a:pPr>
+              <a:spcBef>
+                <a:spcPts val="0"/>
+              </a:spcBef>
+              <a:spcAft>
+                <a:spcPts val="0"/>
+              </a:spcAft>
+              <a:buNone/>
+            </a:pPr>
+            <a:r>
+              <a:rPr sz="1300" b="1">
+                <a:solidFill>
+                  <a:srgbClr val="2A2E30"/>
+                </a:solidFill>
+                <a:latin typeface="Arial"/>
+              </a:rPr>
+              <a:t>Age-aware AUROC  </a:t>
+            </a:r>
+            <a:r>
+              <a:rPr sz="1300" b="0">
+                <a:solidFill>
+                  <a:srgbClr val="505759"/>
+                </a:solidFill>
+                <a:latin typeface="Arial"/>
+              </a:rPr>
+              <a:t>Conditioned and age-weighted variants</a:t>
+            </a:r>
+          </a:p>
+        </p:txBody>
+      </p:sp>
+      <p:sp>
+        <p:nvSpPr>
+          <p:cNvPr id="15" name="Rounded Rectangle 14"/>
+          <p:cNvSpPr/>
+          <p:nvPr/>
+        </p:nvSpPr>
+        <p:spPr>
+          <a:xfrm>
+            <a:off x="548640" y="4270248"/>
+            <a:ext cx="457200" cy="502920"/>
+          </a:xfrm>
+          <a:prstGeom prst="roundRect">
+            <a:avLst>
+              <a:gd name="adj" fmla="val 25000"/>
+            </a:avLst>
+          </a:prstGeom>
+          <a:solidFill>
+            <a:srgbClr val="C8102E"/>
+          </a:solidFill>
+          <a:ln>
+            <a:noFill/>
+          </a:ln>
+          <a:effectLst/>
+        </p:spPr>
+        <p:style>
+          <a:lnRef idx="1">
+            <a:schemeClr val="accent1"/>
+          </a:lnRef>
+          <a:fillRef idx="3">
+            <a:schemeClr val="accent1"/>
+          </a:fillRef>
+          <a:effectRef idx="2">
+            <a:schemeClr val="accent1"/>
+          </a:effectRef>
+          <a:fontRef idx="minor">
+            <a:schemeClr val="lt1"/>
+          </a:fontRef>
+        </p:style>
+        <p:txBody>
+          <a:bodyPr rtlCol="0" anchor="ctr" wrap="square"/>
+          <a:lstStyle/>
+          <a:p>
+            <a:pPr algn="ctr"/>
+            <a:r>
+              <a:rPr b="1" sz="1600">
+                <a:solidFill>
+                  <a:srgbClr val="FFFFFF"/>
+                </a:solidFill>
+                <a:latin typeface="Arial"/>
+              </a:rPr>
+              <a:t>7</a:t>
+            </a:r>
+          </a:p>
+        </p:txBody>
+      </p:sp>
+      <p:sp>
+        <p:nvSpPr>
+          <p:cNvPr id="16" name="TextBox 15"/>
+          <p:cNvSpPr txBox="1"/>
+          <p:nvPr/>
+        </p:nvSpPr>
+        <p:spPr>
+          <a:xfrm>
+            <a:off x="1143000" y="4270248"/>
+            <a:ext cx="5760720" cy="502920"/>
+          </a:xfrm>
+          <a:prstGeom prst="rect">
+            <a:avLst/>
+          </a:prstGeom>
+          <a:noFill/>
+        </p:spPr>
+        <p:txBody>
+          <a:bodyPr wrap="square" anchor="ctr" lIns="45720" rIns="45720" tIns="18288" bIns="18288">
+            <a:spAutoFit/>
+          </a:bodyPr>
+          <a:lstStyle/>
+          <a:p>
+            <a:pPr>
+              <a:spcBef>
+                <a:spcPts val="0"/>
+              </a:spcBef>
+              <a:spcAft>
+                <a:spcPts val="0"/>
+              </a:spcAft>
+              <a:buNone/>
+            </a:pPr>
+            <a:r>
+              <a:rPr sz="1300" b="1">
+                <a:solidFill>
+                  <a:srgbClr val="2A2E30"/>
+                </a:solidFill>
+                <a:latin typeface="Arial"/>
+              </a:rPr>
+              <a:t>What it means for us  </a:t>
+            </a:r>
+            <a:r>
+              <a:rPr sz="1300" b="0">
+                <a:solidFill>
+                  <a:srgbClr val="505759"/>
+                </a:solidFill>
+                <a:latin typeface="Arial"/>
+              </a:rPr>
+              <a:t>How we tune and validate against the metric</a:t>
+            </a:r>
+          </a:p>
+        </p:txBody>
+      </p:sp>
+      <p:sp>
+        <p:nvSpPr>
+          <p:cNvPr id="17" name="TextBox 16"/>
+          <p:cNvSpPr txBox="1"/>
+          <p:nvPr/>
+        </p:nvSpPr>
+        <p:spPr>
+          <a:xfrm>
+            <a:off x="548640" y="4828032"/>
+            <a:ext cx="6035040" cy="228600"/>
+          </a:xfrm>
+          <a:prstGeom prst="rect">
+            <a:avLst/>
+          </a:prstGeom>
+          <a:noFill/>
+        </p:spPr>
+        <p:txBody>
+          <a:bodyPr wrap="square" anchor="t" lIns="45720" rIns="45720" tIns="18288" bIns="18288">
+            <a:spAutoFit/>
+          </a:bodyPr>
+          <a:lstStyle/>
+          <a:p>
+            <a:pPr algn="l">
+              <a:spcBef>
+                <a:spcPts val="0"/>
+              </a:spcBef>
+              <a:spcAft>
+                <a:spcPts val="0"/>
+              </a:spcAft>
+              <a:buNone/>
+            </a:pPr>
+            <a:r>
+              <a:rPr sz="800" b="0" i="0">
+                <a:solidFill>
+                  <a:srgbClr val="898D8D"/>
+                </a:solidFill>
+                <a:latin typeface="Arial"/>
+              </a:rPr>
+              <a:t>PhysioNet Challenge 2026  ·  Scoring Metrics</a:t>
+            </a:r>
+          </a:p>
+        </p:txBody>
+      </p:sp>
+      <p:sp>
+        <p:nvSpPr>
+          <p:cNvPr id="18" name="Rounded Rectangle 17"/>
+          <p:cNvSpPr/>
+          <p:nvPr/>
+        </p:nvSpPr>
+        <p:spPr>
+          <a:xfrm>
+            <a:off x="548640" y="3794760"/>
+            <a:ext cx="457200" cy="502920"/>
+          </a:xfrm>
+          <a:prstGeom prst="roundRect">
+            <a:avLst>
+              <a:gd name="adj" fmla="val 25000"/>
+            </a:avLst>
+          </a:prstGeom>
+          <a:solidFill>
+            <a:srgbClr val="C8102E"/>
+          </a:solidFill>
+          <a:ln>
+            <a:noFill/>
+          </a:ln>
+          <a:effectLst/>
+        </p:spPr>
+        <p:style>
+          <a:lnRef idx="1">
+            <a:schemeClr val="accent1"/>
+          </a:lnRef>
+          <a:fillRef idx="3">
+            <a:schemeClr val="accent1"/>
+          </a:fillRef>
+          <a:effectRef idx="2">
+            <a:schemeClr val="accent1"/>
+          </a:effectRef>
+          <a:fontRef idx="minor">
+            <a:schemeClr val="lt1"/>
+          </a:fontRef>
+        </p:style>
+        <p:txBody>
+          <a:bodyPr rtlCol="0" anchor="ctr" wrap="none"/>
+          <a:lstStyle/>
+          <a:p>
+            <a:pPr algn="ctr"/>
+            <a:r>
+              <a:rPr sz="1600" b="1">
+                <a:solidFill>
+                  <a:srgbClr val="FFFFFF"/>
+                </a:solidFill>
+                <a:latin typeface="Arial"/>
+              </a:rPr>
+              <a:t>6</a:t>
+            </a:r>
+          </a:p>
+        </p:txBody>
+      </p:sp>
+      <p:sp>
+        <p:nvSpPr>
+          <p:cNvPr id="19" name="TextBox 18"/>
+          <p:cNvSpPr txBox="1"/>
+          <p:nvPr/>
+        </p:nvSpPr>
+        <p:spPr>
+          <a:xfrm>
+            <a:off x="1143000" y="3794760"/>
+            <a:ext cx="5760720" cy="502920"/>
+          </a:xfrm>
+          <a:prstGeom prst="rect">
+            <a:avLst/>
+          </a:prstGeom>
+          <a:noFill/>
+        </p:spPr>
+        <p:txBody>
+          <a:bodyPr wrap="square">
+            <a:spAutoFit/>
+          </a:bodyPr>
+          <a:lstStyle/>
+          <a:p>
+            <a:pPr algn="l"/>
+            <a:r>
+              <a:rPr sz="1300" b="1">
+                <a:solidFill>
+                  <a:srgbClr val="2A2E30"/>
+                </a:solidFill>
+                <a:latin typeface="Arial"/>
+              </a:rPr>
+              <a:t>The dataset behind the metric  </a:t>
+            </a:r>
+            <a:r>
+              <a:rPr sz="1300" b="0">
+                <a:solidFill>
+                  <a:srgbClr val="505759"/>
+                </a:solidFill>
+                <a:latin typeface="Arial"/>
+              </a:rPr>
+              <a:t>The cohort the model actually sees — and the confounders it must beat</a:t>
+            </a:r>
+          </a:p>
+        </p:txBody>
+      </p:sp>
+    </p:spTree>
+  </p:cSld>
+  <p:clrMapOvr>
+    <a:masterClrMapping/>
+  </p:clrMapOvr>
+</p:sld>
+</file>
+
+<file path=ppt/slides/slide20.xml><?xml version="1.0" encoding="utf-8"?>
 <p:sld xmlns:a="http://schemas.openxmlformats.org/drawingml/2006/main" xmlns:p="http://schemas.openxmlformats.org/presentationml/2006/main" xmlns:r="http://schemas.openxmlformats.org/officeDocument/2006/relationships">
   <p:cSld>
     <p:spTree>
@@ -27428,7 +26297,7 @@
 </p:sld>
 </file>
 
-<file path=ppt/slides/slide24.xml><?xml version="1.0" encoding="utf-8"?>
+<file path=ppt/slides/slide21.xml><?xml version="1.0" encoding="utf-8"?>
 <p:sld xmlns:a="http://schemas.openxmlformats.org/drawingml/2006/main" xmlns:p="http://schemas.openxmlformats.org/presentationml/2006/main" xmlns:r="http://schemas.openxmlformats.org/officeDocument/2006/relationships">
   <p:cSld>
     <p:spTree>
@@ -27560,6 +26429,1521 @@
             <a:pPr algn="l"/>
             <a:r>
               <a:rPr sz="800" b="0">
+                <a:solidFill>
+                  <a:srgbClr val="898D8D"/>
+                </a:solidFill>
+                <a:latin typeface="Arial"/>
+              </a:rPr>
+              <a:t>PhysioNet Challenge 2026  ·  Scoring Metrics</a:t>
+            </a:r>
+          </a:p>
+        </p:txBody>
+      </p:sp>
+    </p:spTree>
+  </p:cSld>
+  <p:clrMapOvr>
+    <a:masterClrMapping/>
+  </p:clrMapOvr>
+</p:sld>
+</file>
+
+<file path=ppt/slides/slide22.xml><?xml version="1.0" encoding="utf-8"?>
+<p:sld xmlns:a="http://schemas.openxmlformats.org/drawingml/2006/main" xmlns:p="http://schemas.openxmlformats.org/presentationml/2006/main" xmlns:r="http://schemas.openxmlformats.org/officeDocument/2006/relationships">
+  <p:cSld>
+    <p:spTree>
+      <p:nvGrpSpPr>
+        <p:cNvPr id="1" name=""/>
+        <p:cNvGrpSpPr/>
+        <p:nvPr/>
+      </p:nvGrpSpPr>
+      <p:grpSpPr/>
+      <p:sp>
+        <p:nvSpPr>
+          <p:cNvPr id="2" name="Title 1"/>
+          <p:cNvSpPr>
+            <a:spLocks noGrp="1"/>
+          </p:cNvSpPr>
+          <p:nvPr>
+            <p:ph type="title"/>
+          </p:nvPr>
+        </p:nvSpPr>
+        <p:spPr/>
+        <p:txBody>
+          <a:bodyPr/>
+          <a:lstStyle/>
+          <a:p>
+            <a:r>
+              <a:t>What's present, and what we have to handle</a:t>
+            </a:r>
+          </a:p>
+        </p:txBody>
+      </p:sp>
+      <p:sp>
+        <p:nvSpPr>
+          <p:cNvPr id="3" name="Content Placeholder 2"/>
+          <p:cNvSpPr>
+            <a:spLocks noGrp="1"/>
+          </p:cNvSpPr>
+          <p:nvPr>
+            <p:ph idx="1"/>
+          </p:nvPr>
+        </p:nvSpPr>
+        <p:spPr/>
+        <p:txBody>
+          <a:bodyPr/>
+          <a:lstStyle/>
+          <a:p/>
+        </p:txBody>
+      </p:sp>
+      <p:sp>
+        <p:nvSpPr>
+          <p:cNvPr id="4" name="TextBox 3"/>
+          <p:cNvSpPr txBox="1"/>
+          <p:nvPr/>
+        </p:nvSpPr>
+        <p:spPr>
+          <a:xfrm>
+            <a:off x="548640" y="1024128"/>
+            <a:ext cx="6446520" cy="274320"/>
+          </a:xfrm>
+          <a:prstGeom prst="rect">
+            <a:avLst/>
+          </a:prstGeom>
+          <a:noFill/>
+        </p:spPr>
+        <p:txBody>
+          <a:bodyPr wrap="square">
+            <a:spAutoFit/>
+          </a:bodyPr>
+          <a:lstStyle/>
+          <a:p>
+            <a:pPr algn="l"/>
+            <a:r>
+              <a:rPr sz="1100" b="1">
+                <a:solidFill>
+                  <a:srgbClr val="C8102E"/>
+                </a:solidFill>
+                <a:latin typeface="Arial"/>
+              </a:rPr>
+              <a:t>DATASET · COMPLETENESS &amp; QUALITY</a:t>
+            </a:r>
+          </a:p>
+        </p:txBody>
+      </p:sp>
+      <p:pic>
+        <p:nvPicPr>
+          <p:cNvPr id="5" name="Picture 4" descr="fig6_data_completeness.png"/>
+          <p:cNvPicPr>
+            <a:picLocks noChangeAspect="1"/>
+          </p:cNvPicPr>
+          <p:nvPr/>
+        </p:nvPicPr>
+        <p:blipFill>
+          <a:blip r:embed="rId2"/>
+          <a:stretch>
+            <a:fillRect/>
+          </a:stretch>
+        </p:blipFill>
+        <p:spPr>
+          <a:xfrm>
+            <a:off x="502920" y="1937269"/>
+            <a:ext cx="3611880" cy="2251941"/>
+          </a:xfrm>
+          <a:prstGeom prst="rect">
+            <a:avLst/>
+          </a:prstGeom>
+        </p:spPr>
+      </p:pic>
+      <p:sp>
+        <p:nvSpPr>
+          <p:cNvPr id="6" name="TextBox 5"/>
+          <p:cNvSpPr txBox="1"/>
+          <p:nvPr/>
+        </p:nvSpPr>
+        <p:spPr>
+          <a:xfrm>
+            <a:off x="4297680" y="1600200"/>
+            <a:ext cx="2697480" cy="731520"/>
+          </a:xfrm>
+          <a:prstGeom prst="rect">
+            <a:avLst/>
+          </a:prstGeom>
+          <a:noFill/>
+        </p:spPr>
+        <p:txBody>
+          <a:bodyPr wrap="square">
+            <a:spAutoFit/>
+          </a:bodyPr>
+          <a:lstStyle/>
+          <a:p>
+            <a:pPr algn="l"/>
+            <a:r>
+              <a:rPr sz="1200" b="1">
+                <a:solidFill>
+                  <a:srgbClr val="2A2E30"/>
+                </a:solidFill>
+                <a:latin typeface="Arial"/>
+              </a:rPr>
+              <a:t>Age &amp; Sex complete</a:t>
+            </a:r>
+            <a:r>
+              <a:rPr sz="1200" b="0">
+                <a:solidFill>
+                  <a:srgbClr val="505759"/>
+                </a:solidFill>
+                <a:latin typeface="Arial"/>
+              </a:rPr>
+              <a:t>; race and ethnicity essentially complete.</a:t>
+            </a:r>
+          </a:p>
+        </p:txBody>
+      </p:sp>
+      <p:sp>
+        <p:nvSpPr>
+          <p:cNvPr id="7" name="TextBox 6"/>
+          <p:cNvSpPr txBox="1"/>
+          <p:nvPr/>
+        </p:nvSpPr>
+        <p:spPr>
+          <a:xfrm>
+            <a:off x="4297680" y="2203704"/>
+            <a:ext cx="2697480" cy="731520"/>
+          </a:xfrm>
+          <a:prstGeom prst="rect">
+            <a:avLst/>
+          </a:prstGeom>
+          <a:noFill/>
+        </p:spPr>
+        <p:txBody>
+          <a:bodyPr wrap="square">
+            <a:spAutoFit/>
+          </a:bodyPr>
+          <a:lstStyle/>
+          <a:p>
+            <a:pPr algn="l"/>
+            <a:r>
+              <a:rPr sz="1200" b="1">
+                <a:solidFill>
+                  <a:srgbClr val="C8102E"/>
+                </a:solidFill>
+                <a:latin typeface="Arial"/>
+              </a:rPr>
+              <a:t>BMI missing in 76%</a:t>
+            </a:r>
+            <a:r>
+              <a:rPr sz="1200" b="0">
+                <a:solidFill>
+                  <a:srgbClr val="505759"/>
+                </a:solidFill>
+                <a:latin typeface="Arial"/>
+              </a:rPr>
+              <a:t>, Time_to_Event in 92% (recorded for positives only).</a:t>
+            </a:r>
+          </a:p>
+        </p:txBody>
+      </p:sp>
+      <p:sp>
+        <p:nvSpPr>
+          <p:cNvPr id="8" name="TextBox 7"/>
+          <p:cNvSpPr txBox="1"/>
+          <p:nvPr/>
+        </p:nvSpPr>
+        <p:spPr>
+          <a:xfrm>
+            <a:off x="4297680" y="2807208"/>
+            <a:ext cx="2697480" cy="731520"/>
+          </a:xfrm>
+          <a:prstGeom prst="rect">
+            <a:avLst/>
+          </a:prstGeom>
+          <a:noFill/>
+        </p:spPr>
+        <p:txBody>
+          <a:bodyPr wrap="square">
+            <a:spAutoFit/>
+          </a:bodyPr>
+          <a:lstStyle/>
+          <a:p>
+            <a:pPr algn="l"/>
+            <a:r>
+              <a:rPr sz="1200" b="1">
+                <a:solidFill>
+                  <a:srgbClr val="2A2E30"/>
+                </a:solidFill>
+                <a:latin typeface="Arial"/>
+              </a:rPr>
+              <a:t>1,090 / 1,103 have CAISR</a:t>
+            </a:r>
+            <a:r>
+              <a:rPr sz="1200" b="0">
+                <a:solidFill>
+                  <a:srgbClr val="505759"/>
+                </a:solidFill>
+                <a:latin typeface="Arial"/>
+              </a:rPr>
+              <a:t> — 13 recordings fall back to global features only.</a:t>
+            </a:r>
+          </a:p>
+        </p:txBody>
+      </p:sp>
+      <p:sp>
+        <p:nvSpPr>
+          <p:cNvPr id="9" name="TextBox 8"/>
+          <p:cNvSpPr txBox="1"/>
+          <p:nvPr/>
+        </p:nvSpPr>
+        <p:spPr>
+          <a:xfrm>
+            <a:off x="4297680" y="3410712"/>
+            <a:ext cx="2697480" cy="731520"/>
+          </a:xfrm>
+          <a:prstGeom prst="rect">
+            <a:avLst/>
+          </a:prstGeom>
+          <a:noFill/>
+        </p:spPr>
+        <p:txBody>
+          <a:bodyPr wrap="square">
+            <a:spAutoFit/>
+          </a:bodyPr>
+          <a:lstStyle/>
+          <a:p>
+            <a:pPr algn="l"/>
+            <a:r>
+              <a:rPr sz="1200" b="1">
+                <a:solidFill>
+                  <a:srgbClr val="2A2E30"/>
+                </a:solidFill>
+                <a:latin typeface="Arial"/>
+              </a:rPr>
+              <a:t>18 short recordings</a:t>
+            </a:r>
+            <a:r>
+              <a:rPr sz="1200" b="0">
+                <a:solidFill>
+                  <a:srgbClr val="505759"/>
+                </a:solidFill>
+                <a:latin typeface="Arial"/>
+              </a:rPr>
+              <a:t> (&lt;4 h; 9 under 1 h) are flagged for the training pipeline.</a:t>
+            </a:r>
+          </a:p>
+        </p:txBody>
+      </p:sp>
+      <p:sp>
+        <p:nvSpPr>
+          <p:cNvPr id="10" name="TextBox 9"/>
+          <p:cNvSpPr txBox="1"/>
+          <p:nvPr/>
+        </p:nvSpPr>
+        <p:spPr>
+          <a:xfrm>
+            <a:off x="4297680" y="4014216"/>
+            <a:ext cx="2697480" cy="731520"/>
+          </a:xfrm>
+          <a:prstGeom prst="rect">
+            <a:avLst/>
+          </a:prstGeom>
+          <a:noFill/>
+        </p:spPr>
+        <p:txBody>
+          <a:bodyPr wrap="square">
+            <a:spAutoFit/>
+          </a:bodyPr>
+          <a:lstStyle/>
+          <a:p>
+            <a:pPr algn="l"/>
+            <a:r>
+              <a:rPr sz="1200" b="1">
+                <a:solidFill>
+                  <a:srgbClr val="2A2E30"/>
+                </a:solidFill>
+                <a:latin typeface="Arial"/>
+              </a:rPr>
+              <a:t>Demographics ↔ EDF linkage is exact</a:t>
+            </a:r>
+            <a:r>
+              <a:rPr sz="1200" b="0">
+                <a:solidFill>
+                  <a:srgbClr val="505759"/>
+                </a:solidFill>
+                <a:latin typeface="Arial"/>
+              </a:rPr>
+              <a:t>: 0 orphans in either direction.</a:t>
+            </a:r>
+          </a:p>
+        </p:txBody>
+      </p:sp>
+      <p:sp>
+        <p:nvSpPr>
+          <p:cNvPr id="11" name="TextBox 10"/>
+          <p:cNvSpPr txBox="1"/>
+          <p:nvPr/>
+        </p:nvSpPr>
+        <p:spPr>
+          <a:xfrm>
+            <a:off x="548640" y="4828032"/>
+            <a:ext cx="6035040" cy="228600"/>
+          </a:xfrm>
+          <a:prstGeom prst="rect">
+            <a:avLst/>
+          </a:prstGeom>
+          <a:noFill/>
+        </p:spPr>
+        <p:txBody>
+          <a:bodyPr wrap="square">
+            <a:spAutoFit/>
+          </a:bodyPr>
+          <a:lstStyle/>
+          <a:p>
+            <a:pPr algn="l"/>
+            <a:r>
+              <a:rPr sz="800" b="0">
+                <a:solidFill>
+                  <a:srgbClr val="898D8D"/>
+                </a:solidFill>
+                <a:latin typeface="Arial"/>
+              </a:rPr>
+              <a:t>PhysioNet Challenge 2026  ·  Scoring Metrics</a:t>
+            </a:r>
+          </a:p>
+        </p:txBody>
+      </p:sp>
+    </p:spTree>
+  </p:cSld>
+  <p:clrMapOvr>
+    <a:masterClrMapping/>
+  </p:clrMapOvr>
+</p:sld>
+</file>
+
+<file path=ppt/slides/slide23.xml><?xml version="1.0" encoding="utf-8"?>
+<p:sld xmlns:a="http://schemas.openxmlformats.org/drawingml/2006/main" xmlns:p="http://schemas.openxmlformats.org/presentationml/2006/main" xmlns:r="http://schemas.openxmlformats.org/officeDocument/2006/relationships">
+  <p:cSld>
+    <p:spTree>
+      <p:nvGrpSpPr>
+        <p:cNvPr id="1" name=""/>
+        <p:cNvGrpSpPr/>
+        <p:nvPr/>
+      </p:nvGrpSpPr>
+      <p:grpSpPr/>
+      <p:sp>
+        <p:nvSpPr>
+          <p:cNvPr id="2" name="Title 1"/>
+          <p:cNvSpPr>
+            <a:spLocks noGrp="1"/>
+          </p:cNvSpPr>
+          <p:nvPr>
+            <p:ph type="title"/>
+          </p:nvPr>
+        </p:nvSpPr>
+        <p:spPr/>
+        <p:txBody>
+          <a:bodyPr/>
+          <a:lstStyle/>
+          <a:p>
+            <a:r>
+              <a:rPr b="1">
+                <a:latin typeface="Arial"/>
+              </a:rPr>
+              <a:t>What this means for our approach</a:t>
+            </a:r>
+          </a:p>
+        </p:txBody>
+      </p:sp>
+      <p:sp>
+        <p:nvSpPr>
+          <p:cNvPr id="3" name="Content Placeholder 2"/>
+          <p:cNvSpPr>
+            <a:spLocks noGrp="1"/>
+          </p:cNvSpPr>
+          <p:nvPr>
+            <p:ph idx="1"/>
+          </p:nvPr>
+        </p:nvSpPr>
+        <p:spPr/>
+        <p:txBody>
+          <a:bodyPr/>
+          <a:lstStyle/>
+          <a:p/>
+        </p:txBody>
+      </p:sp>
+      <p:sp>
+        <p:nvSpPr>
+          <p:cNvPr id="4" name="TextBox 3"/>
+          <p:cNvSpPr txBox="1"/>
+          <p:nvPr/>
+        </p:nvSpPr>
+        <p:spPr>
+          <a:xfrm>
+            <a:off x="548640" y="1024128"/>
+            <a:ext cx="6446520" cy="274320"/>
+          </a:xfrm>
+          <a:prstGeom prst="rect">
+            <a:avLst/>
+          </a:prstGeom>
+          <a:noFill/>
+        </p:spPr>
+        <p:txBody>
+          <a:bodyPr wrap="square" anchor="t" lIns="45720" rIns="45720" tIns="18288" bIns="18288">
+            <a:spAutoFit/>
+          </a:bodyPr>
+          <a:lstStyle/>
+          <a:p>
+            <a:pPr algn="l">
+              <a:spcBef>
+                <a:spcPts val="0"/>
+              </a:spcBef>
+              <a:spcAft>
+                <a:spcPts val="0"/>
+              </a:spcAft>
+              <a:buNone/>
+            </a:pPr>
+            <a:r>
+              <a:rPr sz="1100" b="1" i="0">
+                <a:solidFill>
+                  <a:srgbClr val="C8102E"/>
+                </a:solidFill>
+                <a:latin typeface="Arial"/>
+              </a:rPr>
+              <a:t>TAKEAWAYS</a:t>
+            </a:r>
+          </a:p>
+        </p:txBody>
+      </p:sp>
+      <p:sp>
+        <p:nvSpPr>
+          <p:cNvPr id="5" name="Rounded Rectangle 4"/>
+          <p:cNvSpPr/>
+          <p:nvPr/>
+        </p:nvSpPr>
+        <p:spPr>
+          <a:xfrm>
+            <a:off x="548640" y="1417320"/>
+            <a:ext cx="6446520" cy="758952"/>
+          </a:xfrm>
+          <a:prstGeom prst="roundRect">
+            <a:avLst>
+              <a:gd name="adj" fmla="val 6000"/>
+            </a:avLst>
+          </a:prstGeom>
+          <a:solidFill>
+            <a:srgbClr val="F2F4F4"/>
+          </a:solidFill>
+          <a:ln>
+            <a:noFill/>
+          </a:ln>
+          <a:effectLst/>
+        </p:spPr>
+        <p:style>
+          <a:lnRef idx="1">
+            <a:schemeClr val="accent1"/>
+          </a:lnRef>
+          <a:fillRef idx="3">
+            <a:schemeClr val="accent1"/>
+          </a:fillRef>
+          <a:effectRef idx="2">
+            <a:schemeClr val="accent1"/>
+          </a:effectRef>
+          <a:fontRef idx="minor">
+            <a:schemeClr val="lt1"/>
+          </a:fontRef>
+        </p:style>
+        <p:txBody>
+          <a:bodyPr rtlCol="0" anchor="ctr"/>
+          <a:lstStyle/>
+          <a:p>
+            <a:pPr algn="ctr"/>
+          </a:p>
+        </p:txBody>
+      </p:sp>
+      <p:sp>
+        <p:nvSpPr>
+          <p:cNvPr id="6" name="Rounded Rectangle 5"/>
+          <p:cNvSpPr/>
+          <p:nvPr/>
+        </p:nvSpPr>
+        <p:spPr>
+          <a:xfrm>
+            <a:off x="685800" y="1563624"/>
+            <a:ext cx="457200" cy="457200"/>
+          </a:xfrm>
+          <a:prstGeom prst="roundRect">
+            <a:avLst>
+              <a:gd name="adj" fmla="val 25000"/>
+            </a:avLst>
+          </a:prstGeom>
+          <a:solidFill>
+            <a:srgbClr val="C8102E"/>
+          </a:solidFill>
+          <a:ln>
+            <a:noFill/>
+          </a:ln>
+          <a:effectLst/>
+        </p:spPr>
+        <p:style>
+          <a:lnRef idx="1">
+            <a:schemeClr val="accent1"/>
+          </a:lnRef>
+          <a:fillRef idx="3">
+            <a:schemeClr val="accent1"/>
+          </a:fillRef>
+          <a:effectRef idx="2">
+            <a:schemeClr val="accent1"/>
+          </a:effectRef>
+          <a:fontRef idx="minor">
+            <a:schemeClr val="lt1"/>
+          </a:fontRef>
+        </p:style>
+        <p:txBody>
+          <a:bodyPr rtlCol="0" anchor="ctr"/>
+          <a:lstStyle/>
+          <a:p>
+            <a:pPr algn="ctr"/>
+            <a:r>
+              <a:rPr b="1" sz="1500">
+                <a:solidFill>
+                  <a:srgbClr val="FFFFFF"/>
+                </a:solidFill>
+                <a:latin typeface="Arial"/>
+              </a:rPr>
+              <a:t>1</a:t>
+            </a:r>
+          </a:p>
+        </p:txBody>
+      </p:sp>
+      <p:sp>
+        <p:nvSpPr>
+          <p:cNvPr id="7" name="TextBox 6"/>
+          <p:cNvSpPr txBox="1"/>
+          <p:nvPr/>
+        </p:nvSpPr>
+        <p:spPr>
+          <a:xfrm>
+            <a:off x="1325880" y="1417320"/>
+            <a:ext cx="5532120" cy="758952"/>
+          </a:xfrm>
+          <a:prstGeom prst="rect">
+            <a:avLst/>
+          </a:prstGeom>
+          <a:noFill/>
+        </p:spPr>
+        <p:txBody>
+          <a:bodyPr wrap="square" anchor="ctr" lIns="45720" rIns="45720" tIns="18288" bIns="18288">
+            <a:spAutoFit/>
+          </a:bodyPr>
+          <a:lstStyle/>
+          <a:p>
+            <a:pPr algn="l">
+              <a:spcBef>
+                <a:spcPts val="0"/>
+              </a:spcBef>
+              <a:spcAft>
+                <a:spcPts val="100"/>
+              </a:spcAft>
+              <a:buNone/>
+            </a:pPr>
+            <a:r>
+              <a:rPr sz="1300" b="1" i="0">
+                <a:solidFill>
+                  <a:srgbClr val="2A2E30"/>
+                </a:solidFill>
+                <a:latin typeface="Arial"/>
+              </a:rPr>
+              <a:t>Optimize the Reward, not accuracy</a:t>
+            </a:r>
+          </a:p>
+          <a:p>
+            <a:pPr algn="l">
+              <a:spcBef>
+                <a:spcPts val="0"/>
+              </a:spcBef>
+              <a:spcAft>
+                <a:spcPts val="0"/>
+              </a:spcAft>
+              <a:buNone/>
+            </a:pPr>
+            <a:r>
+              <a:rPr sz="1050" b="0" i="0">
+                <a:solidFill>
+                  <a:srgbClr val="505759"/>
+                </a:solidFill>
+                <a:latin typeface="Arial"/>
+              </a:rPr>
+              <a:t>Tune the decision threshold to maximize prevalence-weighted payoff — accuracy will look worse and that's fine.</a:t>
+            </a:r>
+          </a:p>
+        </p:txBody>
+      </p:sp>
+      <p:sp>
+        <p:nvSpPr>
+          <p:cNvPr id="8" name="Rounded Rectangle 7"/>
+          <p:cNvSpPr/>
+          <p:nvPr/>
+        </p:nvSpPr>
+        <p:spPr>
+          <a:xfrm>
+            <a:off x="548640" y="2249424"/>
+            <a:ext cx="6446520" cy="758952"/>
+          </a:xfrm>
+          <a:prstGeom prst="roundRect">
+            <a:avLst>
+              <a:gd name="adj" fmla="val 6000"/>
+            </a:avLst>
+          </a:prstGeom>
+          <a:solidFill>
+            <a:srgbClr val="F2F4F4"/>
+          </a:solidFill>
+          <a:ln>
+            <a:noFill/>
+          </a:ln>
+          <a:effectLst/>
+        </p:spPr>
+        <p:style>
+          <a:lnRef idx="1">
+            <a:schemeClr val="accent1"/>
+          </a:lnRef>
+          <a:fillRef idx="3">
+            <a:schemeClr val="accent1"/>
+          </a:fillRef>
+          <a:effectRef idx="2">
+            <a:schemeClr val="accent1"/>
+          </a:effectRef>
+          <a:fontRef idx="minor">
+            <a:schemeClr val="lt1"/>
+          </a:fontRef>
+        </p:style>
+        <p:txBody>
+          <a:bodyPr rtlCol="0" anchor="ctr"/>
+          <a:lstStyle/>
+          <a:p>
+            <a:pPr algn="ctr"/>
+          </a:p>
+        </p:txBody>
+      </p:sp>
+      <p:sp>
+        <p:nvSpPr>
+          <p:cNvPr id="9" name="Rounded Rectangle 8"/>
+          <p:cNvSpPr/>
+          <p:nvPr/>
+        </p:nvSpPr>
+        <p:spPr>
+          <a:xfrm>
+            <a:off x="685800" y="2395728"/>
+            <a:ext cx="457200" cy="457200"/>
+          </a:xfrm>
+          <a:prstGeom prst="roundRect">
+            <a:avLst>
+              <a:gd name="adj" fmla="val 25000"/>
+            </a:avLst>
+          </a:prstGeom>
+          <a:solidFill>
+            <a:srgbClr val="C8102E"/>
+          </a:solidFill>
+          <a:ln>
+            <a:noFill/>
+          </a:ln>
+          <a:effectLst/>
+        </p:spPr>
+        <p:style>
+          <a:lnRef idx="1">
+            <a:schemeClr val="accent1"/>
+          </a:lnRef>
+          <a:fillRef idx="3">
+            <a:schemeClr val="accent1"/>
+          </a:fillRef>
+          <a:effectRef idx="2">
+            <a:schemeClr val="accent1"/>
+          </a:effectRef>
+          <a:fontRef idx="minor">
+            <a:schemeClr val="lt1"/>
+          </a:fontRef>
+        </p:style>
+        <p:txBody>
+          <a:bodyPr rtlCol="0" anchor="ctr"/>
+          <a:lstStyle/>
+          <a:p>
+            <a:pPr algn="ctr"/>
+            <a:r>
+              <a:rPr b="1" sz="1500">
+                <a:solidFill>
+                  <a:srgbClr val="FFFFFF"/>
+                </a:solidFill>
+                <a:latin typeface="Arial"/>
+              </a:rPr>
+              <a:t>2</a:t>
+            </a:r>
+          </a:p>
+        </p:txBody>
+      </p:sp>
+      <p:sp>
+        <p:nvSpPr>
+          <p:cNvPr id="10" name="TextBox 9"/>
+          <p:cNvSpPr txBox="1"/>
+          <p:nvPr/>
+        </p:nvSpPr>
+        <p:spPr>
+          <a:xfrm>
+            <a:off x="1325880" y="2249424"/>
+            <a:ext cx="5532120" cy="758952"/>
+          </a:xfrm>
+          <a:prstGeom prst="rect">
+            <a:avLst/>
+          </a:prstGeom>
+          <a:noFill/>
+        </p:spPr>
+        <p:txBody>
+          <a:bodyPr wrap="square" anchor="ctr" lIns="45720" rIns="45720" tIns="18288" bIns="18288">
+            <a:spAutoFit/>
+          </a:bodyPr>
+          <a:lstStyle/>
+          <a:p>
+            <a:pPr algn="l">
+              <a:spcBef>
+                <a:spcPts val="0"/>
+              </a:spcBef>
+              <a:spcAft>
+                <a:spcPts val="100"/>
+              </a:spcAft>
+              <a:buNone/>
+            </a:pPr>
+            <a:r>
+              <a:rPr sz="1300" b="1" i="0">
+                <a:solidFill>
+                  <a:srgbClr val="2A2E30"/>
+                </a:solidFill>
+                <a:latin typeface="Arial"/>
+              </a:rPr>
+              <a:t>Protect recall on the rare class</a:t>
+            </a:r>
+          </a:p>
+          <a:p>
+            <a:pPr algn="l">
+              <a:spcBef>
+                <a:spcPts val="0"/>
+              </a:spcBef>
+              <a:spcAft>
+                <a:spcPts val="0"/>
+              </a:spcAft>
+              <a:buNone/>
+            </a:pPr>
+            <a:r>
+              <a:rPr sz="1050" b="0" i="0">
+                <a:solidFill>
+                  <a:srgbClr val="505759"/>
+                </a:solidFill>
+                <a:latin typeface="Arial"/>
+              </a:rPr>
+              <a:t>Each caught positive is worth 1/p − 1; a missed one costs −1. Missing impairment is expensive.</a:t>
+            </a:r>
+          </a:p>
+        </p:txBody>
+      </p:sp>
+      <p:sp>
+        <p:nvSpPr>
+          <p:cNvPr id="11" name="Rounded Rectangle 10"/>
+          <p:cNvSpPr/>
+          <p:nvPr/>
+        </p:nvSpPr>
+        <p:spPr>
+          <a:xfrm>
+            <a:off x="548640" y="3081528"/>
+            <a:ext cx="6446520" cy="758952"/>
+          </a:xfrm>
+          <a:prstGeom prst="roundRect">
+            <a:avLst>
+              <a:gd name="adj" fmla="val 6000"/>
+            </a:avLst>
+          </a:prstGeom>
+          <a:solidFill>
+            <a:srgbClr val="F2F4F4"/>
+          </a:solidFill>
+          <a:ln>
+            <a:noFill/>
+          </a:ln>
+          <a:effectLst/>
+        </p:spPr>
+        <p:style>
+          <a:lnRef idx="1">
+            <a:schemeClr val="accent1"/>
+          </a:lnRef>
+          <a:fillRef idx="3">
+            <a:schemeClr val="accent1"/>
+          </a:fillRef>
+          <a:effectRef idx="2">
+            <a:schemeClr val="accent1"/>
+          </a:effectRef>
+          <a:fontRef idx="minor">
+            <a:schemeClr val="lt1"/>
+          </a:fontRef>
+        </p:style>
+        <p:txBody>
+          <a:bodyPr rtlCol="0" anchor="ctr"/>
+          <a:lstStyle/>
+          <a:p>
+            <a:pPr algn="ctr"/>
+          </a:p>
+        </p:txBody>
+      </p:sp>
+      <p:sp>
+        <p:nvSpPr>
+          <p:cNvPr id="12" name="Rounded Rectangle 11"/>
+          <p:cNvSpPr/>
+          <p:nvPr/>
+        </p:nvSpPr>
+        <p:spPr>
+          <a:xfrm>
+            <a:off x="685800" y="3227832"/>
+            <a:ext cx="457200" cy="457200"/>
+          </a:xfrm>
+          <a:prstGeom prst="roundRect">
+            <a:avLst>
+              <a:gd name="adj" fmla="val 25000"/>
+            </a:avLst>
+          </a:prstGeom>
+          <a:solidFill>
+            <a:srgbClr val="C8102E"/>
+          </a:solidFill>
+          <a:ln>
+            <a:noFill/>
+          </a:ln>
+          <a:effectLst/>
+        </p:spPr>
+        <p:style>
+          <a:lnRef idx="1">
+            <a:schemeClr val="accent1"/>
+          </a:lnRef>
+          <a:fillRef idx="3">
+            <a:schemeClr val="accent1"/>
+          </a:fillRef>
+          <a:effectRef idx="2">
+            <a:schemeClr val="accent1"/>
+          </a:effectRef>
+          <a:fontRef idx="minor">
+            <a:schemeClr val="lt1"/>
+          </a:fontRef>
+        </p:style>
+        <p:txBody>
+          <a:bodyPr rtlCol="0" anchor="ctr"/>
+          <a:lstStyle/>
+          <a:p>
+            <a:pPr algn="ctr"/>
+            <a:r>
+              <a:rPr b="1" sz="1500">
+                <a:solidFill>
+                  <a:srgbClr val="FFFFFF"/>
+                </a:solidFill>
+                <a:latin typeface="Arial"/>
+              </a:rPr>
+              <a:t>3</a:t>
+            </a:r>
+          </a:p>
+        </p:txBody>
+      </p:sp>
+      <p:sp>
+        <p:nvSpPr>
+          <p:cNvPr id="13" name="TextBox 12"/>
+          <p:cNvSpPr txBox="1"/>
+          <p:nvPr/>
+        </p:nvSpPr>
+        <p:spPr>
+          <a:xfrm>
+            <a:off x="1325880" y="3081528"/>
+            <a:ext cx="5532120" cy="758952"/>
+          </a:xfrm>
+          <a:prstGeom prst="rect">
+            <a:avLst/>
+          </a:prstGeom>
+          <a:noFill/>
+        </p:spPr>
+        <p:txBody>
+          <a:bodyPr wrap="square" anchor="ctr" lIns="45720" rIns="45720" tIns="18288" bIns="18288">
+            <a:spAutoFit/>
+          </a:bodyPr>
+          <a:lstStyle/>
+          <a:p>
+            <a:pPr algn="l">
+              <a:spcBef>
+                <a:spcPts val="0"/>
+              </a:spcBef>
+              <a:spcAft>
+                <a:spcPts val="100"/>
+              </a:spcAft>
+              <a:buNone/>
+            </a:pPr>
+            <a:r>
+              <a:rPr sz="1300" b="1" i="0">
+                <a:solidFill>
+                  <a:srgbClr val="2A2E30"/>
+                </a:solidFill>
+                <a:latin typeface="Arial"/>
+              </a:rPr>
+              <a:t>Don't lean on age</a:t>
+            </a:r>
+          </a:p>
+          <a:p>
+            <a:pPr algn="l">
+              <a:spcBef>
+                <a:spcPts val="0"/>
+              </a:spcBef>
+              <a:spcAft>
+                <a:spcPts val="0"/>
+              </a:spcAft>
+              <a:buNone/>
+            </a:pPr>
+            <a:r>
+              <a:rPr sz="1050" b="0" i="0">
+                <a:solidFill>
+                  <a:srgbClr val="505759"/>
+                </a:solidFill>
+                <a:latin typeface="Arial"/>
+              </a:rPr>
+              <a:t>The age-aware AUROCs strip the age shortcut. Features must carry real signal within an age band.</a:t>
+            </a:r>
+          </a:p>
+        </p:txBody>
+      </p:sp>
+      <p:sp>
+        <p:nvSpPr>
+          <p:cNvPr id="14" name="Rounded Rectangle 13"/>
+          <p:cNvSpPr/>
+          <p:nvPr/>
+        </p:nvSpPr>
+        <p:spPr>
+          <a:xfrm>
+            <a:off x="548640" y="3913632"/>
+            <a:ext cx="6446520" cy="758952"/>
+          </a:xfrm>
+          <a:prstGeom prst="roundRect">
+            <a:avLst>
+              <a:gd name="adj" fmla="val 6000"/>
+            </a:avLst>
+          </a:prstGeom>
+          <a:solidFill>
+            <a:srgbClr val="F2F4F4"/>
+          </a:solidFill>
+          <a:ln>
+            <a:noFill/>
+          </a:ln>
+          <a:effectLst/>
+        </p:spPr>
+        <p:style>
+          <a:lnRef idx="1">
+            <a:schemeClr val="accent1"/>
+          </a:lnRef>
+          <a:fillRef idx="3">
+            <a:schemeClr val="accent1"/>
+          </a:fillRef>
+          <a:effectRef idx="2">
+            <a:schemeClr val="accent1"/>
+          </a:effectRef>
+          <a:fontRef idx="minor">
+            <a:schemeClr val="lt1"/>
+          </a:fontRef>
+        </p:style>
+        <p:txBody>
+          <a:bodyPr rtlCol="0" anchor="ctr"/>
+          <a:lstStyle/>
+          <a:p>
+            <a:pPr algn="ctr"/>
+          </a:p>
+        </p:txBody>
+      </p:sp>
+      <p:sp>
+        <p:nvSpPr>
+          <p:cNvPr id="15" name="Rounded Rectangle 14"/>
+          <p:cNvSpPr/>
+          <p:nvPr/>
+        </p:nvSpPr>
+        <p:spPr>
+          <a:xfrm>
+            <a:off x="685800" y="4059936"/>
+            <a:ext cx="457200" cy="457200"/>
+          </a:xfrm>
+          <a:prstGeom prst="roundRect">
+            <a:avLst>
+              <a:gd name="adj" fmla="val 25000"/>
+            </a:avLst>
+          </a:prstGeom>
+          <a:solidFill>
+            <a:srgbClr val="C8102E"/>
+          </a:solidFill>
+          <a:ln>
+            <a:noFill/>
+          </a:ln>
+          <a:effectLst/>
+        </p:spPr>
+        <p:style>
+          <a:lnRef idx="1">
+            <a:schemeClr val="accent1"/>
+          </a:lnRef>
+          <a:fillRef idx="3">
+            <a:schemeClr val="accent1"/>
+          </a:fillRef>
+          <a:effectRef idx="2">
+            <a:schemeClr val="accent1"/>
+          </a:effectRef>
+          <a:fontRef idx="minor">
+            <a:schemeClr val="lt1"/>
+          </a:fontRef>
+        </p:style>
+        <p:txBody>
+          <a:bodyPr rtlCol="0" anchor="ctr"/>
+          <a:lstStyle/>
+          <a:p>
+            <a:pPr algn="ctr"/>
+            <a:r>
+              <a:rPr b="1" sz="1500">
+                <a:solidFill>
+                  <a:srgbClr val="FFFFFF"/>
+                </a:solidFill>
+                <a:latin typeface="Arial"/>
+              </a:rPr>
+              <a:t>4</a:t>
+            </a:r>
+          </a:p>
+        </p:txBody>
+      </p:sp>
+      <p:sp>
+        <p:nvSpPr>
+          <p:cNvPr id="16" name="TextBox 15"/>
+          <p:cNvSpPr txBox="1"/>
+          <p:nvPr/>
+        </p:nvSpPr>
+        <p:spPr>
+          <a:xfrm>
+            <a:off x="1325880" y="3913632"/>
+            <a:ext cx="5532120" cy="758952"/>
+          </a:xfrm>
+          <a:prstGeom prst="rect">
+            <a:avLst/>
+          </a:prstGeom>
+          <a:noFill/>
+        </p:spPr>
+        <p:txBody>
+          <a:bodyPr wrap="square" anchor="ctr" lIns="45720" rIns="45720" tIns="18288" bIns="18288">
+            <a:spAutoFit/>
+          </a:bodyPr>
+          <a:lstStyle/>
+          <a:p>
+            <a:pPr algn="l">
+              <a:spcBef>
+                <a:spcPts val="0"/>
+              </a:spcBef>
+              <a:spcAft>
+                <a:spcPts val="100"/>
+              </a:spcAft>
+              <a:buNone/>
+            </a:pPr>
+            <a:r>
+              <a:rPr sz="1300" b="1" i="0">
+                <a:solidFill>
+                  <a:srgbClr val="2A2E30"/>
+                </a:solidFill>
+                <a:latin typeface="Arial"/>
+              </a:rPr>
+              <a:t>Validate with the official code</a:t>
+            </a:r>
+          </a:p>
+          <a:p>
+            <a:pPr algn="l">
+              <a:spcBef>
+                <a:spcPts val="0"/>
+              </a:spcBef>
+              <a:spcAft>
+                <a:spcPts val="0"/>
+              </a:spcAft>
+              <a:buNone/>
+            </a:pPr>
+            <a:r>
+              <a:rPr sz="1050" b="0" i="0">
+                <a:solidFill>
+                  <a:srgbClr val="505759"/>
+                </a:solidFill>
+                <a:latin typeface="Arial"/>
+              </a:rPr>
+              <a:t>Score cross-validation folds with evaluate_model.py so our internal numbers match the leaderboard.</a:t>
+            </a:r>
+          </a:p>
+        </p:txBody>
+      </p:sp>
+      <p:sp>
+        <p:nvSpPr>
+          <p:cNvPr id="17" name="TextBox 16"/>
+          <p:cNvSpPr txBox="1"/>
+          <p:nvPr/>
+        </p:nvSpPr>
+        <p:spPr>
+          <a:xfrm>
+            <a:off x="548640" y="4828032"/>
+            <a:ext cx="6035040" cy="228600"/>
+          </a:xfrm>
+          <a:prstGeom prst="rect">
+            <a:avLst/>
+          </a:prstGeom>
+          <a:noFill/>
+        </p:spPr>
+        <p:txBody>
+          <a:bodyPr wrap="square" anchor="t" lIns="45720" rIns="45720" tIns="18288" bIns="18288">
+            <a:spAutoFit/>
+          </a:bodyPr>
+          <a:lstStyle/>
+          <a:p>
+            <a:pPr algn="l">
+              <a:spcBef>
+                <a:spcPts val="0"/>
+              </a:spcBef>
+              <a:spcAft>
+                <a:spcPts val="0"/>
+              </a:spcAft>
+              <a:buNone/>
+            </a:pPr>
+            <a:r>
+              <a:rPr sz="800" b="0" i="0">
+                <a:solidFill>
+                  <a:srgbClr val="898D8D"/>
+                </a:solidFill>
+                <a:latin typeface="Arial"/>
+              </a:rPr>
+              <a:t>PhysioNet Challenge 2026  ·  Scoring Metrics</a:t>
+            </a:r>
+          </a:p>
+        </p:txBody>
+      </p:sp>
+    </p:spTree>
+  </p:cSld>
+  <p:clrMapOvr>
+    <a:masterClrMapping/>
+  </p:clrMapOvr>
+</p:sld>
+</file>
+
+<file path=ppt/slides/slide24.xml><?xml version="1.0" encoding="utf-8"?>
+<p:sld xmlns:a="http://schemas.openxmlformats.org/drawingml/2006/main" xmlns:p="http://schemas.openxmlformats.org/presentationml/2006/main" xmlns:r="http://schemas.openxmlformats.org/officeDocument/2006/relationships">
+  <p:cSld>
+    <p:spTree>
+      <p:nvGrpSpPr>
+        <p:cNvPr id="1" name=""/>
+        <p:cNvGrpSpPr/>
+        <p:nvPr/>
+      </p:nvGrpSpPr>
+      <p:grpSpPr/>
+      <p:sp>
+        <p:nvSpPr>
+          <p:cNvPr id="2" name="Title 1"/>
+          <p:cNvSpPr>
+            <a:spLocks noGrp="1"/>
+          </p:cNvSpPr>
+          <p:nvPr>
+            <p:ph type="title"/>
+          </p:nvPr>
+        </p:nvSpPr>
+        <p:spPr/>
+        <p:txBody>
+          <a:bodyPr/>
+          <a:lstStyle/>
+          <a:p>
+            <a:r>
+              <a:rPr b="1">
+                <a:latin typeface="Arial"/>
+              </a:rPr>
+              <a:t>References</a:t>
+            </a:r>
+          </a:p>
+        </p:txBody>
+      </p:sp>
+      <p:sp>
+        <p:nvSpPr>
+          <p:cNvPr id="3" name="Content Placeholder 2"/>
+          <p:cNvSpPr>
+            <a:spLocks noGrp="1"/>
+          </p:cNvSpPr>
+          <p:nvPr>
+            <p:ph idx="1"/>
+          </p:nvPr>
+        </p:nvSpPr>
+        <p:spPr/>
+        <p:txBody>
+          <a:bodyPr/>
+          <a:lstStyle/>
+          <a:p/>
+        </p:txBody>
+      </p:sp>
+      <p:sp>
+        <p:nvSpPr>
+          <p:cNvPr id="4" name="TextBox 3"/>
+          <p:cNvSpPr txBox="1"/>
+          <p:nvPr/>
+        </p:nvSpPr>
+        <p:spPr>
+          <a:xfrm>
+            <a:off x="548640" y="1024128"/>
+            <a:ext cx="6446520" cy="274320"/>
+          </a:xfrm>
+          <a:prstGeom prst="rect">
+            <a:avLst/>
+          </a:prstGeom>
+          <a:noFill/>
+        </p:spPr>
+        <p:txBody>
+          <a:bodyPr wrap="square" anchor="t" lIns="45720" rIns="45720" tIns="18288" bIns="18288">
+            <a:spAutoFit/>
+          </a:bodyPr>
+          <a:lstStyle/>
+          <a:p>
+            <a:pPr algn="l">
+              <a:spcBef>
+                <a:spcPts val="0"/>
+              </a:spcBef>
+              <a:spcAft>
+                <a:spcPts val="0"/>
+              </a:spcAft>
+              <a:buNone/>
+            </a:pPr>
+            <a:r>
+              <a:rPr sz="1100" b="1" i="0">
+                <a:solidFill>
+                  <a:srgbClr val="C8102E"/>
+                </a:solidFill>
+                <a:latin typeface="Arial"/>
+              </a:rPr>
+              <a:t>SOURCES</a:t>
+            </a:r>
+          </a:p>
+        </p:txBody>
+      </p:sp>
+      <p:sp>
+        <p:nvSpPr>
+          <p:cNvPr id="5" name="TextBox 4"/>
+          <p:cNvSpPr txBox="1"/>
+          <p:nvPr/>
+        </p:nvSpPr>
+        <p:spPr>
+          <a:xfrm>
+            <a:off x="548640" y="1417320"/>
+            <a:ext cx="6446520" cy="3108960"/>
+          </a:xfrm>
+          <a:prstGeom prst="rect">
+            <a:avLst/>
+          </a:prstGeom>
+          <a:noFill/>
+        </p:spPr>
+        <p:txBody>
+          <a:bodyPr wrap="square" anchor="t" lIns="45720" rIns="45720" tIns="18288" bIns="18288">
+            <a:spAutoFit/>
+          </a:bodyPr>
+          <a:lstStyle/>
+          <a:p>
+            <a:pPr>
+              <a:spcBef>
+                <a:spcPts val="600"/>
+              </a:spcBef>
+              <a:spcAft>
+                <a:spcPts val="100"/>
+              </a:spcAft>
+              <a:buNone/>
+            </a:pPr>
+            <a:r>
+              <a:rPr sz="1300" b="1">
+                <a:solidFill>
+                  <a:srgbClr val="C8102E"/>
+                </a:solidFill>
+                <a:latin typeface="Arial"/>
+              </a:rPr>
+              <a:t>Challenge website  —  </a:t>
+            </a:r>
+            <a:r>
+              <a:rPr sz="1300" b="0">
+                <a:solidFill>
+                  <a:srgbClr val="2A2E30"/>
+                </a:solidFill>
+                <a:latin typeface="Arial"/>
+              </a:rPr>
+              <a:t>George B. Moody PhysioNet Challenge 2026</a:t>
+            </a:r>
+          </a:p>
+          <a:p>
+            <a:pPr algn="l">
+              <a:spcBef>
+                <a:spcPts val="0"/>
+              </a:spcBef>
+              <a:spcAft>
+                <a:spcPts val="600"/>
+              </a:spcAft>
+              <a:buNone/>
+            </a:pPr>
+            <a:r>
+              <a:rPr sz="1100" b="0" i="0">
+                <a:solidFill>
+                  <a:srgbClr val="346583"/>
+                </a:solidFill>
+                <a:latin typeface="Arial"/>
+              </a:rPr>
+              <a:t>physionetchallenges.org/2026/</a:t>
+            </a:r>
+          </a:p>
+          <a:p>
+            <a:pPr>
+              <a:spcBef>
+                <a:spcPts val="600"/>
+              </a:spcBef>
+              <a:spcAft>
+                <a:spcPts val="100"/>
+              </a:spcAft>
+              <a:buNone/>
+            </a:pPr>
+            <a:r>
+              <a:rPr sz="1300" b="1">
+                <a:solidFill>
+                  <a:srgbClr val="C8102E"/>
+                </a:solidFill>
+                <a:latin typeface="Arial"/>
+              </a:rPr>
+              <a:t>Evaluation code  —  </a:t>
+            </a:r>
+            <a:r>
+              <a:rPr sz="1300" b="0">
+                <a:solidFill>
+                  <a:srgbClr val="2A2E30"/>
+                </a:solidFill>
+                <a:latin typeface="Arial"/>
+              </a:rPr>
+              <a:t>Official scoring implementation</a:t>
+            </a:r>
+          </a:p>
+          <a:p>
+            <a:pPr algn="l">
+              <a:spcBef>
+                <a:spcPts val="0"/>
+              </a:spcBef>
+              <a:spcAft>
+                <a:spcPts val="600"/>
+              </a:spcAft>
+              <a:buNone/>
+            </a:pPr>
+            <a:r>
+              <a:rPr sz="1100" b="0" i="0">
+                <a:solidFill>
+                  <a:srgbClr val="346583"/>
+                </a:solidFill>
+                <a:latin typeface="Arial"/>
+              </a:rPr>
+              <a:t>github.com/physionetchallenges/evaluation-2026</a:t>
+            </a:r>
+          </a:p>
+          <a:p>
+            <a:pPr>
+              <a:spcBef>
+                <a:spcPts val="600"/>
+              </a:spcBef>
+              <a:spcAft>
+                <a:spcPts val="100"/>
+              </a:spcAft>
+              <a:buNone/>
+            </a:pPr>
+            <a:r>
+              <a:rPr sz="1300" b="1">
+                <a:solidFill>
+                  <a:srgbClr val="C8102E"/>
+                </a:solidFill>
+                <a:latin typeface="Arial"/>
+              </a:rPr>
+              <a:t>Example code  —  </a:t>
+            </a:r>
+            <a:r>
+              <a:rPr sz="1300" b="0">
+                <a:solidFill>
+                  <a:srgbClr val="2A2E30"/>
+                </a:solidFill>
+                <a:latin typeface="Arial"/>
+              </a:rPr>
+              <a:t>Python entry template</a:t>
+            </a:r>
+          </a:p>
+          <a:p>
+            <a:pPr algn="l">
+              <a:spcBef>
+                <a:spcPts val="0"/>
+              </a:spcBef>
+              <a:spcAft>
+                <a:spcPts val="600"/>
+              </a:spcAft>
+              <a:buNone/>
+            </a:pPr>
+            <a:r>
+              <a:rPr sz="1100" b="0" i="0">
+                <a:solidFill>
+                  <a:srgbClr val="346583"/>
+                </a:solidFill>
+                <a:latin typeface="Arial"/>
+              </a:rPr>
+              <a:t>github.com/physionetchallenges/python-example-2026</a:t>
+            </a:r>
+          </a:p>
+          <a:p>
+            <a:pPr>
+              <a:spcBef>
+                <a:spcPts val="600"/>
+              </a:spcBef>
+              <a:spcAft>
+                <a:spcPts val="100"/>
+              </a:spcAft>
+              <a:buNone/>
+            </a:pPr>
+            <a:r>
+              <a:rPr sz="1300" b="1">
+                <a:solidFill>
+                  <a:srgbClr val="C8102E"/>
+                </a:solidFill>
+                <a:latin typeface="Arial"/>
+              </a:rPr>
+              <a:t>This deck  —  </a:t>
+            </a:r>
+            <a:r>
+              <a:rPr sz="1300" b="0">
+                <a:solidFill>
+                  <a:srgbClr val="2A2E30"/>
+                </a:solidFill>
+                <a:latin typeface="Arial"/>
+              </a:rPr>
+              <a:t>Metric definitions taken directly from evaluate_model.py in our repository</a:t>
+            </a:r>
+          </a:p>
+        </p:txBody>
+      </p:sp>
+      <p:sp>
+        <p:nvSpPr>
+          <p:cNvPr id="6" name="TextBox 5"/>
+          <p:cNvSpPr txBox="1"/>
+          <p:nvPr/>
+        </p:nvSpPr>
+        <p:spPr>
+          <a:xfrm>
+            <a:off x="548640" y="4828032"/>
+            <a:ext cx="6035040" cy="228600"/>
+          </a:xfrm>
+          <a:prstGeom prst="rect">
+            <a:avLst/>
+          </a:prstGeom>
+          <a:noFill/>
+        </p:spPr>
+        <p:txBody>
+          <a:bodyPr wrap="square" anchor="t" lIns="45720" rIns="45720" tIns="18288" bIns="18288">
+            <a:spAutoFit/>
+          </a:bodyPr>
+          <a:lstStyle/>
+          <a:p>
+            <a:pPr algn="l">
+              <a:spcBef>
+                <a:spcPts val="0"/>
+              </a:spcBef>
+              <a:spcAft>
+                <a:spcPts val="0"/>
+              </a:spcAft>
+              <a:buNone/>
+            </a:pPr>
+            <a:r>
+              <a:rPr sz="800" b="0" i="0">
                 <a:solidFill>
                   <a:srgbClr val="898D8D"/>
                 </a:solidFill>
@@ -27604,7 +27988,135 @@
           <a:lstStyle/>
           <a:p>
             <a:r>
-              <a:t>What's present, and what we have to handle</a:t>
+              <a:rPr b="1">
+                <a:solidFill>
+                  <a:srgbClr val="FFFFFF"/>
+                </a:solidFill>
+                <a:latin typeface="Arial"/>
+              </a:rPr>
+              <a:t>Questions?</a:t>
+            </a:r>
+          </a:p>
+        </p:txBody>
+      </p:sp>
+      <p:sp>
+        <p:nvSpPr>
+          <p:cNvPr id="3" name="TextBox 2"/>
+          <p:cNvSpPr txBox="1"/>
+          <p:nvPr/>
+        </p:nvSpPr>
+        <p:spPr>
+          <a:xfrm>
+            <a:off x="548640" y="1417320"/>
+            <a:ext cx="7863840" cy="1280160"/>
+          </a:xfrm>
+          <a:prstGeom prst="rect">
+            <a:avLst/>
+          </a:prstGeom>
+          <a:noFill/>
+        </p:spPr>
+        <p:txBody>
+          <a:bodyPr wrap="square" anchor="t" lIns="45720" rIns="45720" tIns="18288" bIns="18288">
+            <a:spAutoFit/>
+          </a:bodyPr>
+          <a:lstStyle/>
+          <a:p>
+            <a:pPr algn="l">
+              <a:spcBef>
+                <a:spcPts val="0"/>
+              </a:spcBef>
+              <a:spcAft>
+                <a:spcPts val="400"/>
+              </a:spcAft>
+              <a:buNone/>
+            </a:pPr>
+            <a:r>
+              <a:rPr sz="1200" b="1" i="0">
+                <a:solidFill>
+                  <a:srgbClr val="CEB888"/>
+                </a:solidFill>
+                <a:latin typeface="Arial"/>
+              </a:rPr>
+              <a:t>Key takeaway</a:t>
+            </a:r>
+          </a:p>
+          <a:p>
+            <a:pPr algn="l">
+              <a:spcBef>
+                <a:spcPts val="0"/>
+              </a:spcBef>
+              <a:spcAft>
+                <a:spcPts val="600"/>
+              </a:spcAft>
+              <a:buNone/>
+            </a:pPr>
+            <a:r>
+              <a:rPr sz="1700" b="1" i="0">
+                <a:solidFill>
+                  <a:srgbClr val="FFFFFF"/>
+                </a:solidFill>
+                <a:latin typeface="Arial"/>
+              </a:rPr>
+              <a:t>Optimize for the Reward — catch the rare cases, and don't lean on age.</a:t>
+            </a:r>
+          </a:p>
+          <a:p>
+            <a:pPr algn="l">
+              <a:spcBef>
+                <a:spcPts val="0"/>
+              </a:spcBef>
+              <a:spcAft>
+                <a:spcPts val="0"/>
+              </a:spcAft>
+              <a:buNone/>
+            </a:pPr>
+            <a:r>
+              <a:rPr sz="1100" b="0" i="0">
+                <a:solidFill>
+                  <a:srgbClr val="FFFFFF"/>
+                </a:solidFill>
+                <a:latin typeface="Arial"/>
+              </a:rPr>
+              <a:t>Arshia Ilaty  ·  SDG  ·  PhysioNet Challenge 2026</a:t>
+            </a:r>
+          </a:p>
+        </p:txBody>
+      </p:sp>
+    </p:spTree>
+  </p:cSld>
+  <p:clrMapOvr>
+    <a:masterClrMapping/>
+  </p:clrMapOvr>
+</p:sld>
+</file>
+
+<file path=ppt/slides/slide26.xml><?xml version="1.0" encoding="utf-8"?>
+<p:sld xmlns:a="http://schemas.openxmlformats.org/drawingml/2006/main" xmlns:p="http://schemas.openxmlformats.org/presentationml/2006/main" xmlns:r="http://schemas.openxmlformats.org/officeDocument/2006/relationships">
+  <p:cSld>
+    <p:spTree>
+      <p:nvGrpSpPr>
+        <p:cNvPr id="1" name=""/>
+        <p:cNvGrpSpPr/>
+        <p:nvPr/>
+      </p:nvGrpSpPr>
+      <p:grpSpPr/>
+      <p:sp>
+        <p:nvSpPr>
+          <p:cNvPr id="2" name="Title 1"/>
+          <p:cNvSpPr>
+            <a:spLocks noGrp="1"/>
+          </p:cNvSpPr>
+          <p:nvPr>
+            <p:ph type="title"/>
+          </p:nvPr>
+        </p:nvSpPr>
+        <p:spPr/>
+        <p:txBody>
+          <a:bodyPr/>
+          <a:lstStyle/>
+          <a:p>
+            <a:r>
+              <a:t>How impaired sleep breaks down, stage by stage</a:t>
             </a:r>
           </a:p>
         </p:txBody>
@@ -27656,14 +28168,14 @@
                 </a:solidFill>
                 <a:latin typeface="Arial"/>
               </a:rPr>
-              <a:t>DATASET · COMPLETENESS &amp; QUALITY</a:t>
+              <a:t>DATASET · STAGE-TRANSITION DYNAMICS</a:t>
             </a:r>
           </a:p>
         </p:txBody>
       </p:sp>
       <p:pic>
         <p:nvPicPr>
-          <p:cNvPr id="5" name="Picture 4" descr="fig6_data_completeness.png"/>
+          <p:cNvPr id="5" name="Picture 4" descr="fig7_transition_matrix.png"/>
           <p:cNvPicPr>
             <a:picLocks noChangeAspect="1"/>
           </p:cNvPicPr>
@@ -27677,8 +28189,8 @@
         </p:blipFill>
         <p:spPr>
           <a:xfrm>
-            <a:off x="502920" y="1937269"/>
-            <a:ext cx="3611880" cy="2251941"/>
+            <a:off x="1004721" y="1463040"/>
+            <a:ext cx="5488637" cy="2514600"/>
           </a:xfrm>
           <a:prstGeom prst="rect">
             <a:avLst/>
@@ -27693,8 +28205,8 @@
         </p:nvSpPr>
         <p:spPr>
           <a:xfrm>
-            <a:off x="4297680" y="1600200"/>
-            <a:ext cx="2697480" cy="731520"/>
+            <a:off x="548640" y="4114800"/>
+            <a:ext cx="6492240" cy="822960"/>
           </a:xfrm>
           <a:prstGeom prst="rect">
             <a:avLst/>
@@ -27709,22 +28221,31 @@
           <a:p>
             <a:pPr algn="l"/>
             <a:r>
-              <a:rPr sz="1200" b="1">
-                <a:solidFill>
-                  <a:srgbClr val="2A2E30"/>
+              <a:rPr sz="1200" b="0">
+                <a:solidFill>
+                  <a:srgbClr val="505759"/>
                 </a:solidFill>
                 <a:latin typeface="Arial"/>
               </a:rPr>
-              <a:t>Age &amp; Sex complete</a:t>
-            </a:r>
-            <a:r>
-              <a:rPr sz="1200" b="0">
-                <a:solidFill>
-                  <a:srgbClr val="505759"/>
+              <a:t>Each cell = P(row stage → next epoch's stage). </a:t>
+            </a:r>
+            <a:r>
+              <a:rPr sz="1200" b="1">
+                <a:solidFill>
+                  <a:srgbClr val="C8102E"/>
                 </a:solidFill>
                 <a:latin typeface="Arial"/>
               </a:rPr>
-              <a:t>; race and ethnicity essentially complete.</a:t>
+              <a:t>Impaired patients show a destabilized deep sleep</a:t>
+            </a:r>
+            <a:r>
+              <a:rPr sz="1200" b="0">
+                <a:solidFill>
+                  <a:srgbClr val="505759"/>
+                </a:solidFill>
+                <a:latin typeface="Arial"/>
+              </a:rPr>
+              <a:t> — N3→N3 drops 5.4 pts while N3→N2 rises 6.0 — and less stable REM (−4.8). The mechanism behind their fragmentation.</a:t>
             </a:r>
           </a:p>
         </p:txBody>
@@ -27737,8 +28258,8 @@
         </p:nvSpPr>
         <p:spPr>
           <a:xfrm>
-            <a:off x="4297680" y="2203704"/>
-            <a:ext cx="2697480" cy="731520"/>
+            <a:off x="548640" y="4828032"/>
+            <a:ext cx="6035040" cy="228600"/>
           </a:xfrm>
           <a:prstGeom prst="rect">
             <a:avLst/>
@@ -27753,36 +28274,83 @@
           <a:p>
             <a:pPr algn="l"/>
             <a:r>
-              <a:rPr sz="1200" b="1">
-                <a:solidFill>
-                  <a:srgbClr val="C8102E"/>
+              <a:rPr sz="800" b="0">
+                <a:solidFill>
+                  <a:srgbClr val="898D8D"/>
                 </a:solidFill>
                 <a:latin typeface="Arial"/>
               </a:rPr>
-              <a:t>BMI missing in 76%</a:t>
-            </a:r>
-            <a:r>
-              <a:rPr sz="1200" b="0">
-                <a:solidFill>
-                  <a:srgbClr val="505759"/>
-                </a:solidFill>
-                <a:latin typeface="Arial"/>
-              </a:rPr>
-              <a:t>, Time_to_Event in 92% (recorded for positives only).</a:t>
-            </a:r>
-          </a:p>
-        </p:txBody>
-      </p:sp>
-      <p:sp>
-        <p:nvSpPr>
-          <p:cNvPr id="8" name="TextBox 7"/>
+              <a:t>PhysioNet Challenge 2026  ·  Scoring Metrics</a:t>
+            </a:r>
+          </a:p>
+        </p:txBody>
+      </p:sp>
+    </p:spTree>
+  </p:cSld>
+  <p:clrMapOvr>
+    <a:masterClrMapping/>
+  </p:clrMapOvr>
+</p:sld>
+</file>
+
+<file path=ppt/slides/slide27.xml><?xml version="1.0" encoding="utf-8"?>
+<p:sld xmlns:a="http://schemas.openxmlformats.org/drawingml/2006/main" xmlns:p="http://schemas.openxmlformats.org/presentationml/2006/main" xmlns:r="http://schemas.openxmlformats.org/officeDocument/2006/relationships">
+  <p:cSld>
+    <p:spTree>
+      <p:nvGrpSpPr>
+        <p:cNvPr id="1" name=""/>
+        <p:cNvGrpSpPr/>
+        <p:nvPr/>
+      </p:nvGrpSpPr>
+      <p:grpSpPr/>
+      <p:sp>
+        <p:nvSpPr>
+          <p:cNvPr id="2" name="Title 1"/>
+          <p:cNvSpPr>
+            <a:spLocks noGrp="1"/>
+          </p:cNvSpPr>
+          <p:nvPr>
+            <p:ph type="title"/>
+          </p:nvPr>
+        </p:nvSpPr>
+        <p:spPr/>
+        <p:txBody>
+          <a:bodyPr/>
+          <a:lstStyle/>
+          <a:p>
+            <a:r>
+              <a:t>Which features actually separate the groups?</a:t>
+            </a:r>
+          </a:p>
+        </p:txBody>
+      </p:sp>
+      <p:sp>
+        <p:nvSpPr>
+          <p:cNvPr id="3" name="Content Placeholder 2"/>
+          <p:cNvSpPr>
+            <a:spLocks noGrp="1"/>
+          </p:cNvSpPr>
+          <p:nvPr>
+            <p:ph idx="1"/>
+          </p:nvPr>
+        </p:nvSpPr>
+        <p:spPr/>
+        <p:txBody>
+          <a:bodyPr/>
+          <a:lstStyle/>
+          <a:p/>
+        </p:txBody>
+      </p:sp>
+      <p:sp>
+        <p:nvSpPr>
+          <p:cNvPr id="4" name="TextBox 3"/>
           <p:cNvSpPr txBox="1"/>
           <p:nvPr/>
         </p:nvSpPr>
         <p:spPr>
           <a:xfrm>
-            <a:off x="4297680" y="2807208"/>
-            <a:ext cx="2697480" cy="731520"/>
+            <a:off x="548640" y="1024128"/>
+            <a:ext cx="6446520" cy="274320"/>
           </a:xfrm>
           <a:prstGeom prst="rect">
             <a:avLst/>
@@ -27797,36 +28365,51 @@
           <a:p>
             <a:pPr algn="l"/>
             <a:r>
-              <a:rPr sz="1200" b="1">
-                <a:solidFill>
-                  <a:srgbClr val="2A2E30"/>
+              <a:rPr sz="1100" b="1">
+                <a:solidFill>
+                  <a:srgbClr val="C8102E"/>
                 </a:solidFill>
                 <a:latin typeface="Arial"/>
               </a:rPr>
-              <a:t>1,090 / 1,103 have CAISR</a:t>
-            </a:r>
-            <a:r>
-              <a:rPr sz="1200" b="0">
-                <a:solidFill>
-                  <a:srgbClr val="505759"/>
-                </a:solidFill>
-                <a:latin typeface="Arial"/>
-              </a:rPr>
-              <a:t> — 13 recordings fall back to global features only.</a:t>
-            </a:r>
-          </a:p>
-        </p:txBody>
-      </p:sp>
-      <p:sp>
-        <p:nvSpPr>
-          <p:cNvPr id="9" name="TextBox 8"/>
+              <a:t>DATASET · FEATURE SIGNIFICANCE (χ² / t-test, FDR-corrected)</a:t>
+            </a:r>
+          </a:p>
+        </p:txBody>
+      </p:sp>
+      <p:pic>
+        <p:nvPicPr>
+          <p:cNvPr id="5" name="Picture 4" descr="fig8_feature_significance.png"/>
+          <p:cNvPicPr>
+            <a:picLocks noChangeAspect="1"/>
+          </p:cNvPicPr>
+          <p:nvPr/>
+        </p:nvPicPr>
+        <p:blipFill>
+          <a:blip r:embed="rId2"/>
+          <a:stretch>
+            <a:fillRect/>
+          </a:stretch>
+        </p:blipFill>
+        <p:spPr>
+          <a:xfrm>
+            <a:off x="457200" y="1481328"/>
+            <a:ext cx="3520440" cy="2260299"/>
+          </a:xfrm>
+          <a:prstGeom prst="rect">
+            <a:avLst/>
+          </a:prstGeom>
+        </p:spPr>
+      </p:pic>
+      <p:sp>
+        <p:nvSpPr>
+          <p:cNvPr id="6" name="TextBox 5"/>
           <p:cNvSpPr txBox="1"/>
           <p:nvPr/>
         </p:nvSpPr>
         <p:spPr>
           <a:xfrm>
-            <a:off x="4297680" y="3410712"/>
-            <a:ext cx="2697480" cy="731520"/>
+            <a:off x="4160520" y="1572768"/>
+            <a:ext cx="2834640" cy="777240"/>
           </a:xfrm>
           <a:prstGeom prst="rect">
             <a:avLst/>
@@ -27847,7 +28430,7 @@
                 </a:solidFill>
                 <a:latin typeface="Arial"/>
               </a:rPr>
-              <a:t>18 short recordings</a:t>
+              <a:t>14 of 48 features</a:t>
             </a:r>
             <a:r>
               <a:rPr sz="1200" b="0">
@@ -27856,21 +28439,21 @@
                 </a:solidFill>
                 <a:latin typeface="Arial"/>
               </a:rPr>
-              <a:t> (&lt;4 h; 9 under 1 h) are flagged for the training pipeline.</a:t>
-            </a:r>
-          </a:p>
-        </p:txBody>
-      </p:sp>
-      <p:sp>
-        <p:nvSpPr>
-          <p:cNvPr id="10" name="TextBox 9"/>
+              <a:t> are significant at FDR q&lt;0.05.</a:t>
+            </a:r>
+          </a:p>
+        </p:txBody>
+      </p:sp>
+      <p:sp>
+        <p:nvSpPr>
+          <p:cNvPr id="7" name="TextBox 6"/>
           <p:cNvSpPr txBox="1"/>
           <p:nvPr/>
         </p:nvSpPr>
         <p:spPr>
           <a:xfrm>
-            <a:off x="4297680" y="4014216"/>
-            <a:ext cx="2697480" cy="731520"/>
+            <a:off x="4160520" y="2194560"/>
+            <a:ext cx="2834640" cy="777240"/>
           </a:xfrm>
           <a:prstGeom prst="rect">
             <a:avLst/>
@@ -27887,11 +28470,11 @@
             <a:r>
               <a:rPr sz="1200" b="1">
                 <a:solidFill>
-                  <a:srgbClr val="2A2E30"/>
+                  <a:srgbClr val="C8102E"/>
                 </a:solidFill>
                 <a:latin typeface="Arial"/>
               </a:rPr>
-              <a:t>Demographics ↔ EDF linkage is exact</a:t>
+              <a:t>Age dominates</a:t>
             </a:r>
             <a:r>
               <a:rPr sz="1200" b="0">
@@ -27900,7 +28483,139 @@
                 </a:solidFill>
                 <a:latin typeface="Arial"/>
               </a:rPr>
-              <a:t>: 0 orphans in either direction.</a:t>
+              <a:t> (Cohen d = 1.08) — exactly why the metric discounts it.</a:t>
+            </a:r>
+          </a:p>
+        </p:txBody>
+      </p:sp>
+      <p:sp>
+        <p:nvSpPr>
+          <p:cNvPr id="8" name="TextBox 7"/>
+          <p:cNvSpPr txBox="1"/>
+          <p:nvPr/>
+        </p:nvSpPr>
+        <p:spPr>
+          <a:xfrm>
+            <a:off x="4160520" y="2816352"/>
+            <a:ext cx="2834640" cy="777240"/>
+          </a:xfrm>
+          <a:prstGeom prst="rect">
+            <a:avLst/>
+          </a:prstGeom>
+          <a:noFill/>
+        </p:spPr>
+        <p:txBody>
+          <a:bodyPr wrap="square">
+            <a:spAutoFit/>
+          </a:bodyPr>
+          <a:lstStyle/>
+          <a:p>
+            <a:pPr algn="l"/>
+            <a:r>
+              <a:rPr sz="1200" b="0">
+                <a:solidFill>
+                  <a:srgbClr val="505759"/>
+                </a:solidFill>
+                <a:latin typeface="Arial"/>
+              </a:rPr>
+              <a:t>Then: </a:t>
+            </a:r>
+            <a:r>
+              <a:rPr sz="1200" b="1">
+                <a:solidFill>
+                  <a:srgbClr val="2A2E30"/>
+                </a:solidFill>
+                <a:latin typeface="Arial"/>
+              </a:rPr>
+              <a:t>limb movements, ↓REM, ↑WASO/Wake, ↓efficiency &amp; entropy, fewer REM periods, ↓N3.</a:t>
+            </a:r>
+          </a:p>
+        </p:txBody>
+      </p:sp>
+      <p:sp>
+        <p:nvSpPr>
+          <p:cNvPr id="9" name="TextBox 8"/>
+          <p:cNvSpPr txBox="1"/>
+          <p:nvPr/>
+        </p:nvSpPr>
+        <p:spPr>
+          <a:xfrm>
+            <a:off x="4160520" y="3438144"/>
+            <a:ext cx="2834640" cy="777240"/>
+          </a:xfrm>
+          <a:prstGeom prst="rect">
+            <a:avLst/>
+          </a:prstGeom>
+          <a:noFill/>
+        </p:spPr>
+        <p:txBody>
+          <a:bodyPr wrap="square">
+            <a:spAutoFit/>
+          </a:bodyPr>
+          <a:lstStyle/>
+          <a:p>
+            <a:pPr algn="l"/>
+            <a:r>
+              <a:rPr sz="1200" b="1">
+                <a:solidFill>
+                  <a:srgbClr val="C8102E"/>
+                </a:solidFill>
+                <a:latin typeface="Arial"/>
+              </a:rPr>
+              <a:t>AHI is NOT significant</a:t>
+            </a:r>
+            <a:r>
+              <a:rPr sz="1200" b="0">
+                <a:solidFill>
+                  <a:srgbClr val="505759"/>
+                </a:solidFill>
+                <a:latin typeface="Arial"/>
+              </a:rPr>
+              <a:t> (d=0.19) — signal is in sleep architecture &amp; continuity, not apnea load.</a:t>
+            </a:r>
+          </a:p>
+        </p:txBody>
+      </p:sp>
+      <p:sp>
+        <p:nvSpPr>
+          <p:cNvPr id="10" name="TextBox 9"/>
+          <p:cNvSpPr txBox="1"/>
+          <p:nvPr/>
+        </p:nvSpPr>
+        <p:spPr>
+          <a:xfrm>
+            <a:off x="4160520" y="4059936"/>
+            <a:ext cx="2834640" cy="777240"/>
+          </a:xfrm>
+          <a:prstGeom prst="rect">
+            <a:avLst/>
+          </a:prstGeom>
+          <a:noFill/>
+        </p:spPr>
+        <p:txBody>
+          <a:bodyPr wrap="square">
+            <a:spAutoFit/>
+          </a:bodyPr>
+          <a:lstStyle/>
+          <a:p>
+            <a:pPr algn="l"/>
+            <a:r>
+              <a:rPr sz="1200" b="0">
+                <a:solidFill>
+                  <a:srgbClr val="505759"/>
+                </a:solidFill>
+                <a:latin typeface="Arial"/>
+              </a:rPr>
+              <a:t>Method: </a:t>
+            </a:r>
+            <a:r>
+              <a:rPr sz="1150" b="0">
+                <a:solidFill>
+                  <a:srgbClr val="505759"/>
+                </a:solidFill>
+                <a:latin typeface="Arial"/>
+              </a:rPr>
+              <a:t>Welch t (numeric) + χ² (categorical), Benjamini–Hochberg FDR.</a:t>
             </a:r>
           </a:p>
         </p:txBody>

--- a/PhysioNet Challenge 2026 - Scoring Metrics.pptx
+++ b/PhysioNet Challenge 2026 - Scoring Metrics.pptx
@@ -36,6 +36,12 @@
     <p:sldId id="282" r:id="rId34"/>
     <p:sldId id="280" r:id="rId32"/>
     <p:sldId id="271" r:id="rId23"/>
+    <p:sldId id="283" r:id="rId35"/>
+    <p:sldId id="284" r:id="rId36"/>
+    <p:sldId id="285" r:id="rId37"/>
+    <p:sldId id="286" r:id="rId38"/>
+    <p:sldId id="287" r:id="rId39"/>
+    <p:sldId id="288" r:id="rId40"/>
     <p:sldId id="272" r:id="rId24"/>
     <p:sldId id="273" r:id="rId25"/>
   </p:sldIdLst>
@@ -2157,6 +2163,146 @@
 </p:notes>
 </file>
 
+<file path=ppt/notesSlides/notesSlide28.xml><?xml version="1.0" encoding="utf-8"?>
+<p:notes xmlns:a="http://schemas.openxmlformats.org/drawingml/2006/main" xmlns:p="http://schemas.openxmlformats.org/presentationml/2006/main" xmlns:r="http://schemas.openxmlformats.org/officeDocument/2006/relationships">
+  <p:cSld>
+    <p:spTree>
+      <p:nvGrpSpPr>
+        <p:cNvPr id="1" name=""/>
+        <p:cNvGrpSpPr/>
+        <p:nvPr/>
+      </p:nvGrpSpPr>
+      <p:grpSpPr>
+        <a:xfrm>
+          <a:off x="0" y="0"/>
+          <a:ext cx="0" cy="0"/>
+          <a:chOff x="0" y="0"/>
+          <a:chExt cx="0" cy="0"/>
+        </a:xfrm>
+      </p:grpSpPr>
+      <p:sp>
+        <p:nvSpPr>
+          <p:cNvPr id="2" name="Slide Image Placeholder 1"/>
+          <p:cNvSpPr>
+            <a:spLocks noGrp="1"/>
+          </p:cNvSpPr>
+          <p:nvPr>
+            <p:ph type="sldImg" idx="2"/>
+          </p:nvPr>
+        </p:nvSpPr>
+        <p:spPr/>
+      </p:sp>
+      <p:sp>
+        <p:nvSpPr>
+          <p:cNvPr id="3" name="Notes Placeholder 2"/>
+          <p:cNvSpPr>
+            <a:spLocks noGrp="1"/>
+          </p:cNvSpPr>
+          <p:nvPr>
+            <p:ph type="body" idx="3" sz="quarter"/>
+          </p:nvPr>
+        </p:nvSpPr>
+        <p:spPr/>
+        <p:txBody>
+          <a:bodyPr/>
+          <a:lstStyle/>
+          <a:p>
+            <a:r>
+              <a:t>We've seen the metric and the data it scores. Now here is what Team SDG actually built to win on that metric — the full pipeline from a raw overnight recording to a calibrated impairment probability, the features we engineered, the model, and where our numbers stand today, including one experiment that hasn't paid off yet.</a:t>
+            </a:r>
+          </a:p>
+        </p:txBody>
+      </p:sp>
+      <p:sp>
+        <p:nvSpPr>
+          <p:cNvPr id="4" name="Slide Number Placeholder 3"/>
+          <p:cNvSpPr>
+            <a:spLocks noGrp="1"/>
+          </p:cNvSpPr>
+          <p:nvPr>
+            <p:ph type="sldNum" idx="5" sz="quarter"/>
+          </p:nvPr>
+        </p:nvSpPr>
+        <p:spPr/>
+      </p:sp>
+    </p:spTree>
+  </p:cSld>
+  <p:clrMapOvr>
+    <a:masterClrMapping/>
+  </p:clrMapOvr>
+</p:notes>
+</file>
+
+<file path=ppt/notesSlides/notesSlide29.xml><?xml version="1.0" encoding="utf-8"?>
+<p:notes xmlns:a="http://schemas.openxmlformats.org/drawingml/2006/main" xmlns:p="http://schemas.openxmlformats.org/presentationml/2006/main" xmlns:r="http://schemas.openxmlformats.org/officeDocument/2006/relationships">
+  <p:cSld>
+    <p:spTree>
+      <p:nvGrpSpPr>
+        <p:cNvPr id="1" name=""/>
+        <p:cNvGrpSpPr/>
+        <p:nvPr/>
+      </p:nvGrpSpPr>
+      <p:grpSpPr>
+        <a:xfrm>
+          <a:off x="0" y="0"/>
+          <a:ext cx="0" cy="0"/>
+          <a:chOff x="0" y="0"/>
+          <a:chExt cx="0" cy="0"/>
+        </a:xfrm>
+      </p:grpSpPr>
+      <p:sp>
+        <p:nvSpPr>
+          <p:cNvPr id="2" name="Slide Image Placeholder 1"/>
+          <p:cNvSpPr>
+            <a:spLocks noGrp="1"/>
+          </p:cNvSpPr>
+          <p:nvPr>
+            <p:ph type="sldImg" idx="2"/>
+          </p:nvPr>
+        </p:nvSpPr>
+        <p:spPr/>
+      </p:sp>
+      <p:sp>
+        <p:nvSpPr>
+          <p:cNvPr id="3" name="Notes Placeholder 2"/>
+          <p:cNvSpPr>
+            <a:spLocks noGrp="1"/>
+          </p:cNvSpPr>
+          <p:nvPr>
+            <p:ph type="body" idx="3" sz="quarter"/>
+          </p:nvPr>
+        </p:nvSpPr>
+        <p:spPr/>
+        <p:txBody>
+          <a:bodyPr/>
+          <a:lstStyle/>
+          <a:p>
+            <a:r>
+              <a:t>This is the whole system on one slide. We start from the raw overnight recording — EEG, ECG, respiration, oxygen — decode every channel with NeuroKit2 in a site-aware way, and run quality checks. Then two parallel feature streams: our hand-crafted sleep physiology, and self-supervised embeddings from a foundation model. Everything downstream of the split — the dimensionality reduction and feature selection — is fit only on training rows; with just 84 positives, fitting those on the whole set would inflate our scores by five to ten points, so we are strict about it. The model is a per-site mixture of experts with a fine-tuned head for Kaiser. Finally we tune the decision threshold to maximize the Reward, by site and age decade, and we validate leave-one-site-out so our numbers reflect a genuinely unseen hospital.</a:t>
+            </a:r>
+          </a:p>
+        </p:txBody>
+      </p:sp>
+      <p:sp>
+        <p:nvSpPr>
+          <p:cNvPr id="4" name="Slide Number Placeholder 3"/>
+          <p:cNvSpPr>
+            <a:spLocks noGrp="1"/>
+          </p:cNvSpPr>
+          <p:nvPr>
+            <p:ph type="sldNum" idx="5" sz="quarter"/>
+          </p:nvPr>
+        </p:nvSpPr>
+        <p:spPr/>
+      </p:sp>
+    </p:spTree>
+  </p:cSld>
+  <p:clrMapOvr>
+    <a:masterClrMapping/>
+  </p:clrMapOvr>
+</p:notes>
+</file>
+
 <file path=ppt/notesSlides/notesSlide3.xml><?xml version="1.0" encoding="utf-8"?>
 <p:notes xmlns:a="http://schemas.openxmlformats.org/drawingml/2006/main" xmlns:p="http://schemas.openxmlformats.org/presentationml/2006/main" xmlns:r="http://schemas.openxmlformats.org/officeDocument/2006/relationships">
   <p:cSld>
@@ -2206,6 +2352,286 @@
                 <a:latin typeface="Arial"/>
               </a:rPr>
               <a:t>Let's start with the task itself, because the metric only makes sense once you know what we're predicting.</a:t>
+            </a:r>
+          </a:p>
+        </p:txBody>
+      </p:sp>
+      <p:sp>
+        <p:nvSpPr>
+          <p:cNvPr id="4" name="Slide Number Placeholder 3"/>
+          <p:cNvSpPr>
+            <a:spLocks noGrp="1"/>
+          </p:cNvSpPr>
+          <p:nvPr>
+            <p:ph type="sldNum" idx="5" sz="quarter"/>
+          </p:nvPr>
+        </p:nvSpPr>
+        <p:spPr/>
+      </p:sp>
+    </p:spTree>
+  </p:cSld>
+  <p:clrMapOvr>
+    <a:masterClrMapping/>
+  </p:clrMapOvr>
+</p:notes>
+</file>
+
+<file path=ppt/notesSlides/notesSlide30.xml><?xml version="1.0" encoding="utf-8"?>
+<p:notes xmlns:a="http://schemas.openxmlformats.org/drawingml/2006/main" xmlns:p="http://schemas.openxmlformats.org/presentationml/2006/main" xmlns:r="http://schemas.openxmlformats.org/officeDocument/2006/relationships">
+  <p:cSld>
+    <p:spTree>
+      <p:nvGrpSpPr>
+        <p:cNvPr id="1" name=""/>
+        <p:cNvGrpSpPr/>
+        <p:nvPr/>
+      </p:nvGrpSpPr>
+      <p:grpSpPr>
+        <a:xfrm>
+          <a:off x="0" y="0"/>
+          <a:ext cx="0" cy="0"/>
+          <a:chOff x="0" y="0"/>
+          <a:chExt cx="0" cy="0"/>
+        </a:xfrm>
+      </p:grpSpPr>
+      <p:sp>
+        <p:nvSpPr>
+          <p:cNvPr id="2" name="Slide Image Placeholder 1"/>
+          <p:cNvSpPr>
+            <a:spLocks noGrp="1"/>
+          </p:cNvSpPr>
+          <p:nvPr>
+            <p:ph type="sldImg" idx="2"/>
+          </p:nvPr>
+        </p:nvSpPr>
+        <p:spPr/>
+      </p:sp>
+      <p:sp>
+        <p:nvSpPr>
+          <p:cNvPr id="3" name="Notes Placeholder 2"/>
+          <p:cNvSpPr>
+            <a:spLocks noGrp="1"/>
+          </p:cNvSpPr>
+          <p:nvPr>
+            <p:ph type="body" idx="3" sz="quarter"/>
+          </p:nvPr>
+        </p:nvSpPr>
+        <p:spPr/>
+        <p:txBody>
+          <a:bodyPr/>
+          <a:lstStyle/>
+          <a:p>
+            <a:r>
+              <a:t>Our features come in three families. The baseline set — 55 features — is the CAISR sleep architecture and demographics: how the night is structured, fragmentation, event indices. On top of that we added 160 NeuroKit2 features: per-stage heart-rate variability, EEG complexity, and respiration, computed from the raw waveforms. And 122 clinical-report features: EEG spectral power and spindles, oxygenation and hypoxic burden, respiratory events. The design principle is that impairment shows up as blunted modulation across sleep stages, so almost everything is stage-resolved, and the strongest features are contrasts between stages. Crucially, we exclude age from training — the metric strips the age shortcut, so our features have to carry signal within an age band.</a:t>
+            </a:r>
+          </a:p>
+        </p:txBody>
+      </p:sp>
+      <p:sp>
+        <p:nvSpPr>
+          <p:cNvPr id="4" name="Slide Number Placeholder 3"/>
+          <p:cNvSpPr>
+            <a:spLocks noGrp="1"/>
+          </p:cNvSpPr>
+          <p:nvPr>
+            <p:ph type="sldNum" idx="5" sz="quarter"/>
+          </p:nvPr>
+        </p:nvSpPr>
+        <p:spPr/>
+      </p:sp>
+    </p:spTree>
+  </p:cSld>
+  <p:clrMapOvr>
+    <a:masterClrMapping/>
+  </p:clrMapOvr>
+</p:notes>
+</file>
+
+<file path=ppt/notesSlides/notesSlide31.xml><?xml version="1.0" encoding="utf-8"?>
+<p:notes xmlns:a="http://schemas.openxmlformats.org/drawingml/2006/main" xmlns:p="http://schemas.openxmlformats.org/presentationml/2006/main" xmlns:r="http://schemas.openxmlformats.org/officeDocument/2006/relationships">
+  <p:cSld>
+    <p:spTree>
+      <p:nvGrpSpPr>
+        <p:cNvPr id="1" name=""/>
+        <p:cNvGrpSpPr/>
+        <p:nvPr/>
+      </p:nvGrpSpPr>
+      <p:grpSpPr>
+        <a:xfrm>
+          <a:off x="0" y="0"/>
+          <a:ext cx="0" cy="0"/>
+          <a:chOff x="0" y="0"/>
+          <a:chExt cx="0" cy="0"/>
+        </a:xfrm>
+      </p:grpSpPr>
+      <p:sp>
+        <p:nvSpPr>
+          <p:cNvPr id="2" name="Slide Image Placeholder 1"/>
+          <p:cNvSpPr>
+            <a:spLocks noGrp="1"/>
+          </p:cNvSpPr>
+          <p:nvPr>
+            <p:ph type="sldImg" idx="2"/>
+          </p:nvPr>
+        </p:nvSpPr>
+        <p:spPr/>
+      </p:sp>
+      <p:sp>
+        <p:nvSpPr>
+          <p:cNvPr id="3" name="Notes Placeholder 2"/>
+          <p:cNvSpPr>
+            <a:spLocks noGrp="1"/>
+          </p:cNvSpPr>
+          <p:nvPr>
+            <p:ph type="body" idx="3" sz="quarter"/>
+          </p:nvPr>
+        </p:nvSpPr>
+        <p:spPr/>
+        <p:txBody>
+          <a:bodyPr/>
+          <a:lstStyle/>
+          <a:p>
+            <a:r>
+              <a:t>The model is designed around the two problems we keep coming back to: site shift and class imbalance. First, it is a mixture of experts — one gradient-boosted classifier per site, with a global fallback — because the three hospitals have such different montages and populations that a single model blurs them. Second, a dedicated fine-tuned head for Kaiser, which is the hardest site to generalize to. Third, because BMI is missing for three-quarters of patients, we impute it per site instead of dropping it. And the piece that directly targets the metric: instead of the usual 0.5 cutoff, we predict positive when the probability exceeds the age-specific prevalence — that's the Bayes-optimal threshold for the Reward — tuned per site and age decade on held-out validation.</a:t>
+            </a:r>
+          </a:p>
+        </p:txBody>
+      </p:sp>
+      <p:sp>
+        <p:nvSpPr>
+          <p:cNvPr id="4" name="Slide Number Placeholder 3"/>
+          <p:cNvSpPr>
+            <a:spLocks noGrp="1"/>
+          </p:cNvSpPr>
+          <p:nvPr>
+            <p:ph type="sldNum" idx="5" sz="quarter"/>
+          </p:nvPr>
+        </p:nvSpPr>
+        <p:spPr/>
+      </p:sp>
+    </p:spTree>
+  </p:cSld>
+  <p:clrMapOvr>
+    <a:masterClrMapping/>
+  </p:clrMapOvr>
+</p:notes>
+</file>
+
+<file path=ppt/notesSlides/notesSlide32.xml><?xml version="1.0" encoding="utf-8"?>
+<p:notes xmlns:a="http://schemas.openxmlformats.org/drawingml/2006/main" xmlns:p="http://schemas.openxmlformats.org/presentationml/2006/main" xmlns:r="http://schemas.openxmlformats.org/officeDocument/2006/relationships">
+  <p:cSld>
+    <p:spTree>
+      <p:nvGrpSpPr>
+        <p:cNvPr id="1" name=""/>
+        <p:cNvGrpSpPr/>
+        <p:nvPr/>
+      </p:nvGrpSpPr>
+      <p:grpSpPr>
+        <a:xfrm>
+          <a:off x="0" y="0"/>
+          <a:ext cx="0" cy="0"/>
+          <a:chOff x="0" y="0"/>
+          <a:chExt cx="0" cy="0"/>
+        </a:xfrm>
+      </p:grpSpPr>
+      <p:sp>
+        <p:nvSpPr>
+          <p:cNvPr id="2" name="Slide Image Placeholder 1"/>
+          <p:cNvSpPr>
+            <a:spLocks noGrp="1"/>
+          </p:cNvSpPr>
+          <p:nvPr>
+            <p:ph type="sldImg" idx="2"/>
+          </p:nvPr>
+        </p:nvSpPr>
+        <p:spPr/>
+      </p:sp>
+      <p:sp>
+        <p:nvSpPr>
+          <p:cNvPr id="3" name="Notes Placeholder 2"/>
+          <p:cNvSpPr>
+            <a:spLocks noGrp="1"/>
+          </p:cNvSpPr>
+          <p:nvPr>
+            <p:ph type="body" idx="3" sz="quarter"/>
+          </p:nvPr>
+        </p:nvSpPr>
+        <p:spPr/>
+        <p:txBody>
+          <a:bodyPr/>
+          <a:lstStyle/>
+          <a:p>
+            <a:r>
+              <a:t>Here is where the engineered features get us. On our internal leave-one-site-out harness — same folds, same model, only the feature set changes — adding the NeuroKit2 and clinical-report features lifts the pooled reward from 0.098 to 0.176, nearly double, and it improves every single held-out site. For reference, 0.168 is our verified submission score from the official scoring code. One honest caveat: this internal harness scores the baseline at 0.098, not at the 0.168 we submitted, so the two aren't the identical pipeline — the relative lift is what we trust, and the absolute number still needs reconciling before we quote it against the leaderboard. The other lesson: throwing all 337 features in raw actually overfits, which points straight at feature selection as the next lever — and that's the last slide.</a:t>
+            </a:r>
+          </a:p>
+        </p:txBody>
+      </p:sp>
+      <p:sp>
+        <p:nvSpPr>
+          <p:cNvPr id="4" name="Slide Number Placeholder 3"/>
+          <p:cNvSpPr>
+            <a:spLocks noGrp="1"/>
+          </p:cNvSpPr>
+          <p:nvPr>
+            <p:ph type="sldNum" idx="5" sz="quarter"/>
+          </p:nvPr>
+        </p:nvSpPr>
+        <p:spPr/>
+      </p:sp>
+    </p:spTree>
+  </p:cSld>
+  <p:clrMapOvr>
+    <a:masterClrMapping/>
+  </p:clrMapOvr>
+</p:notes>
+</file>
+
+<file path=ppt/notesSlides/notesSlide33.xml><?xml version="1.0" encoding="utf-8"?>
+<p:notes xmlns:a="http://schemas.openxmlformats.org/drawingml/2006/main" xmlns:p="http://schemas.openxmlformats.org/presentationml/2006/main" xmlns:r="http://schemas.openxmlformats.org/officeDocument/2006/relationships">
+  <p:cSld>
+    <p:spTree>
+      <p:nvGrpSpPr>
+        <p:cNvPr id="1" name=""/>
+        <p:cNvGrpSpPr/>
+        <p:nvPr/>
+      </p:nvGrpSpPr>
+      <p:grpSpPr>
+        <a:xfrm>
+          <a:off x="0" y="0"/>
+          <a:ext cx="0" cy="0"/>
+          <a:chOff x="0" y="0"/>
+          <a:chExt cx="0" cy="0"/>
+        </a:xfrm>
+      </p:grpSpPr>
+      <p:sp>
+        <p:nvSpPr>
+          <p:cNvPr id="2" name="Slide Image Placeholder 1"/>
+          <p:cNvSpPr>
+            <a:spLocks noGrp="1"/>
+          </p:cNvSpPr>
+          <p:nvPr>
+            <p:ph type="sldImg" idx="2"/>
+          </p:nvPr>
+        </p:nvSpPr>
+        <p:spPr/>
+      </p:sp>
+      <p:sp>
+        <p:nvSpPr>
+          <p:cNvPr id="3" name="Notes Placeholder 2"/>
+          <p:cNvSpPr>
+            <a:spLocks noGrp="1"/>
+          </p:cNvSpPr>
+          <p:nvPr>
+            <p:ph type="body" idx="3" sz="quarter"/>
+          </p:nvPr>
+        </p:nvSpPr>
+        <p:spPr/>
+        <p:txBody>
+          <a:bodyPr/>
+          <a:lstStyle/>
+          <a:p>
+            <a:r>
+              <a:t>I want to end with an experiment that is still open, because it shows how we work. A collaborator produced embeddings from SleepFM, a self-supervised foundation model that was never trained on impairment labels, so there's no leakage. We fused them with our features the leakage-safe way and benchmarked. The best configuration reaches a reward of 0.253 leave-one-site-out — which looks like a big jump. But look at the confidence intervals: every one of them still includes zero. And the decisive test is the paired comparison — on identical splits, adding the embeddings on top of plain feature selection changes the reward by minus 0.10, with a confidence interval from minus 1.3 to plus 0.66. In other words, we cannot yet distinguish the embeddings' contribution from the feature selection alone. So we are not claiming this as a win. The binding constraint is that 84 positives makes every interval wide; the next steps are richer per-stage pooling, stacking, and more labeled data.</a:t>
             </a:r>
           </a:p>
         </p:txBody>
@@ -26473,7 +26899,7 @@
           <a:lstStyle/>
           <a:p>
             <a:r>
-              <a:t>What's present, and what we have to handle</a:t>
+              <a:t>How impaired sleep breaks down, stage by stage</a:t>
             </a:r>
           </a:p>
         </p:txBody>
@@ -26525,14 +26951,14 @@
                 </a:solidFill>
                 <a:latin typeface="Arial"/>
               </a:rPr>
-              <a:t>DATASET · COMPLETENESS &amp; QUALITY</a:t>
+              <a:t>DATASET · STAGE-TRANSITION DYNAMICS</a:t>
             </a:r>
           </a:p>
         </p:txBody>
       </p:sp>
       <p:pic>
         <p:nvPicPr>
-          <p:cNvPr id="5" name="Picture 4" descr="fig6_data_completeness.png"/>
+          <p:cNvPr id="5" name="Picture 4" descr="fig7_transition_matrix.png"/>
           <p:cNvPicPr>
             <a:picLocks noChangeAspect="1"/>
           </p:cNvPicPr>
@@ -26546,8 +26972,8 @@
         </p:blipFill>
         <p:spPr>
           <a:xfrm>
-            <a:off x="502920" y="1937269"/>
-            <a:ext cx="3611880" cy="2251941"/>
+            <a:off x="1004721" y="1463040"/>
+            <a:ext cx="5488637" cy="2514600"/>
           </a:xfrm>
           <a:prstGeom prst="rect">
             <a:avLst/>
@@ -26562,8 +26988,8 @@
         </p:nvSpPr>
         <p:spPr>
           <a:xfrm>
-            <a:off x="4297680" y="1600200"/>
-            <a:ext cx="2697480" cy="731520"/>
+            <a:off x="548640" y="4114800"/>
+            <a:ext cx="6492240" cy="822960"/>
           </a:xfrm>
           <a:prstGeom prst="rect">
             <a:avLst/>
@@ -26578,205 +27004,38 @@
           <a:p>
             <a:pPr algn="l"/>
             <a:r>
-              <a:rPr sz="1200" b="1">
-                <a:solidFill>
-                  <a:srgbClr val="2A2E30"/>
+              <a:rPr sz="1200" b="0">
+                <a:solidFill>
+                  <a:srgbClr val="505759"/>
                 </a:solidFill>
                 <a:latin typeface="Arial"/>
               </a:rPr>
-              <a:t>Age &amp; Sex complete</a:t>
-            </a:r>
-            <a:r>
-              <a:rPr sz="1200" b="0">
-                <a:solidFill>
-                  <a:srgbClr val="505759"/>
+              <a:t>Each cell = P(row stage → next epoch's stage). </a:t>
+            </a:r>
+            <a:r>
+              <a:rPr sz="1200" b="1">
+                <a:solidFill>
+                  <a:srgbClr val="C8102E"/>
                 </a:solidFill>
                 <a:latin typeface="Arial"/>
               </a:rPr>
-              <a:t>; race and ethnicity essentially complete.</a:t>
-            </a:r>
-          </a:p>
-        </p:txBody>
-      </p:sp>
-      <p:sp>
-        <p:nvSpPr>
-          <p:cNvPr id="7" name="TextBox 6"/>
-          <p:cNvSpPr txBox="1"/>
-          <p:nvPr/>
-        </p:nvSpPr>
-        <p:spPr>
-          <a:xfrm>
-            <a:off x="4297680" y="2203704"/>
-            <a:ext cx="2697480" cy="731520"/>
-          </a:xfrm>
-          <a:prstGeom prst="rect">
-            <a:avLst/>
-          </a:prstGeom>
-          <a:noFill/>
-        </p:spPr>
-        <p:txBody>
-          <a:bodyPr wrap="square">
-            <a:spAutoFit/>
-          </a:bodyPr>
-          <a:lstStyle/>
-          <a:p>
-            <a:pPr algn="l"/>
-            <a:r>
-              <a:rPr sz="1200" b="1">
-                <a:solidFill>
-                  <a:srgbClr val="C8102E"/>
+              <a:t>Impaired patients show a destabilized deep sleep</a:t>
+            </a:r>
+            <a:r>
+              <a:rPr sz="1200" b="0">
+                <a:solidFill>
+                  <a:srgbClr val="505759"/>
                 </a:solidFill>
                 <a:latin typeface="Arial"/>
               </a:rPr>
-              <a:t>BMI missing in 76%</a:t>
-            </a:r>
-            <a:r>
-              <a:rPr sz="1200" b="0">
-                <a:solidFill>
-                  <a:srgbClr val="505759"/>
-                </a:solidFill>
-                <a:latin typeface="Arial"/>
-              </a:rPr>
-              <a:t>, Time_to_Event in 92% (recorded for positives only).</a:t>
-            </a:r>
-          </a:p>
-        </p:txBody>
-      </p:sp>
-      <p:sp>
-        <p:nvSpPr>
-          <p:cNvPr id="8" name="TextBox 7"/>
-          <p:cNvSpPr txBox="1"/>
-          <p:nvPr/>
-        </p:nvSpPr>
-        <p:spPr>
-          <a:xfrm>
-            <a:off x="4297680" y="2807208"/>
-            <a:ext cx="2697480" cy="731520"/>
-          </a:xfrm>
-          <a:prstGeom prst="rect">
-            <a:avLst/>
-          </a:prstGeom>
-          <a:noFill/>
-        </p:spPr>
-        <p:txBody>
-          <a:bodyPr wrap="square">
-            <a:spAutoFit/>
-          </a:bodyPr>
-          <a:lstStyle/>
-          <a:p>
-            <a:pPr algn="l"/>
-            <a:r>
-              <a:rPr sz="1200" b="1">
-                <a:solidFill>
-                  <a:srgbClr val="2A2E30"/>
-                </a:solidFill>
-                <a:latin typeface="Arial"/>
-              </a:rPr>
-              <a:t>1,090 / 1,103 have CAISR</a:t>
-            </a:r>
-            <a:r>
-              <a:rPr sz="1200" b="0">
-                <a:solidFill>
-                  <a:srgbClr val="505759"/>
-                </a:solidFill>
-                <a:latin typeface="Arial"/>
-              </a:rPr>
-              <a:t> — 13 recordings fall back to global features only.</a:t>
-            </a:r>
-          </a:p>
-        </p:txBody>
-      </p:sp>
-      <p:sp>
-        <p:nvSpPr>
-          <p:cNvPr id="9" name="TextBox 8"/>
-          <p:cNvSpPr txBox="1"/>
-          <p:nvPr/>
-        </p:nvSpPr>
-        <p:spPr>
-          <a:xfrm>
-            <a:off x="4297680" y="3410712"/>
-            <a:ext cx="2697480" cy="731520"/>
-          </a:xfrm>
-          <a:prstGeom prst="rect">
-            <a:avLst/>
-          </a:prstGeom>
-          <a:noFill/>
-        </p:spPr>
-        <p:txBody>
-          <a:bodyPr wrap="square">
-            <a:spAutoFit/>
-          </a:bodyPr>
-          <a:lstStyle/>
-          <a:p>
-            <a:pPr algn="l"/>
-            <a:r>
-              <a:rPr sz="1200" b="1">
-                <a:solidFill>
-                  <a:srgbClr val="2A2E30"/>
-                </a:solidFill>
-                <a:latin typeface="Arial"/>
-              </a:rPr>
-              <a:t>18 short recordings</a:t>
-            </a:r>
-            <a:r>
-              <a:rPr sz="1200" b="0">
-                <a:solidFill>
-                  <a:srgbClr val="505759"/>
-                </a:solidFill>
-                <a:latin typeface="Arial"/>
-              </a:rPr>
-              <a:t> (&lt;4 h; 9 under 1 h) are flagged for the training pipeline.</a:t>
-            </a:r>
-          </a:p>
-        </p:txBody>
-      </p:sp>
-      <p:sp>
-        <p:nvSpPr>
-          <p:cNvPr id="10" name="TextBox 9"/>
-          <p:cNvSpPr txBox="1"/>
-          <p:nvPr/>
-        </p:nvSpPr>
-        <p:spPr>
-          <a:xfrm>
-            <a:off x="4297680" y="4014216"/>
-            <a:ext cx="2697480" cy="731520"/>
-          </a:xfrm>
-          <a:prstGeom prst="rect">
-            <a:avLst/>
-          </a:prstGeom>
-          <a:noFill/>
-        </p:spPr>
-        <p:txBody>
-          <a:bodyPr wrap="square">
-            <a:spAutoFit/>
-          </a:bodyPr>
-          <a:lstStyle/>
-          <a:p>
-            <a:pPr algn="l"/>
-            <a:r>
-              <a:rPr sz="1200" b="1">
-                <a:solidFill>
-                  <a:srgbClr val="2A2E30"/>
-                </a:solidFill>
-                <a:latin typeface="Arial"/>
-              </a:rPr>
-              <a:t>Demographics ↔ EDF linkage is exact</a:t>
-            </a:r>
-            <a:r>
-              <a:rPr sz="1200" b="0">
-                <a:solidFill>
-                  <a:srgbClr val="505759"/>
-                </a:solidFill>
-                <a:latin typeface="Arial"/>
-              </a:rPr>
-              <a:t>: 0 orphans in either direction.</a:t>
-            </a:r>
-          </a:p>
-        </p:txBody>
-      </p:sp>
-      <p:sp>
-        <p:nvSpPr>
-          <p:cNvPr id="11" name="TextBox 10"/>
+              <a:t> — N3→N3 drops 5.4 pts while N3→N2 rises 6.0 — and less stable REM (−4.8). The mechanism behind their fragmentation.</a:t>
+            </a:r>
+          </a:p>
+        </p:txBody>
+      </p:sp>
+      <p:sp>
+        <p:nvSpPr>
+          <p:cNvPr id="7" name="TextBox 6"/>
           <p:cNvSpPr txBox="1"/>
           <p:nvPr/>
         </p:nvSpPr>
@@ -26843,10 +27102,7 @@
           <a:lstStyle/>
           <a:p>
             <a:r>
-              <a:rPr b="1">
-                <a:latin typeface="Arial"/>
-              </a:rPr>
-              <a:t>What this means for our approach</a:t>
+              <a:t>Which features actually separate the groups?</a:t>
             </a:r>
           </a:p>
         </p:txBody>
@@ -26885,143 +27141,58 @@
           <a:noFill/>
         </p:spPr>
         <p:txBody>
-          <a:bodyPr wrap="square" anchor="t" lIns="45720" rIns="45720" tIns="18288" bIns="18288">
+          <a:bodyPr wrap="square">
             <a:spAutoFit/>
           </a:bodyPr>
           <a:lstStyle/>
           <a:p>
-            <a:pPr algn="l">
-              <a:spcBef>
-                <a:spcPts val="0"/>
-              </a:spcBef>
-              <a:spcAft>
-                <a:spcPts val="0"/>
-              </a:spcAft>
-              <a:buNone/>
-            </a:pPr>
-            <a:r>
-              <a:rPr sz="1100" b="1" i="0">
+            <a:pPr algn="l"/>
+            <a:r>
+              <a:rPr sz="1100" b="1">
                 <a:solidFill>
                   <a:srgbClr val="C8102E"/>
                 </a:solidFill>
                 <a:latin typeface="Arial"/>
               </a:rPr>
-              <a:t>TAKEAWAYS</a:t>
-            </a:r>
-          </a:p>
-        </p:txBody>
-      </p:sp>
-      <p:sp>
-        <p:nvSpPr>
-          <p:cNvPr id="5" name="Rounded Rectangle 4"/>
-          <p:cNvSpPr/>
+              <a:t>DATASET · FEATURE SIGNIFICANCE (χ² / t-test, FDR-corrected)</a:t>
+            </a:r>
+          </a:p>
+        </p:txBody>
+      </p:sp>
+      <p:pic>
+        <p:nvPicPr>
+          <p:cNvPr id="5" name="Picture 4" descr="fig8_feature_significance.png"/>
+          <p:cNvPicPr>
+            <a:picLocks noChangeAspect="1"/>
+          </p:cNvPicPr>
           <p:nvPr/>
-        </p:nvSpPr>
+        </p:nvPicPr>
+        <p:blipFill>
+          <a:blip r:embed="rId2"/>
+          <a:stretch>
+            <a:fillRect/>
+          </a:stretch>
+        </p:blipFill>
         <p:spPr>
           <a:xfrm>
-            <a:off x="548640" y="1417320"/>
-            <a:ext cx="6446520" cy="758952"/>
-          </a:xfrm>
-          <a:prstGeom prst="roundRect">
-            <a:avLst>
-              <a:gd name="adj" fmla="val 6000"/>
-            </a:avLst>
+            <a:off x="457200" y="1481328"/>
+            <a:ext cx="3520440" cy="2260299"/>
+          </a:xfrm>
+          <a:prstGeom prst="rect">
+            <a:avLst/>
           </a:prstGeom>
-          <a:solidFill>
-            <a:srgbClr val="F2F4F4"/>
-          </a:solidFill>
-          <a:ln>
-            <a:noFill/>
-          </a:ln>
-          <a:effectLst/>
-        </p:spPr>
-        <p:style>
-          <a:lnRef idx="1">
-            <a:schemeClr val="accent1"/>
-          </a:lnRef>
-          <a:fillRef idx="3">
-            <a:schemeClr val="accent1"/>
-          </a:fillRef>
-          <a:effectRef idx="2">
-            <a:schemeClr val="accent1"/>
-          </a:effectRef>
-          <a:fontRef idx="minor">
-            <a:schemeClr val="lt1"/>
-          </a:fontRef>
-        </p:style>
-        <p:txBody>
-          <a:bodyPr rtlCol="0" anchor="ctr"/>
-          <a:lstStyle/>
-          <a:p>
-            <a:pPr algn="ctr"/>
-          </a:p>
-        </p:txBody>
-      </p:sp>
-      <p:sp>
-        <p:nvSpPr>
-          <p:cNvPr id="6" name="Rounded Rectangle 5"/>
-          <p:cNvSpPr/>
-          <p:nvPr/>
-        </p:nvSpPr>
-        <p:spPr>
-          <a:xfrm>
-            <a:off x="685800" y="1563624"/>
-            <a:ext cx="457200" cy="457200"/>
-          </a:xfrm>
-          <a:prstGeom prst="roundRect">
-            <a:avLst>
-              <a:gd name="adj" fmla="val 25000"/>
-            </a:avLst>
-          </a:prstGeom>
-          <a:solidFill>
-            <a:srgbClr val="C8102E"/>
-          </a:solidFill>
-          <a:ln>
-            <a:noFill/>
-          </a:ln>
-          <a:effectLst/>
-        </p:spPr>
-        <p:style>
-          <a:lnRef idx="1">
-            <a:schemeClr val="accent1"/>
-          </a:lnRef>
-          <a:fillRef idx="3">
-            <a:schemeClr val="accent1"/>
-          </a:fillRef>
-          <a:effectRef idx="2">
-            <a:schemeClr val="accent1"/>
-          </a:effectRef>
-          <a:fontRef idx="minor">
-            <a:schemeClr val="lt1"/>
-          </a:fontRef>
-        </p:style>
-        <p:txBody>
-          <a:bodyPr rtlCol="0" anchor="ctr"/>
-          <a:lstStyle/>
-          <a:p>
-            <a:pPr algn="ctr"/>
-            <a:r>
-              <a:rPr b="1" sz="1500">
-                <a:solidFill>
-                  <a:srgbClr val="FFFFFF"/>
-                </a:solidFill>
-                <a:latin typeface="Arial"/>
-              </a:rPr>
-              <a:t>1</a:t>
-            </a:r>
-          </a:p>
-        </p:txBody>
-      </p:sp>
-      <p:sp>
-        <p:nvSpPr>
-          <p:cNvPr id="7" name="TextBox 6"/>
+        </p:spPr>
+      </p:pic>
+      <p:sp>
+        <p:nvSpPr>
+          <p:cNvPr id="6" name="TextBox 5"/>
           <p:cNvSpPr txBox="1"/>
           <p:nvPr/>
         </p:nvSpPr>
         <p:spPr>
           <a:xfrm>
-            <a:off x="1325880" y="1417320"/>
-            <a:ext cx="5532120" cy="758952"/>
+            <a:off x="4160520" y="1572768"/>
+            <a:ext cx="2834640" cy="777240"/>
           </a:xfrm>
           <a:prstGeom prst="rect">
             <a:avLst/>
@@ -27029,163 +27200,43 @@
           <a:noFill/>
         </p:spPr>
         <p:txBody>
-          <a:bodyPr wrap="square" anchor="ctr" lIns="45720" rIns="45720" tIns="18288" bIns="18288">
+          <a:bodyPr wrap="square">
             <a:spAutoFit/>
           </a:bodyPr>
           <a:lstStyle/>
           <a:p>
-            <a:pPr algn="l">
-              <a:spcBef>
-                <a:spcPts val="0"/>
-              </a:spcBef>
-              <a:spcAft>
-                <a:spcPts val="100"/>
-              </a:spcAft>
-              <a:buNone/>
-            </a:pPr>
-            <a:r>
-              <a:rPr sz="1300" b="1" i="0">
+            <a:pPr algn="l"/>
+            <a:r>
+              <a:rPr sz="1200" b="1">
                 <a:solidFill>
                   <a:srgbClr val="2A2E30"/>
                 </a:solidFill>
                 <a:latin typeface="Arial"/>
               </a:rPr>
-              <a:t>Optimize the Reward, not accuracy</a:t>
-            </a:r>
-          </a:p>
-          <a:p>
-            <a:pPr algn="l">
-              <a:spcBef>
-                <a:spcPts val="0"/>
-              </a:spcBef>
-              <a:spcAft>
-                <a:spcPts val="0"/>
-              </a:spcAft>
-              <a:buNone/>
-            </a:pPr>
-            <a:r>
-              <a:rPr sz="1050" b="0" i="0">
+              <a:t>14 of 48 features</a:t>
+            </a:r>
+            <a:r>
+              <a:rPr sz="1200" b="0">
                 <a:solidFill>
                   <a:srgbClr val="505759"/>
                 </a:solidFill>
                 <a:latin typeface="Arial"/>
               </a:rPr>
-              <a:t>Tune the decision threshold to maximize prevalence-weighted payoff — accuracy will look worse and that's fine.</a:t>
-            </a:r>
-          </a:p>
-        </p:txBody>
-      </p:sp>
-      <p:sp>
-        <p:nvSpPr>
-          <p:cNvPr id="8" name="Rounded Rectangle 7"/>
-          <p:cNvSpPr/>
-          <p:nvPr/>
-        </p:nvSpPr>
-        <p:spPr>
-          <a:xfrm>
-            <a:off x="548640" y="2249424"/>
-            <a:ext cx="6446520" cy="758952"/>
-          </a:xfrm>
-          <a:prstGeom prst="roundRect">
-            <a:avLst>
-              <a:gd name="adj" fmla="val 6000"/>
-            </a:avLst>
-          </a:prstGeom>
-          <a:solidFill>
-            <a:srgbClr val="F2F4F4"/>
-          </a:solidFill>
-          <a:ln>
-            <a:noFill/>
-          </a:ln>
-          <a:effectLst/>
-        </p:spPr>
-        <p:style>
-          <a:lnRef idx="1">
-            <a:schemeClr val="accent1"/>
-          </a:lnRef>
-          <a:fillRef idx="3">
-            <a:schemeClr val="accent1"/>
-          </a:fillRef>
-          <a:effectRef idx="2">
-            <a:schemeClr val="accent1"/>
-          </a:effectRef>
-          <a:fontRef idx="minor">
-            <a:schemeClr val="lt1"/>
-          </a:fontRef>
-        </p:style>
-        <p:txBody>
-          <a:bodyPr rtlCol="0" anchor="ctr"/>
-          <a:lstStyle/>
-          <a:p>
-            <a:pPr algn="ctr"/>
-          </a:p>
-        </p:txBody>
-      </p:sp>
-      <p:sp>
-        <p:nvSpPr>
-          <p:cNvPr id="9" name="Rounded Rectangle 8"/>
-          <p:cNvSpPr/>
-          <p:nvPr/>
-        </p:nvSpPr>
-        <p:spPr>
-          <a:xfrm>
-            <a:off x="685800" y="2395728"/>
-            <a:ext cx="457200" cy="457200"/>
-          </a:xfrm>
-          <a:prstGeom prst="roundRect">
-            <a:avLst>
-              <a:gd name="adj" fmla="val 25000"/>
-            </a:avLst>
-          </a:prstGeom>
-          <a:solidFill>
-            <a:srgbClr val="C8102E"/>
-          </a:solidFill>
-          <a:ln>
-            <a:noFill/>
-          </a:ln>
-          <a:effectLst/>
-        </p:spPr>
-        <p:style>
-          <a:lnRef idx="1">
-            <a:schemeClr val="accent1"/>
-          </a:lnRef>
-          <a:fillRef idx="3">
-            <a:schemeClr val="accent1"/>
-          </a:fillRef>
-          <a:effectRef idx="2">
-            <a:schemeClr val="accent1"/>
-          </a:effectRef>
-          <a:fontRef idx="minor">
-            <a:schemeClr val="lt1"/>
-          </a:fontRef>
-        </p:style>
-        <p:txBody>
-          <a:bodyPr rtlCol="0" anchor="ctr"/>
-          <a:lstStyle/>
-          <a:p>
-            <a:pPr algn="ctr"/>
-            <a:r>
-              <a:rPr b="1" sz="1500">
-                <a:solidFill>
-                  <a:srgbClr val="FFFFFF"/>
-                </a:solidFill>
-                <a:latin typeface="Arial"/>
-              </a:rPr>
-              <a:t>2</a:t>
-            </a:r>
-          </a:p>
-        </p:txBody>
-      </p:sp>
-      <p:sp>
-        <p:nvSpPr>
-          <p:cNvPr id="10" name="TextBox 9"/>
+              <a:t> are significant at FDR q&lt;0.05.</a:t>
+            </a:r>
+          </a:p>
+        </p:txBody>
+      </p:sp>
+      <p:sp>
+        <p:nvSpPr>
+          <p:cNvPr id="7" name="TextBox 6"/>
           <p:cNvSpPr txBox="1"/>
           <p:nvPr/>
         </p:nvSpPr>
         <p:spPr>
           <a:xfrm>
-            <a:off x="1325880" y="2249424"/>
-            <a:ext cx="5532120" cy="758952"/>
+            <a:off x="4160520" y="2194560"/>
+            <a:ext cx="2834640" cy="777240"/>
           </a:xfrm>
           <a:prstGeom prst="rect">
             <a:avLst/>
@@ -27193,163 +27244,43 @@
           <a:noFill/>
         </p:spPr>
         <p:txBody>
-          <a:bodyPr wrap="square" anchor="ctr" lIns="45720" rIns="45720" tIns="18288" bIns="18288">
+          <a:bodyPr wrap="square">
             <a:spAutoFit/>
           </a:bodyPr>
           <a:lstStyle/>
           <a:p>
-            <a:pPr algn="l">
-              <a:spcBef>
-                <a:spcPts val="0"/>
-              </a:spcBef>
-              <a:spcAft>
-                <a:spcPts val="100"/>
-              </a:spcAft>
-              <a:buNone/>
-            </a:pPr>
-            <a:r>
-              <a:rPr sz="1300" b="1" i="0">
-                <a:solidFill>
-                  <a:srgbClr val="2A2E30"/>
+            <a:pPr algn="l"/>
+            <a:r>
+              <a:rPr sz="1200" b="1">
+                <a:solidFill>
+                  <a:srgbClr val="C8102E"/>
                 </a:solidFill>
                 <a:latin typeface="Arial"/>
               </a:rPr>
-              <a:t>Protect recall on the rare class</a:t>
-            </a:r>
-          </a:p>
-          <a:p>
-            <a:pPr algn="l">
-              <a:spcBef>
-                <a:spcPts val="0"/>
-              </a:spcBef>
-              <a:spcAft>
-                <a:spcPts val="0"/>
-              </a:spcAft>
-              <a:buNone/>
-            </a:pPr>
-            <a:r>
-              <a:rPr sz="1050" b="0" i="0">
+              <a:t>Age dominates</a:t>
+            </a:r>
+            <a:r>
+              <a:rPr sz="1200" b="0">
                 <a:solidFill>
                   <a:srgbClr val="505759"/>
                 </a:solidFill>
                 <a:latin typeface="Arial"/>
               </a:rPr>
-              <a:t>Each caught positive is worth 1/p − 1; a missed one costs −1. Missing impairment is expensive.</a:t>
-            </a:r>
-          </a:p>
-        </p:txBody>
-      </p:sp>
-      <p:sp>
-        <p:nvSpPr>
-          <p:cNvPr id="11" name="Rounded Rectangle 10"/>
-          <p:cNvSpPr/>
-          <p:nvPr/>
-        </p:nvSpPr>
-        <p:spPr>
-          <a:xfrm>
-            <a:off x="548640" y="3081528"/>
-            <a:ext cx="6446520" cy="758952"/>
-          </a:xfrm>
-          <a:prstGeom prst="roundRect">
-            <a:avLst>
-              <a:gd name="adj" fmla="val 6000"/>
-            </a:avLst>
-          </a:prstGeom>
-          <a:solidFill>
-            <a:srgbClr val="F2F4F4"/>
-          </a:solidFill>
-          <a:ln>
-            <a:noFill/>
-          </a:ln>
-          <a:effectLst/>
-        </p:spPr>
-        <p:style>
-          <a:lnRef idx="1">
-            <a:schemeClr val="accent1"/>
-          </a:lnRef>
-          <a:fillRef idx="3">
-            <a:schemeClr val="accent1"/>
-          </a:fillRef>
-          <a:effectRef idx="2">
-            <a:schemeClr val="accent1"/>
-          </a:effectRef>
-          <a:fontRef idx="minor">
-            <a:schemeClr val="lt1"/>
-          </a:fontRef>
-        </p:style>
-        <p:txBody>
-          <a:bodyPr rtlCol="0" anchor="ctr"/>
-          <a:lstStyle/>
-          <a:p>
-            <a:pPr algn="ctr"/>
-          </a:p>
-        </p:txBody>
-      </p:sp>
-      <p:sp>
-        <p:nvSpPr>
-          <p:cNvPr id="12" name="Rounded Rectangle 11"/>
-          <p:cNvSpPr/>
-          <p:nvPr/>
-        </p:nvSpPr>
-        <p:spPr>
-          <a:xfrm>
-            <a:off x="685800" y="3227832"/>
-            <a:ext cx="457200" cy="457200"/>
-          </a:xfrm>
-          <a:prstGeom prst="roundRect">
-            <a:avLst>
-              <a:gd name="adj" fmla="val 25000"/>
-            </a:avLst>
-          </a:prstGeom>
-          <a:solidFill>
-            <a:srgbClr val="C8102E"/>
-          </a:solidFill>
-          <a:ln>
-            <a:noFill/>
-          </a:ln>
-          <a:effectLst/>
-        </p:spPr>
-        <p:style>
-          <a:lnRef idx="1">
-            <a:schemeClr val="accent1"/>
-          </a:lnRef>
-          <a:fillRef idx="3">
-            <a:schemeClr val="accent1"/>
-          </a:fillRef>
-          <a:effectRef idx="2">
-            <a:schemeClr val="accent1"/>
-          </a:effectRef>
-          <a:fontRef idx="minor">
-            <a:schemeClr val="lt1"/>
-          </a:fontRef>
-        </p:style>
-        <p:txBody>
-          <a:bodyPr rtlCol="0" anchor="ctr"/>
-          <a:lstStyle/>
-          <a:p>
-            <a:pPr algn="ctr"/>
-            <a:r>
-              <a:rPr b="1" sz="1500">
-                <a:solidFill>
-                  <a:srgbClr val="FFFFFF"/>
-                </a:solidFill>
-                <a:latin typeface="Arial"/>
-              </a:rPr>
-              <a:t>3</a:t>
-            </a:r>
-          </a:p>
-        </p:txBody>
-      </p:sp>
-      <p:sp>
-        <p:nvSpPr>
-          <p:cNvPr id="13" name="TextBox 12"/>
+              <a:t> (Cohen d = 1.08) — exactly why the metric discounts it.</a:t>
+            </a:r>
+          </a:p>
+        </p:txBody>
+      </p:sp>
+      <p:sp>
+        <p:nvSpPr>
+          <p:cNvPr id="8" name="TextBox 7"/>
           <p:cNvSpPr txBox="1"/>
           <p:nvPr/>
         </p:nvSpPr>
         <p:spPr>
           <a:xfrm>
-            <a:off x="1325880" y="3081528"/>
-            <a:ext cx="5532120" cy="758952"/>
+            <a:off x="4160520" y="2816352"/>
+            <a:ext cx="2834640" cy="777240"/>
           </a:xfrm>
           <a:prstGeom prst="rect">
             <a:avLst/>
@@ -27357,163 +27288,43 @@
           <a:noFill/>
         </p:spPr>
         <p:txBody>
-          <a:bodyPr wrap="square" anchor="ctr" lIns="45720" rIns="45720" tIns="18288" bIns="18288">
+          <a:bodyPr wrap="square">
             <a:spAutoFit/>
           </a:bodyPr>
           <a:lstStyle/>
           <a:p>
-            <a:pPr algn="l">
-              <a:spcBef>
-                <a:spcPts val="0"/>
-              </a:spcBef>
-              <a:spcAft>
-                <a:spcPts val="100"/>
-              </a:spcAft>
-              <a:buNone/>
-            </a:pPr>
-            <a:r>
-              <a:rPr sz="1300" b="1" i="0">
-                <a:solidFill>
-                  <a:srgbClr val="2A2E30"/>
+            <a:pPr algn="l"/>
+            <a:r>
+              <a:rPr sz="1200" b="0">
+                <a:solidFill>
+                  <a:srgbClr val="505759"/>
                 </a:solidFill>
                 <a:latin typeface="Arial"/>
               </a:rPr>
-              <a:t>Don't lean on age</a:t>
-            </a:r>
-          </a:p>
-          <a:p>
-            <a:pPr algn="l">
-              <a:spcBef>
-                <a:spcPts val="0"/>
-              </a:spcBef>
-              <a:spcAft>
-                <a:spcPts val="0"/>
-              </a:spcAft>
-              <a:buNone/>
-            </a:pPr>
-            <a:r>
-              <a:rPr sz="1050" b="0" i="0">
-                <a:solidFill>
-                  <a:srgbClr val="505759"/>
+              <a:t>Then: </a:t>
+            </a:r>
+            <a:r>
+              <a:rPr sz="1200" b="1">
+                <a:solidFill>
+                  <a:srgbClr val="2A2E30"/>
                 </a:solidFill>
                 <a:latin typeface="Arial"/>
               </a:rPr>
-              <a:t>The age-aware AUROCs strip the age shortcut. Features must carry real signal within an age band.</a:t>
-            </a:r>
-          </a:p>
-        </p:txBody>
-      </p:sp>
-      <p:sp>
-        <p:nvSpPr>
-          <p:cNvPr id="14" name="Rounded Rectangle 13"/>
-          <p:cNvSpPr/>
-          <p:nvPr/>
-        </p:nvSpPr>
-        <p:spPr>
-          <a:xfrm>
-            <a:off x="548640" y="3913632"/>
-            <a:ext cx="6446520" cy="758952"/>
-          </a:xfrm>
-          <a:prstGeom prst="roundRect">
-            <a:avLst>
-              <a:gd name="adj" fmla="val 6000"/>
-            </a:avLst>
-          </a:prstGeom>
-          <a:solidFill>
-            <a:srgbClr val="F2F4F4"/>
-          </a:solidFill>
-          <a:ln>
-            <a:noFill/>
-          </a:ln>
-          <a:effectLst/>
-        </p:spPr>
-        <p:style>
-          <a:lnRef idx="1">
-            <a:schemeClr val="accent1"/>
-          </a:lnRef>
-          <a:fillRef idx="3">
-            <a:schemeClr val="accent1"/>
-          </a:fillRef>
-          <a:effectRef idx="2">
-            <a:schemeClr val="accent1"/>
-          </a:effectRef>
-          <a:fontRef idx="minor">
-            <a:schemeClr val="lt1"/>
-          </a:fontRef>
-        </p:style>
-        <p:txBody>
-          <a:bodyPr rtlCol="0" anchor="ctr"/>
-          <a:lstStyle/>
-          <a:p>
-            <a:pPr algn="ctr"/>
-          </a:p>
-        </p:txBody>
-      </p:sp>
-      <p:sp>
-        <p:nvSpPr>
-          <p:cNvPr id="15" name="Rounded Rectangle 14"/>
-          <p:cNvSpPr/>
-          <p:nvPr/>
-        </p:nvSpPr>
-        <p:spPr>
-          <a:xfrm>
-            <a:off x="685800" y="4059936"/>
-            <a:ext cx="457200" cy="457200"/>
-          </a:xfrm>
-          <a:prstGeom prst="roundRect">
-            <a:avLst>
-              <a:gd name="adj" fmla="val 25000"/>
-            </a:avLst>
-          </a:prstGeom>
-          <a:solidFill>
-            <a:srgbClr val="C8102E"/>
-          </a:solidFill>
-          <a:ln>
-            <a:noFill/>
-          </a:ln>
-          <a:effectLst/>
-        </p:spPr>
-        <p:style>
-          <a:lnRef idx="1">
-            <a:schemeClr val="accent1"/>
-          </a:lnRef>
-          <a:fillRef idx="3">
-            <a:schemeClr val="accent1"/>
-          </a:fillRef>
-          <a:effectRef idx="2">
-            <a:schemeClr val="accent1"/>
-          </a:effectRef>
-          <a:fontRef idx="minor">
-            <a:schemeClr val="lt1"/>
-          </a:fontRef>
-        </p:style>
-        <p:txBody>
-          <a:bodyPr rtlCol="0" anchor="ctr"/>
-          <a:lstStyle/>
-          <a:p>
-            <a:pPr algn="ctr"/>
-            <a:r>
-              <a:rPr b="1" sz="1500">
-                <a:solidFill>
-                  <a:srgbClr val="FFFFFF"/>
-                </a:solidFill>
-                <a:latin typeface="Arial"/>
-              </a:rPr>
-              <a:t>4</a:t>
-            </a:r>
-          </a:p>
-        </p:txBody>
-      </p:sp>
-      <p:sp>
-        <p:nvSpPr>
-          <p:cNvPr id="16" name="TextBox 15"/>
+              <a:t>limb movements, ↓REM, ↑WASO/Wake, ↓efficiency &amp; entropy, fewer REM periods, ↓N3.</a:t>
+            </a:r>
+          </a:p>
+        </p:txBody>
+      </p:sp>
+      <p:sp>
+        <p:nvSpPr>
+          <p:cNvPr id="9" name="TextBox 8"/>
           <p:cNvSpPr txBox="1"/>
           <p:nvPr/>
         </p:nvSpPr>
         <p:spPr>
           <a:xfrm>
-            <a:off x="1325880" y="3913632"/>
-            <a:ext cx="5532120" cy="758952"/>
+            <a:off x="4160520" y="3438144"/>
+            <a:ext cx="2834640" cy="777240"/>
           </a:xfrm>
           <a:prstGeom prst="rect">
             <a:avLst/>
@@ -27521,62 +27332,43 @@
           <a:noFill/>
         </p:spPr>
         <p:txBody>
-          <a:bodyPr wrap="square" anchor="ctr" lIns="45720" rIns="45720" tIns="18288" bIns="18288">
+          <a:bodyPr wrap="square">
             <a:spAutoFit/>
           </a:bodyPr>
           <a:lstStyle/>
           <a:p>
-            <a:pPr algn="l">
-              <a:spcBef>
-                <a:spcPts val="0"/>
-              </a:spcBef>
-              <a:spcAft>
-                <a:spcPts val="100"/>
-              </a:spcAft>
-              <a:buNone/>
-            </a:pPr>
-            <a:r>
-              <a:rPr sz="1300" b="1" i="0">
-                <a:solidFill>
-                  <a:srgbClr val="2A2E30"/>
+            <a:pPr algn="l"/>
+            <a:r>
+              <a:rPr sz="1200" b="1">
+                <a:solidFill>
+                  <a:srgbClr val="C8102E"/>
                 </a:solidFill>
                 <a:latin typeface="Arial"/>
               </a:rPr>
-              <a:t>Validate with the official code</a:t>
-            </a:r>
-          </a:p>
-          <a:p>
-            <a:pPr algn="l">
-              <a:spcBef>
-                <a:spcPts val="0"/>
-              </a:spcBef>
-              <a:spcAft>
-                <a:spcPts val="0"/>
-              </a:spcAft>
-              <a:buNone/>
-            </a:pPr>
-            <a:r>
-              <a:rPr sz="1050" b="0" i="0">
+              <a:t>AHI is NOT significant</a:t>
+            </a:r>
+            <a:r>
+              <a:rPr sz="1200" b="0">
                 <a:solidFill>
                   <a:srgbClr val="505759"/>
                 </a:solidFill>
                 <a:latin typeface="Arial"/>
               </a:rPr>
-              <a:t>Score cross-validation folds with evaluate_model.py so our internal numbers match the leaderboard.</a:t>
-            </a:r>
-          </a:p>
-        </p:txBody>
-      </p:sp>
-      <p:sp>
-        <p:nvSpPr>
-          <p:cNvPr id="17" name="TextBox 16"/>
+              <a:t> (d=0.19) — signal is in sleep architecture &amp; continuity, not apnea load.</a:t>
+            </a:r>
+          </a:p>
+        </p:txBody>
+      </p:sp>
+      <p:sp>
+        <p:nvSpPr>
+          <p:cNvPr id="10" name="TextBox 9"/>
           <p:cNvSpPr txBox="1"/>
           <p:nvPr/>
         </p:nvSpPr>
         <p:spPr>
           <a:xfrm>
-            <a:off x="548640" y="4828032"/>
-            <a:ext cx="6035040" cy="228600"/>
+            <a:off x="4160520" y="4059936"/>
+            <a:ext cx="2834640" cy="777240"/>
           </a:xfrm>
           <a:prstGeom prst="rect">
             <a:avLst/>
@@ -27584,22 +27376,58 @@
           <a:noFill/>
         </p:spPr>
         <p:txBody>
-          <a:bodyPr wrap="square" anchor="t" lIns="45720" rIns="45720" tIns="18288" bIns="18288">
+          <a:bodyPr wrap="square">
             <a:spAutoFit/>
           </a:bodyPr>
           <a:lstStyle/>
           <a:p>
-            <a:pPr algn="l">
-              <a:spcBef>
-                <a:spcPts val="0"/>
-              </a:spcBef>
-              <a:spcAft>
-                <a:spcPts val="0"/>
-              </a:spcAft>
-              <a:buNone/>
-            </a:pPr>
-            <a:r>
-              <a:rPr sz="800" b="0" i="0">
+            <a:pPr algn="l"/>
+            <a:r>
+              <a:rPr sz="1200" b="0">
+                <a:solidFill>
+                  <a:srgbClr val="505759"/>
+                </a:solidFill>
+                <a:latin typeface="Arial"/>
+              </a:rPr>
+              <a:t>Method: </a:t>
+            </a:r>
+            <a:r>
+              <a:rPr sz="1150" b="0">
+                <a:solidFill>
+                  <a:srgbClr val="505759"/>
+                </a:solidFill>
+                <a:latin typeface="Arial"/>
+              </a:rPr>
+              <a:t>Welch t (numeric) + χ² (categorical), Benjamini–Hochberg FDR.</a:t>
+            </a:r>
+          </a:p>
+        </p:txBody>
+      </p:sp>
+      <p:sp>
+        <p:nvSpPr>
+          <p:cNvPr id="11" name="TextBox 10"/>
+          <p:cNvSpPr txBox="1"/>
+          <p:nvPr/>
+        </p:nvSpPr>
+        <p:spPr>
+          <a:xfrm>
+            <a:off x="548640" y="4828032"/>
+            <a:ext cx="6035040" cy="228600"/>
+          </a:xfrm>
+          <a:prstGeom prst="rect">
+            <a:avLst/>
+          </a:prstGeom>
+          <a:noFill/>
+        </p:spPr>
+        <p:txBody>
+          <a:bodyPr wrap="square">
+            <a:spAutoFit/>
+          </a:bodyPr>
+          <a:lstStyle/>
+          <a:p>
+            <a:pPr algn="l"/>
+            <a:r>
+              <a:rPr sz="800" b="0">
                 <a:solidFill>
                   <a:srgbClr val="898D8D"/>
                 </a:solidFill>
@@ -27644,10 +27472,7 @@
           <a:lstStyle/>
           <a:p>
             <a:r>
-              <a:rPr b="1">
-                <a:latin typeface="Arial"/>
-              </a:rPr>
-              <a:t>References</a:t>
+              <a:t>What's present, and what we have to handle</a:t>
             </a:r>
           </a:p>
         </p:txBody>
@@ -27686,42 +27511,58 @@
           <a:noFill/>
         </p:spPr>
         <p:txBody>
-          <a:bodyPr wrap="square" anchor="t" lIns="45720" rIns="45720" tIns="18288" bIns="18288">
+          <a:bodyPr wrap="square">
             <a:spAutoFit/>
           </a:bodyPr>
           <a:lstStyle/>
           <a:p>
-            <a:pPr algn="l">
-              <a:spcBef>
-                <a:spcPts val="0"/>
-              </a:spcBef>
-              <a:spcAft>
-                <a:spcPts val="0"/>
-              </a:spcAft>
-              <a:buNone/>
-            </a:pPr>
-            <a:r>
-              <a:rPr sz="1100" b="1" i="0">
+            <a:pPr algn="l"/>
+            <a:r>
+              <a:rPr sz="1100" b="1">
                 <a:solidFill>
                   <a:srgbClr val="C8102E"/>
                 </a:solidFill>
                 <a:latin typeface="Arial"/>
               </a:rPr>
-              <a:t>SOURCES</a:t>
-            </a:r>
-          </a:p>
-        </p:txBody>
-      </p:sp>
-      <p:sp>
-        <p:nvSpPr>
-          <p:cNvPr id="5" name="TextBox 4"/>
+              <a:t>DATASET · COMPLETENESS &amp; QUALITY</a:t>
+            </a:r>
+          </a:p>
+        </p:txBody>
+      </p:sp>
+      <p:pic>
+        <p:nvPicPr>
+          <p:cNvPr id="5" name="Picture 4" descr="fig6_data_completeness.png"/>
+          <p:cNvPicPr>
+            <a:picLocks noChangeAspect="1"/>
+          </p:cNvPicPr>
+          <p:nvPr/>
+        </p:nvPicPr>
+        <p:blipFill>
+          <a:blip r:embed="rId2"/>
+          <a:stretch>
+            <a:fillRect/>
+          </a:stretch>
+        </p:blipFill>
+        <p:spPr>
+          <a:xfrm>
+            <a:off x="502920" y="1937269"/>
+            <a:ext cx="3611880" cy="2251941"/>
+          </a:xfrm>
+          <a:prstGeom prst="rect">
+            <a:avLst/>
+          </a:prstGeom>
+        </p:spPr>
+      </p:pic>
+      <p:sp>
+        <p:nvSpPr>
+          <p:cNvPr id="6" name="TextBox 5"/>
           <p:cNvSpPr txBox="1"/>
           <p:nvPr/>
         </p:nvSpPr>
         <p:spPr>
           <a:xfrm>
-            <a:off x="548640" y="1417320"/>
-            <a:ext cx="6446520" cy="3108960"/>
+            <a:off x="4297680" y="1600200"/>
+            <a:ext cx="2697480" cy="731520"/>
           </a:xfrm>
           <a:prstGeom prst="rect">
             <a:avLst/>
@@ -27729,198 +27570,43 @@
           <a:noFill/>
         </p:spPr>
         <p:txBody>
-          <a:bodyPr wrap="square" anchor="t" lIns="45720" rIns="45720" tIns="18288" bIns="18288">
+          <a:bodyPr wrap="square">
             <a:spAutoFit/>
           </a:bodyPr>
           <a:lstStyle/>
           <a:p>
-            <a:pPr>
-              <a:spcBef>
-                <a:spcPts val="600"/>
-              </a:spcBef>
-              <a:spcAft>
-                <a:spcPts val="100"/>
-              </a:spcAft>
-              <a:buNone/>
-            </a:pPr>
-            <a:r>
-              <a:rPr sz="1300" b="1">
-                <a:solidFill>
-                  <a:srgbClr val="C8102E"/>
+            <a:pPr algn="l"/>
+            <a:r>
+              <a:rPr sz="1200" b="1">
+                <a:solidFill>
+                  <a:srgbClr val="2A2E30"/>
                 </a:solidFill>
                 <a:latin typeface="Arial"/>
               </a:rPr>
-              <a:t>Challenge website  —  </a:t>
-            </a:r>
-            <a:r>
-              <a:rPr sz="1300" b="0">
-                <a:solidFill>
-                  <a:srgbClr val="2A2E30"/>
+              <a:t>Age &amp; Sex complete</a:t>
+            </a:r>
+            <a:r>
+              <a:rPr sz="1200" b="0">
+                <a:solidFill>
+                  <a:srgbClr val="505759"/>
                 </a:solidFill>
                 <a:latin typeface="Arial"/>
               </a:rPr>
-              <a:t>George B. Moody PhysioNet Challenge 2026</a:t>
-            </a:r>
-          </a:p>
-          <a:p>
-            <a:pPr algn="l">
-              <a:spcBef>
-                <a:spcPts val="0"/>
-              </a:spcBef>
-              <a:spcAft>
-                <a:spcPts val="600"/>
-              </a:spcAft>
-              <a:buNone/>
-            </a:pPr>
-            <a:r>
-              <a:rPr sz="1100" b="0" i="0">
-                <a:solidFill>
-                  <a:srgbClr val="346583"/>
-                </a:solidFill>
-                <a:latin typeface="Arial"/>
-              </a:rPr>
-              <a:t>physionetchallenges.org/2026/</a:t>
-            </a:r>
-          </a:p>
-          <a:p>
-            <a:pPr>
-              <a:spcBef>
-                <a:spcPts val="600"/>
-              </a:spcBef>
-              <a:spcAft>
-                <a:spcPts val="100"/>
-              </a:spcAft>
-              <a:buNone/>
-            </a:pPr>
-            <a:r>
-              <a:rPr sz="1300" b="1">
-                <a:solidFill>
-                  <a:srgbClr val="C8102E"/>
-                </a:solidFill>
-                <a:latin typeface="Arial"/>
-              </a:rPr>
-              <a:t>Evaluation code  —  </a:t>
-            </a:r>
-            <a:r>
-              <a:rPr sz="1300" b="0">
-                <a:solidFill>
-                  <a:srgbClr val="2A2E30"/>
-                </a:solidFill>
-                <a:latin typeface="Arial"/>
-              </a:rPr>
-              <a:t>Official scoring implementation</a:t>
-            </a:r>
-          </a:p>
-          <a:p>
-            <a:pPr algn="l">
-              <a:spcBef>
-                <a:spcPts val="0"/>
-              </a:spcBef>
-              <a:spcAft>
-                <a:spcPts val="600"/>
-              </a:spcAft>
-              <a:buNone/>
-            </a:pPr>
-            <a:r>
-              <a:rPr sz="1100" b="0" i="0">
-                <a:solidFill>
-                  <a:srgbClr val="346583"/>
-                </a:solidFill>
-                <a:latin typeface="Arial"/>
-              </a:rPr>
-              <a:t>github.com/physionetchallenges/evaluation-2026</a:t>
-            </a:r>
-          </a:p>
-          <a:p>
-            <a:pPr>
-              <a:spcBef>
-                <a:spcPts val="600"/>
-              </a:spcBef>
-              <a:spcAft>
-                <a:spcPts val="100"/>
-              </a:spcAft>
-              <a:buNone/>
-            </a:pPr>
-            <a:r>
-              <a:rPr sz="1300" b="1">
-                <a:solidFill>
-                  <a:srgbClr val="C8102E"/>
-                </a:solidFill>
-                <a:latin typeface="Arial"/>
-              </a:rPr>
-              <a:t>Example code  —  </a:t>
-            </a:r>
-            <a:r>
-              <a:rPr sz="1300" b="0">
-                <a:solidFill>
-                  <a:srgbClr val="2A2E30"/>
-                </a:solidFill>
-                <a:latin typeface="Arial"/>
-              </a:rPr>
-              <a:t>Python entry template</a:t>
-            </a:r>
-          </a:p>
-          <a:p>
-            <a:pPr algn="l">
-              <a:spcBef>
-                <a:spcPts val="0"/>
-              </a:spcBef>
-              <a:spcAft>
-                <a:spcPts val="600"/>
-              </a:spcAft>
-              <a:buNone/>
-            </a:pPr>
-            <a:r>
-              <a:rPr sz="1100" b="0" i="0">
-                <a:solidFill>
-                  <a:srgbClr val="346583"/>
-                </a:solidFill>
-                <a:latin typeface="Arial"/>
-              </a:rPr>
-              <a:t>github.com/physionetchallenges/python-example-2026</a:t>
-            </a:r>
-          </a:p>
-          <a:p>
-            <a:pPr>
-              <a:spcBef>
-                <a:spcPts val="600"/>
-              </a:spcBef>
-              <a:spcAft>
-                <a:spcPts val="100"/>
-              </a:spcAft>
-              <a:buNone/>
-            </a:pPr>
-            <a:r>
-              <a:rPr sz="1300" b="1">
-                <a:solidFill>
-                  <a:srgbClr val="C8102E"/>
-                </a:solidFill>
-                <a:latin typeface="Arial"/>
-              </a:rPr>
-              <a:t>This deck  —  </a:t>
-            </a:r>
-            <a:r>
-              <a:rPr sz="1300" b="0">
-                <a:solidFill>
-                  <a:srgbClr val="2A2E30"/>
-                </a:solidFill>
-                <a:latin typeface="Arial"/>
-              </a:rPr>
-              <a:t>Metric definitions taken directly from evaluate_model.py in our repository</a:t>
-            </a:r>
-          </a:p>
-        </p:txBody>
-      </p:sp>
-      <p:sp>
-        <p:nvSpPr>
-          <p:cNvPr id="6" name="TextBox 5"/>
+              <a:t>; race and ethnicity essentially complete.</a:t>
+            </a:r>
+          </a:p>
+        </p:txBody>
+      </p:sp>
+      <p:sp>
+        <p:nvSpPr>
+          <p:cNvPr id="7" name="TextBox 6"/>
           <p:cNvSpPr txBox="1"/>
           <p:nvPr/>
         </p:nvSpPr>
         <p:spPr>
           <a:xfrm>
-            <a:off x="548640" y="4828032"/>
-            <a:ext cx="6035040" cy="228600"/>
+            <a:off x="4297680" y="2203704"/>
+            <a:ext cx="2697480" cy="731520"/>
           </a:xfrm>
           <a:prstGeom prst="rect">
             <a:avLst/>
@@ -27928,22 +27614,190 @@
           <a:noFill/>
         </p:spPr>
         <p:txBody>
-          <a:bodyPr wrap="square" anchor="t" lIns="45720" rIns="45720" tIns="18288" bIns="18288">
+          <a:bodyPr wrap="square">
             <a:spAutoFit/>
           </a:bodyPr>
           <a:lstStyle/>
           <a:p>
-            <a:pPr algn="l">
-              <a:spcBef>
-                <a:spcPts val="0"/>
-              </a:spcBef>
-              <a:spcAft>
-                <a:spcPts val="0"/>
-              </a:spcAft>
-              <a:buNone/>
-            </a:pPr>
-            <a:r>
-              <a:rPr sz="800" b="0" i="0">
+            <a:pPr algn="l"/>
+            <a:r>
+              <a:rPr sz="1200" b="1">
+                <a:solidFill>
+                  <a:srgbClr val="C8102E"/>
+                </a:solidFill>
+                <a:latin typeface="Arial"/>
+              </a:rPr>
+              <a:t>BMI missing in 76%</a:t>
+            </a:r>
+            <a:r>
+              <a:rPr sz="1200" b="0">
+                <a:solidFill>
+                  <a:srgbClr val="505759"/>
+                </a:solidFill>
+                <a:latin typeface="Arial"/>
+              </a:rPr>
+              <a:t>, Time_to_Event in 92% (recorded for positives only).</a:t>
+            </a:r>
+          </a:p>
+        </p:txBody>
+      </p:sp>
+      <p:sp>
+        <p:nvSpPr>
+          <p:cNvPr id="8" name="TextBox 7"/>
+          <p:cNvSpPr txBox="1"/>
+          <p:nvPr/>
+        </p:nvSpPr>
+        <p:spPr>
+          <a:xfrm>
+            <a:off x="4297680" y="2807208"/>
+            <a:ext cx="2697480" cy="731520"/>
+          </a:xfrm>
+          <a:prstGeom prst="rect">
+            <a:avLst/>
+          </a:prstGeom>
+          <a:noFill/>
+        </p:spPr>
+        <p:txBody>
+          <a:bodyPr wrap="square">
+            <a:spAutoFit/>
+          </a:bodyPr>
+          <a:lstStyle/>
+          <a:p>
+            <a:pPr algn="l"/>
+            <a:r>
+              <a:rPr sz="1200" b="1">
+                <a:solidFill>
+                  <a:srgbClr val="2A2E30"/>
+                </a:solidFill>
+                <a:latin typeface="Arial"/>
+              </a:rPr>
+              <a:t>1,090 / 1,103 have CAISR</a:t>
+            </a:r>
+            <a:r>
+              <a:rPr sz="1200" b="0">
+                <a:solidFill>
+                  <a:srgbClr val="505759"/>
+                </a:solidFill>
+                <a:latin typeface="Arial"/>
+              </a:rPr>
+              <a:t> — 13 recordings fall back to global features only.</a:t>
+            </a:r>
+          </a:p>
+        </p:txBody>
+      </p:sp>
+      <p:sp>
+        <p:nvSpPr>
+          <p:cNvPr id="9" name="TextBox 8"/>
+          <p:cNvSpPr txBox="1"/>
+          <p:nvPr/>
+        </p:nvSpPr>
+        <p:spPr>
+          <a:xfrm>
+            <a:off x="4297680" y="3410712"/>
+            <a:ext cx="2697480" cy="731520"/>
+          </a:xfrm>
+          <a:prstGeom prst="rect">
+            <a:avLst/>
+          </a:prstGeom>
+          <a:noFill/>
+        </p:spPr>
+        <p:txBody>
+          <a:bodyPr wrap="square">
+            <a:spAutoFit/>
+          </a:bodyPr>
+          <a:lstStyle/>
+          <a:p>
+            <a:pPr algn="l"/>
+            <a:r>
+              <a:rPr sz="1200" b="1">
+                <a:solidFill>
+                  <a:srgbClr val="2A2E30"/>
+                </a:solidFill>
+                <a:latin typeface="Arial"/>
+              </a:rPr>
+              <a:t>18 short recordings</a:t>
+            </a:r>
+            <a:r>
+              <a:rPr sz="1200" b="0">
+                <a:solidFill>
+                  <a:srgbClr val="505759"/>
+                </a:solidFill>
+                <a:latin typeface="Arial"/>
+              </a:rPr>
+              <a:t> (&lt;4 h; 9 under 1 h) are flagged for the training pipeline.</a:t>
+            </a:r>
+          </a:p>
+        </p:txBody>
+      </p:sp>
+      <p:sp>
+        <p:nvSpPr>
+          <p:cNvPr id="10" name="TextBox 9"/>
+          <p:cNvSpPr txBox="1"/>
+          <p:nvPr/>
+        </p:nvSpPr>
+        <p:spPr>
+          <a:xfrm>
+            <a:off x="4297680" y="4014216"/>
+            <a:ext cx="2697480" cy="731520"/>
+          </a:xfrm>
+          <a:prstGeom prst="rect">
+            <a:avLst/>
+          </a:prstGeom>
+          <a:noFill/>
+        </p:spPr>
+        <p:txBody>
+          <a:bodyPr wrap="square">
+            <a:spAutoFit/>
+          </a:bodyPr>
+          <a:lstStyle/>
+          <a:p>
+            <a:pPr algn="l"/>
+            <a:r>
+              <a:rPr sz="1200" b="1">
+                <a:solidFill>
+                  <a:srgbClr val="2A2E30"/>
+                </a:solidFill>
+                <a:latin typeface="Arial"/>
+              </a:rPr>
+              <a:t>Demographics ↔ EDF linkage is exact</a:t>
+            </a:r>
+            <a:r>
+              <a:rPr sz="1200" b="0">
+                <a:solidFill>
+                  <a:srgbClr val="505759"/>
+                </a:solidFill>
+                <a:latin typeface="Arial"/>
+              </a:rPr>
+              <a:t>: 0 orphans in either direction.</a:t>
+            </a:r>
+          </a:p>
+        </p:txBody>
+      </p:sp>
+      <p:sp>
+        <p:nvSpPr>
+          <p:cNvPr id="11" name="TextBox 10"/>
+          <p:cNvSpPr txBox="1"/>
+          <p:nvPr/>
+        </p:nvSpPr>
+        <p:spPr>
+          <a:xfrm>
+            <a:off x="548640" y="4828032"/>
+            <a:ext cx="6035040" cy="228600"/>
+          </a:xfrm>
+          <a:prstGeom prst="rect">
+            <a:avLst/>
+          </a:prstGeom>
+          <a:noFill/>
+        </p:spPr>
+        <p:txBody>
+          <a:bodyPr wrap="square">
+            <a:spAutoFit/>
+          </a:bodyPr>
+          <a:lstStyle/>
+          <a:p>
+            <a:pPr algn="l"/>
+            <a:r>
+              <a:rPr sz="800" b="0">
                 <a:solidFill>
                   <a:srgbClr val="898D8D"/>
                 </a:solidFill>
@@ -27989,26 +27843,40 @@
           <a:p>
             <a:r>
               <a:rPr b="1">
-                <a:solidFill>
-                  <a:srgbClr val="FFFFFF"/>
-                </a:solidFill>
                 <a:latin typeface="Arial"/>
               </a:rPr>
-              <a:t>Questions?</a:t>
-            </a:r>
-          </a:p>
-        </p:txBody>
-      </p:sp>
-      <p:sp>
-        <p:nvSpPr>
-          <p:cNvPr id="3" name="TextBox 2"/>
+              <a:t>What this means for our approach</a:t>
+            </a:r>
+          </a:p>
+        </p:txBody>
+      </p:sp>
+      <p:sp>
+        <p:nvSpPr>
+          <p:cNvPr id="3" name="Content Placeholder 2"/>
+          <p:cNvSpPr>
+            <a:spLocks noGrp="1"/>
+          </p:cNvSpPr>
+          <p:nvPr>
+            <p:ph idx="1"/>
+          </p:nvPr>
+        </p:nvSpPr>
+        <p:spPr/>
+        <p:txBody>
+          <a:bodyPr/>
+          <a:lstStyle/>
+          <a:p/>
+        </p:txBody>
+      </p:sp>
+      <p:sp>
+        <p:nvSpPr>
+          <p:cNvPr id="4" name="TextBox 3"/>
           <p:cNvSpPr txBox="1"/>
           <p:nvPr/>
         </p:nvSpPr>
         <p:spPr>
           <a:xfrm>
-            <a:off x="548640" y="1417320"/>
-            <a:ext cx="7863840" cy="1280160"/>
+            <a:off x="548640" y="1024128"/>
+            <a:ext cx="6446520" cy="274320"/>
           </a:xfrm>
           <a:prstGeom prst="rect">
             <a:avLst/>
@@ -28020,46 +27888,6 @@
             <a:spAutoFit/>
           </a:bodyPr>
           <a:lstStyle/>
-          <a:p>
-            <a:pPr algn="l">
-              <a:spcBef>
-                <a:spcPts val="0"/>
-              </a:spcBef>
-              <a:spcAft>
-                <a:spcPts val="400"/>
-              </a:spcAft>
-              <a:buNone/>
-            </a:pPr>
-            <a:r>
-              <a:rPr sz="1200" b="1" i="0">
-                <a:solidFill>
-                  <a:srgbClr val="CEB888"/>
-                </a:solidFill>
-                <a:latin typeface="Arial"/>
-              </a:rPr>
-              <a:t>Key takeaway</a:t>
-            </a:r>
-          </a:p>
-          <a:p>
-            <a:pPr algn="l">
-              <a:spcBef>
-                <a:spcPts val="0"/>
-              </a:spcBef>
-              <a:spcAft>
-                <a:spcPts val="600"/>
-              </a:spcAft>
-              <a:buNone/>
-            </a:pPr>
-            <a:r>
-              <a:rPr sz="1700" b="1" i="0">
-                <a:solidFill>
-                  <a:srgbClr val="FFFFFF"/>
-                </a:solidFill>
-                <a:latin typeface="Arial"/>
-              </a:rPr>
-              <a:t>Optimize for the Reward — catch the rare cases, and don't lean on age.</a:t>
-            </a:r>
-          </a:p>
           <a:p>
             <a:pPr algn="l">
               <a:spcBef>
@@ -28071,13 +27899,712 @@
               <a:buNone/>
             </a:pPr>
             <a:r>
-              <a:rPr sz="1100" b="0" i="0">
-                <a:solidFill>
-                  <a:srgbClr val="FFFFFF"/>
+              <a:rPr sz="1100" b="1" i="0">
+                <a:solidFill>
+                  <a:srgbClr val="C8102E"/>
                 </a:solidFill>
                 <a:latin typeface="Arial"/>
               </a:rPr>
-              <a:t>Arshia Ilaty  ·  SDG  ·  PhysioNet Challenge 2026</a:t>
+              <a:t>TAKEAWAYS</a:t>
+            </a:r>
+          </a:p>
+        </p:txBody>
+      </p:sp>
+      <p:sp>
+        <p:nvSpPr>
+          <p:cNvPr id="5" name="Rounded Rectangle 4"/>
+          <p:cNvSpPr/>
+          <p:nvPr/>
+        </p:nvSpPr>
+        <p:spPr>
+          <a:xfrm>
+            <a:off x="548640" y="1417320"/>
+            <a:ext cx="6446520" cy="758952"/>
+          </a:xfrm>
+          <a:prstGeom prst="roundRect">
+            <a:avLst>
+              <a:gd name="adj" fmla="val 6000"/>
+            </a:avLst>
+          </a:prstGeom>
+          <a:solidFill>
+            <a:srgbClr val="F2F4F4"/>
+          </a:solidFill>
+          <a:ln>
+            <a:noFill/>
+          </a:ln>
+          <a:effectLst/>
+        </p:spPr>
+        <p:style>
+          <a:lnRef idx="1">
+            <a:schemeClr val="accent1"/>
+          </a:lnRef>
+          <a:fillRef idx="3">
+            <a:schemeClr val="accent1"/>
+          </a:fillRef>
+          <a:effectRef idx="2">
+            <a:schemeClr val="accent1"/>
+          </a:effectRef>
+          <a:fontRef idx="minor">
+            <a:schemeClr val="lt1"/>
+          </a:fontRef>
+        </p:style>
+        <p:txBody>
+          <a:bodyPr rtlCol="0" anchor="ctr"/>
+          <a:lstStyle/>
+          <a:p>
+            <a:pPr algn="ctr"/>
+          </a:p>
+        </p:txBody>
+      </p:sp>
+      <p:sp>
+        <p:nvSpPr>
+          <p:cNvPr id="6" name="Rounded Rectangle 5"/>
+          <p:cNvSpPr/>
+          <p:nvPr/>
+        </p:nvSpPr>
+        <p:spPr>
+          <a:xfrm>
+            <a:off x="685800" y="1563624"/>
+            <a:ext cx="457200" cy="457200"/>
+          </a:xfrm>
+          <a:prstGeom prst="roundRect">
+            <a:avLst>
+              <a:gd name="adj" fmla="val 25000"/>
+            </a:avLst>
+          </a:prstGeom>
+          <a:solidFill>
+            <a:srgbClr val="C8102E"/>
+          </a:solidFill>
+          <a:ln>
+            <a:noFill/>
+          </a:ln>
+          <a:effectLst/>
+        </p:spPr>
+        <p:style>
+          <a:lnRef idx="1">
+            <a:schemeClr val="accent1"/>
+          </a:lnRef>
+          <a:fillRef idx="3">
+            <a:schemeClr val="accent1"/>
+          </a:fillRef>
+          <a:effectRef idx="2">
+            <a:schemeClr val="accent1"/>
+          </a:effectRef>
+          <a:fontRef idx="minor">
+            <a:schemeClr val="lt1"/>
+          </a:fontRef>
+        </p:style>
+        <p:txBody>
+          <a:bodyPr rtlCol="0" anchor="ctr"/>
+          <a:lstStyle/>
+          <a:p>
+            <a:pPr algn="ctr"/>
+            <a:r>
+              <a:rPr b="1" sz="1500">
+                <a:solidFill>
+                  <a:srgbClr val="FFFFFF"/>
+                </a:solidFill>
+                <a:latin typeface="Arial"/>
+              </a:rPr>
+              <a:t>1</a:t>
+            </a:r>
+          </a:p>
+        </p:txBody>
+      </p:sp>
+      <p:sp>
+        <p:nvSpPr>
+          <p:cNvPr id="7" name="TextBox 6"/>
+          <p:cNvSpPr txBox="1"/>
+          <p:nvPr/>
+        </p:nvSpPr>
+        <p:spPr>
+          <a:xfrm>
+            <a:off x="1325880" y="1417320"/>
+            <a:ext cx="5532120" cy="758952"/>
+          </a:xfrm>
+          <a:prstGeom prst="rect">
+            <a:avLst/>
+          </a:prstGeom>
+          <a:noFill/>
+        </p:spPr>
+        <p:txBody>
+          <a:bodyPr wrap="square" anchor="ctr" lIns="45720" rIns="45720" tIns="18288" bIns="18288">
+            <a:spAutoFit/>
+          </a:bodyPr>
+          <a:lstStyle/>
+          <a:p>
+            <a:pPr algn="l">
+              <a:spcBef>
+                <a:spcPts val="0"/>
+              </a:spcBef>
+              <a:spcAft>
+                <a:spcPts val="100"/>
+              </a:spcAft>
+              <a:buNone/>
+            </a:pPr>
+            <a:r>
+              <a:rPr sz="1300" b="1" i="0">
+                <a:solidFill>
+                  <a:srgbClr val="2A2E30"/>
+                </a:solidFill>
+                <a:latin typeface="Arial"/>
+              </a:rPr>
+              <a:t>Optimize the Reward, not accuracy</a:t>
+            </a:r>
+          </a:p>
+          <a:p>
+            <a:pPr algn="l">
+              <a:spcBef>
+                <a:spcPts val="0"/>
+              </a:spcBef>
+              <a:spcAft>
+                <a:spcPts val="0"/>
+              </a:spcAft>
+              <a:buNone/>
+            </a:pPr>
+            <a:r>
+              <a:rPr sz="1050" b="0" i="0">
+                <a:solidFill>
+                  <a:srgbClr val="505759"/>
+                </a:solidFill>
+                <a:latin typeface="Arial"/>
+              </a:rPr>
+              <a:t>Tune the decision threshold to maximize prevalence-weighted payoff — accuracy will look worse and that's fine.</a:t>
+            </a:r>
+          </a:p>
+        </p:txBody>
+      </p:sp>
+      <p:sp>
+        <p:nvSpPr>
+          <p:cNvPr id="8" name="Rounded Rectangle 7"/>
+          <p:cNvSpPr/>
+          <p:nvPr/>
+        </p:nvSpPr>
+        <p:spPr>
+          <a:xfrm>
+            <a:off x="548640" y="2249424"/>
+            <a:ext cx="6446520" cy="758952"/>
+          </a:xfrm>
+          <a:prstGeom prst="roundRect">
+            <a:avLst>
+              <a:gd name="adj" fmla="val 6000"/>
+            </a:avLst>
+          </a:prstGeom>
+          <a:solidFill>
+            <a:srgbClr val="F2F4F4"/>
+          </a:solidFill>
+          <a:ln>
+            <a:noFill/>
+          </a:ln>
+          <a:effectLst/>
+        </p:spPr>
+        <p:style>
+          <a:lnRef idx="1">
+            <a:schemeClr val="accent1"/>
+          </a:lnRef>
+          <a:fillRef idx="3">
+            <a:schemeClr val="accent1"/>
+          </a:fillRef>
+          <a:effectRef idx="2">
+            <a:schemeClr val="accent1"/>
+          </a:effectRef>
+          <a:fontRef idx="minor">
+            <a:schemeClr val="lt1"/>
+          </a:fontRef>
+        </p:style>
+        <p:txBody>
+          <a:bodyPr rtlCol="0" anchor="ctr"/>
+          <a:lstStyle/>
+          <a:p>
+            <a:pPr algn="ctr"/>
+          </a:p>
+        </p:txBody>
+      </p:sp>
+      <p:sp>
+        <p:nvSpPr>
+          <p:cNvPr id="9" name="Rounded Rectangle 8"/>
+          <p:cNvSpPr/>
+          <p:nvPr/>
+        </p:nvSpPr>
+        <p:spPr>
+          <a:xfrm>
+            <a:off x="685800" y="2395728"/>
+            <a:ext cx="457200" cy="457200"/>
+          </a:xfrm>
+          <a:prstGeom prst="roundRect">
+            <a:avLst>
+              <a:gd name="adj" fmla="val 25000"/>
+            </a:avLst>
+          </a:prstGeom>
+          <a:solidFill>
+            <a:srgbClr val="C8102E"/>
+          </a:solidFill>
+          <a:ln>
+            <a:noFill/>
+          </a:ln>
+          <a:effectLst/>
+        </p:spPr>
+        <p:style>
+          <a:lnRef idx="1">
+            <a:schemeClr val="accent1"/>
+          </a:lnRef>
+          <a:fillRef idx="3">
+            <a:schemeClr val="accent1"/>
+          </a:fillRef>
+          <a:effectRef idx="2">
+            <a:schemeClr val="accent1"/>
+          </a:effectRef>
+          <a:fontRef idx="minor">
+            <a:schemeClr val="lt1"/>
+          </a:fontRef>
+        </p:style>
+        <p:txBody>
+          <a:bodyPr rtlCol="0" anchor="ctr"/>
+          <a:lstStyle/>
+          <a:p>
+            <a:pPr algn="ctr"/>
+            <a:r>
+              <a:rPr b="1" sz="1500">
+                <a:solidFill>
+                  <a:srgbClr val="FFFFFF"/>
+                </a:solidFill>
+                <a:latin typeface="Arial"/>
+              </a:rPr>
+              <a:t>2</a:t>
+            </a:r>
+          </a:p>
+        </p:txBody>
+      </p:sp>
+      <p:sp>
+        <p:nvSpPr>
+          <p:cNvPr id="10" name="TextBox 9"/>
+          <p:cNvSpPr txBox="1"/>
+          <p:nvPr/>
+        </p:nvSpPr>
+        <p:spPr>
+          <a:xfrm>
+            <a:off x="1325880" y="2249424"/>
+            <a:ext cx="5532120" cy="758952"/>
+          </a:xfrm>
+          <a:prstGeom prst="rect">
+            <a:avLst/>
+          </a:prstGeom>
+          <a:noFill/>
+        </p:spPr>
+        <p:txBody>
+          <a:bodyPr wrap="square" anchor="ctr" lIns="45720" rIns="45720" tIns="18288" bIns="18288">
+            <a:spAutoFit/>
+          </a:bodyPr>
+          <a:lstStyle/>
+          <a:p>
+            <a:pPr algn="l">
+              <a:spcBef>
+                <a:spcPts val="0"/>
+              </a:spcBef>
+              <a:spcAft>
+                <a:spcPts val="100"/>
+              </a:spcAft>
+              <a:buNone/>
+            </a:pPr>
+            <a:r>
+              <a:rPr sz="1300" b="1" i="0">
+                <a:solidFill>
+                  <a:srgbClr val="2A2E30"/>
+                </a:solidFill>
+                <a:latin typeface="Arial"/>
+              </a:rPr>
+              <a:t>Protect recall on the rare class</a:t>
+            </a:r>
+          </a:p>
+          <a:p>
+            <a:pPr algn="l">
+              <a:spcBef>
+                <a:spcPts val="0"/>
+              </a:spcBef>
+              <a:spcAft>
+                <a:spcPts val="0"/>
+              </a:spcAft>
+              <a:buNone/>
+            </a:pPr>
+            <a:r>
+              <a:rPr sz="1050" b="0" i="0">
+                <a:solidFill>
+                  <a:srgbClr val="505759"/>
+                </a:solidFill>
+                <a:latin typeface="Arial"/>
+              </a:rPr>
+              <a:t>Each caught positive is worth 1/p − 1; a missed one costs −1. Missing impairment is expensive.</a:t>
+            </a:r>
+          </a:p>
+        </p:txBody>
+      </p:sp>
+      <p:sp>
+        <p:nvSpPr>
+          <p:cNvPr id="11" name="Rounded Rectangle 10"/>
+          <p:cNvSpPr/>
+          <p:nvPr/>
+        </p:nvSpPr>
+        <p:spPr>
+          <a:xfrm>
+            <a:off x="548640" y="3081528"/>
+            <a:ext cx="6446520" cy="758952"/>
+          </a:xfrm>
+          <a:prstGeom prst="roundRect">
+            <a:avLst>
+              <a:gd name="adj" fmla="val 6000"/>
+            </a:avLst>
+          </a:prstGeom>
+          <a:solidFill>
+            <a:srgbClr val="F2F4F4"/>
+          </a:solidFill>
+          <a:ln>
+            <a:noFill/>
+          </a:ln>
+          <a:effectLst/>
+        </p:spPr>
+        <p:style>
+          <a:lnRef idx="1">
+            <a:schemeClr val="accent1"/>
+          </a:lnRef>
+          <a:fillRef idx="3">
+            <a:schemeClr val="accent1"/>
+          </a:fillRef>
+          <a:effectRef idx="2">
+            <a:schemeClr val="accent1"/>
+          </a:effectRef>
+          <a:fontRef idx="minor">
+            <a:schemeClr val="lt1"/>
+          </a:fontRef>
+        </p:style>
+        <p:txBody>
+          <a:bodyPr rtlCol="0" anchor="ctr"/>
+          <a:lstStyle/>
+          <a:p>
+            <a:pPr algn="ctr"/>
+          </a:p>
+        </p:txBody>
+      </p:sp>
+      <p:sp>
+        <p:nvSpPr>
+          <p:cNvPr id="12" name="Rounded Rectangle 11"/>
+          <p:cNvSpPr/>
+          <p:nvPr/>
+        </p:nvSpPr>
+        <p:spPr>
+          <a:xfrm>
+            <a:off x="685800" y="3227832"/>
+            <a:ext cx="457200" cy="457200"/>
+          </a:xfrm>
+          <a:prstGeom prst="roundRect">
+            <a:avLst>
+              <a:gd name="adj" fmla="val 25000"/>
+            </a:avLst>
+          </a:prstGeom>
+          <a:solidFill>
+            <a:srgbClr val="C8102E"/>
+          </a:solidFill>
+          <a:ln>
+            <a:noFill/>
+          </a:ln>
+          <a:effectLst/>
+        </p:spPr>
+        <p:style>
+          <a:lnRef idx="1">
+            <a:schemeClr val="accent1"/>
+          </a:lnRef>
+          <a:fillRef idx="3">
+            <a:schemeClr val="accent1"/>
+          </a:fillRef>
+          <a:effectRef idx="2">
+            <a:schemeClr val="accent1"/>
+          </a:effectRef>
+          <a:fontRef idx="minor">
+            <a:schemeClr val="lt1"/>
+          </a:fontRef>
+        </p:style>
+        <p:txBody>
+          <a:bodyPr rtlCol="0" anchor="ctr"/>
+          <a:lstStyle/>
+          <a:p>
+            <a:pPr algn="ctr"/>
+            <a:r>
+              <a:rPr b="1" sz="1500">
+                <a:solidFill>
+                  <a:srgbClr val="FFFFFF"/>
+                </a:solidFill>
+                <a:latin typeface="Arial"/>
+              </a:rPr>
+              <a:t>3</a:t>
+            </a:r>
+          </a:p>
+        </p:txBody>
+      </p:sp>
+      <p:sp>
+        <p:nvSpPr>
+          <p:cNvPr id="13" name="TextBox 12"/>
+          <p:cNvSpPr txBox="1"/>
+          <p:nvPr/>
+        </p:nvSpPr>
+        <p:spPr>
+          <a:xfrm>
+            <a:off x="1325880" y="3081528"/>
+            <a:ext cx="5532120" cy="758952"/>
+          </a:xfrm>
+          <a:prstGeom prst="rect">
+            <a:avLst/>
+          </a:prstGeom>
+          <a:noFill/>
+        </p:spPr>
+        <p:txBody>
+          <a:bodyPr wrap="square" anchor="ctr" lIns="45720" rIns="45720" tIns="18288" bIns="18288">
+            <a:spAutoFit/>
+          </a:bodyPr>
+          <a:lstStyle/>
+          <a:p>
+            <a:pPr algn="l">
+              <a:spcBef>
+                <a:spcPts val="0"/>
+              </a:spcBef>
+              <a:spcAft>
+                <a:spcPts val="100"/>
+              </a:spcAft>
+              <a:buNone/>
+            </a:pPr>
+            <a:r>
+              <a:rPr sz="1300" b="1" i="0">
+                <a:solidFill>
+                  <a:srgbClr val="2A2E30"/>
+                </a:solidFill>
+                <a:latin typeface="Arial"/>
+              </a:rPr>
+              <a:t>Don't lean on age</a:t>
+            </a:r>
+          </a:p>
+          <a:p>
+            <a:pPr algn="l">
+              <a:spcBef>
+                <a:spcPts val="0"/>
+              </a:spcBef>
+              <a:spcAft>
+                <a:spcPts val="0"/>
+              </a:spcAft>
+              <a:buNone/>
+            </a:pPr>
+            <a:r>
+              <a:rPr sz="1050" b="0" i="0">
+                <a:solidFill>
+                  <a:srgbClr val="505759"/>
+                </a:solidFill>
+                <a:latin typeface="Arial"/>
+              </a:rPr>
+              <a:t>The age-aware AUROCs strip the age shortcut. Features must carry real signal within an age band.</a:t>
+            </a:r>
+          </a:p>
+        </p:txBody>
+      </p:sp>
+      <p:sp>
+        <p:nvSpPr>
+          <p:cNvPr id="14" name="Rounded Rectangle 13"/>
+          <p:cNvSpPr/>
+          <p:nvPr/>
+        </p:nvSpPr>
+        <p:spPr>
+          <a:xfrm>
+            <a:off x="548640" y="3913632"/>
+            <a:ext cx="6446520" cy="758952"/>
+          </a:xfrm>
+          <a:prstGeom prst="roundRect">
+            <a:avLst>
+              <a:gd name="adj" fmla="val 6000"/>
+            </a:avLst>
+          </a:prstGeom>
+          <a:solidFill>
+            <a:srgbClr val="F2F4F4"/>
+          </a:solidFill>
+          <a:ln>
+            <a:noFill/>
+          </a:ln>
+          <a:effectLst/>
+        </p:spPr>
+        <p:style>
+          <a:lnRef idx="1">
+            <a:schemeClr val="accent1"/>
+          </a:lnRef>
+          <a:fillRef idx="3">
+            <a:schemeClr val="accent1"/>
+          </a:fillRef>
+          <a:effectRef idx="2">
+            <a:schemeClr val="accent1"/>
+          </a:effectRef>
+          <a:fontRef idx="minor">
+            <a:schemeClr val="lt1"/>
+          </a:fontRef>
+        </p:style>
+        <p:txBody>
+          <a:bodyPr rtlCol="0" anchor="ctr"/>
+          <a:lstStyle/>
+          <a:p>
+            <a:pPr algn="ctr"/>
+          </a:p>
+        </p:txBody>
+      </p:sp>
+      <p:sp>
+        <p:nvSpPr>
+          <p:cNvPr id="15" name="Rounded Rectangle 14"/>
+          <p:cNvSpPr/>
+          <p:nvPr/>
+        </p:nvSpPr>
+        <p:spPr>
+          <a:xfrm>
+            <a:off x="685800" y="4059936"/>
+            <a:ext cx="457200" cy="457200"/>
+          </a:xfrm>
+          <a:prstGeom prst="roundRect">
+            <a:avLst>
+              <a:gd name="adj" fmla="val 25000"/>
+            </a:avLst>
+          </a:prstGeom>
+          <a:solidFill>
+            <a:srgbClr val="C8102E"/>
+          </a:solidFill>
+          <a:ln>
+            <a:noFill/>
+          </a:ln>
+          <a:effectLst/>
+        </p:spPr>
+        <p:style>
+          <a:lnRef idx="1">
+            <a:schemeClr val="accent1"/>
+          </a:lnRef>
+          <a:fillRef idx="3">
+            <a:schemeClr val="accent1"/>
+          </a:fillRef>
+          <a:effectRef idx="2">
+            <a:schemeClr val="accent1"/>
+          </a:effectRef>
+          <a:fontRef idx="minor">
+            <a:schemeClr val="lt1"/>
+          </a:fontRef>
+        </p:style>
+        <p:txBody>
+          <a:bodyPr rtlCol="0" anchor="ctr"/>
+          <a:lstStyle/>
+          <a:p>
+            <a:pPr algn="ctr"/>
+            <a:r>
+              <a:rPr b="1" sz="1500">
+                <a:solidFill>
+                  <a:srgbClr val="FFFFFF"/>
+                </a:solidFill>
+                <a:latin typeface="Arial"/>
+              </a:rPr>
+              <a:t>4</a:t>
+            </a:r>
+          </a:p>
+        </p:txBody>
+      </p:sp>
+      <p:sp>
+        <p:nvSpPr>
+          <p:cNvPr id="16" name="TextBox 15"/>
+          <p:cNvSpPr txBox="1"/>
+          <p:nvPr/>
+        </p:nvSpPr>
+        <p:spPr>
+          <a:xfrm>
+            <a:off x="1325880" y="3913632"/>
+            <a:ext cx="5532120" cy="758952"/>
+          </a:xfrm>
+          <a:prstGeom prst="rect">
+            <a:avLst/>
+          </a:prstGeom>
+          <a:noFill/>
+        </p:spPr>
+        <p:txBody>
+          <a:bodyPr wrap="square" anchor="ctr" lIns="45720" rIns="45720" tIns="18288" bIns="18288">
+            <a:spAutoFit/>
+          </a:bodyPr>
+          <a:lstStyle/>
+          <a:p>
+            <a:pPr algn="l">
+              <a:spcBef>
+                <a:spcPts val="0"/>
+              </a:spcBef>
+              <a:spcAft>
+                <a:spcPts val="100"/>
+              </a:spcAft>
+              <a:buNone/>
+            </a:pPr>
+            <a:r>
+              <a:rPr sz="1300" b="1" i="0">
+                <a:solidFill>
+                  <a:srgbClr val="2A2E30"/>
+                </a:solidFill>
+                <a:latin typeface="Arial"/>
+              </a:rPr>
+              <a:t>Validate with the official code</a:t>
+            </a:r>
+          </a:p>
+          <a:p>
+            <a:pPr algn="l">
+              <a:spcBef>
+                <a:spcPts val="0"/>
+              </a:spcBef>
+              <a:spcAft>
+                <a:spcPts val="0"/>
+              </a:spcAft>
+              <a:buNone/>
+            </a:pPr>
+            <a:r>
+              <a:rPr sz="1050" b="0" i="0">
+                <a:solidFill>
+                  <a:srgbClr val="505759"/>
+                </a:solidFill>
+                <a:latin typeface="Arial"/>
+              </a:rPr>
+              <a:t>Score cross-validation folds with evaluate_model.py so our internal numbers match the leaderboard.</a:t>
+            </a:r>
+          </a:p>
+        </p:txBody>
+      </p:sp>
+      <p:sp>
+        <p:nvSpPr>
+          <p:cNvPr id="17" name="TextBox 16"/>
+          <p:cNvSpPr txBox="1"/>
+          <p:nvPr/>
+        </p:nvSpPr>
+        <p:spPr>
+          <a:xfrm>
+            <a:off x="548640" y="4828032"/>
+            <a:ext cx="6035040" cy="228600"/>
+          </a:xfrm>
+          <a:prstGeom prst="rect">
+            <a:avLst/>
+          </a:prstGeom>
+          <a:noFill/>
+        </p:spPr>
+        <p:txBody>
+          <a:bodyPr wrap="square" anchor="t" lIns="45720" rIns="45720" tIns="18288" bIns="18288">
+            <a:spAutoFit/>
+          </a:bodyPr>
+          <a:lstStyle/>
+          <a:p>
+            <a:pPr algn="l">
+              <a:spcBef>
+                <a:spcPts val="0"/>
+              </a:spcBef>
+              <a:spcAft>
+                <a:spcPts val="0"/>
+              </a:spcAft>
+              <a:buNone/>
+            </a:pPr>
+            <a:r>
+              <a:rPr sz="800" b="0" i="0">
+                <a:solidFill>
+                  <a:srgbClr val="898D8D"/>
+                </a:solidFill>
+                <a:latin typeface="Arial"/>
+              </a:rPr>
+              <a:t>PhysioNet Challenge 2026  ·  Scoring Metrics</a:t>
             </a:r>
           </a:p>
         </p:txBody>
@@ -28116,7 +28643,10 @@
           <a:lstStyle/>
           <a:p>
             <a:r>
-              <a:t>How impaired sleep breaks down, stage by stage</a:t>
+              <a:rPr b="1">
+                <a:latin typeface="Arial"/>
+              </a:rPr>
+              <a:t>References</a:t>
             </a:r>
           </a:p>
         </p:txBody>
@@ -28155,58 +28685,42 @@
           <a:noFill/>
         </p:spPr>
         <p:txBody>
-          <a:bodyPr wrap="square">
+          <a:bodyPr wrap="square" anchor="t" lIns="45720" rIns="45720" tIns="18288" bIns="18288">
             <a:spAutoFit/>
           </a:bodyPr>
           <a:lstStyle/>
           <a:p>
-            <a:pPr algn="l"/>
-            <a:r>
-              <a:rPr sz="1100" b="1">
+            <a:pPr algn="l">
+              <a:spcBef>
+                <a:spcPts val="0"/>
+              </a:spcBef>
+              <a:spcAft>
+                <a:spcPts val="0"/>
+              </a:spcAft>
+              <a:buNone/>
+            </a:pPr>
+            <a:r>
+              <a:rPr sz="1100" b="1" i="0">
                 <a:solidFill>
                   <a:srgbClr val="C8102E"/>
                 </a:solidFill>
                 <a:latin typeface="Arial"/>
               </a:rPr>
-              <a:t>DATASET · STAGE-TRANSITION DYNAMICS</a:t>
-            </a:r>
-          </a:p>
-        </p:txBody>
-      </p:sp>
-      <p:pic>
-        <p:nvPicPr>
-          <p:cNvPr id="5" name="Picture 4" descr="fig7_transition_matrix.png"/>
-          <p:cNvPicPr>
-            <a:picLocks noChangeAspect="1"/>
-          </p:cNvPicPr>
-          <p:nvPr/>
-        </p:nvPicPr>
-        <p:blipFill>
-          <a:blip r:embed="rId2"/>
-          <a:stretch>
-            <a:fillRect/>
-          </a:stretch>
-        </p:blipFill>
-        <p:spPr>
-          <a:xfrm>
-            <a:off x="1004721" y="1463040"/>
-            <a:ext cx="5488637" cy="2514600"/>
-          </a:xfrm>
-          <a:prstGeom prst="rect">
-            <a:avLst/>
-          </a:prstGeom>
-        </p:spPr>
-      </p:pic>
-      <p:sp>
-        <p:nvSpPr>
-          <p:cNvPr id="6" name="TextBox 5"/>
+              <a:t>SOURCES</a:t>
+            </a:r>
+          </a:p>
+        </p:txBody>
+      </p:sp>
+      <p:sp>
+        <p:nvSpPr>
+          <p:cNvPr id="5" name="TextBox 4"/>
           <p:cNvSpPr txBox="1"/>
           <p:nvPr/>
         </p:nvSpPr>
         <p:spPr>
           <a:xfrm>
-            <a:off x="548640" y="4114800"/>
-            <a:ext cx="6492240" cy="822960"/>
+            <a:off x="548640" y="1417320"/>
+            <a:ext cx="6446520" cy="3108960"/>
           </a:xfrm>
           <a:prstGeom prst="rect">
             <a:avLst/>
@@ -28214,45 +28728,191 @@
           <a:noFill/>
         </p:spPr>
         <p:txBody>
-          <a:bodyPr wrap="square">
+          <a:bodyPr wrap="square" anchor="t" lIns="45720" rIns="45720" tIns="18288" bIns="18288">
             <a:spAutoFit/>
           </a:bodyPr>
           <a:lstStyle/>
           <a:p>
-            <a:pPr algn="l"/>
-            <a:r>
-              <a:rPr sz="1200" b="0">
-                <a:solidFill>
-                  <a:srgbClr val="505759"/>
+            <a:pPr>
+              <a:spcBef>
+                <a:spcPts val="600"/>
+              </a:spcBef>
+              <a:spcAft>
+                <a:spcPts val="100"/>
+              </a:spcAft>
+              <a:buNone/>
+            </a:pPr>
+            <a:r>
+              <a:rPr sz="1300" b="1">
+                <a:solidFill>
+                  <a:srgbClr val="C8102E"/>
                 </a:solidFill>
                 <a:latin typeface="Arial"/>
               </a:rPr>
-              <a:t>Each cell = P(row stage → next epoch's stage). </a:t>
-            </a:r>
-            <a:r>
-              <a:rPr sz="1200" b="1">
-                <a:solidFill>
-                  <a:srgbClr val="C8102E"/>
+              <a:t>Challenge website  —  </a:t>
+            </a:r>
+            <a:r>
+              <a:rPr sz="1300" b="0">
+                <a:solidFill>
+                  <a:srgbClr val="2A2E30"/>
                 </a:solidFill>
                 <a:latin typeface="Arial"/>
               </a:rPr>
-              <a:t>Impaired patients show a destabilized deep sleep</a:t>
-            </a:r>
-            <a:r>
-              <a:rPr sz="1200" b="0">
-                <a:solidFill>
-                  <a:srgbClr val="505759"/>
+              <a:t>George B. Moody PhysioNet Challenge 2026</a:t>
+            </a:r>
+          </a:p>
+          <a:p>
+            <a:pPr algn="l">
+              <a:spcBef>
+                <a:spcPts val="0"/>
+              </a:spcBef>
+              <a:spcAft>
+                <a:spcPts val="600"/>
+              </a:spcAft>
+              <a:buNone/>
+            </a:pPr>
+            <a:r>
+              <a:rPr sz="1100" b="0" i="0">
+                <a:solidFill>
+                  <a:srgbClr val="346583"/>
                 </a:solidFill>
                 <a:latin typeface="Arial"/>
               </a:rPr>
-              <a:t> — N3→N3 drops 5.4 pts while N3→N2 rises 6.0 — and less stable REM (−4.8). The mechanism behind their fragmentation.</a:t>
-            </a:r>
-          </a:p>
-        </p:txBody>
-      </p:sp>
-      <p:sp>
-        <p:nvSpPr>
-          <p:cNvPr id="7" name="TextBox 6"/>
+              <a:t>physionetchallenges.org/2026/</a:t>
+            </a:r>
+          </a:p>
+          <a:p>
+            <a:pPr>
+              <a:spcBef>
+                <a:spcPts val="600"/>
+              </a:spcBef>
+              <a:spcAft>
+                <a:spcPts val="100"/>
+              </a:spcAft>
+              <a:buNone/>
+            </a:pPr>
+            <a:r>
+              <a:rPr sz="1300" b="1">
+                <a:solidFill>
+                  <a:srgbClr val="C8102E"/>
+                </a:solidFill>
+                <a:latin typeface="Arial"/>
+              </a:rPr>
+              <a:t>Evaluation code  —  </a:t>
+            </a:r>
+            <a:r>
+              <a:rPr sz="1300" b="0">
+                <a:solidFill>
+                  <a:srgbClr val="2A2E30"/>
+                </a:solidFill>
+                <a:latin typeface="Arial"/>
+              </a:rPr>
+              <a:t>Official scoring implementation</a:t>
+            </a:r>
+          </a:p>
+          <a:p>
+            <a:pPr algn="l">
+              <a:spcBef>
+                <a:spcPts val="0"/>
+              </a:spcBef>
+              <a:spcAft>
+                <a:spcPts val="600"/>
+              </a:spcAft>
+              <a:buNone/>
+            </a:pPr>
+            <a:r>
+              <a:rPr sz="1100" b="0" i="0">
+                <a:solidFill>
+                  <a:srgbClr val="346583"/>
+                </a:solidFill>
+                <a:latin typeface="Arial"/>
+              </a:rPr>
+              <a:t>github.com/physionetchallenges/evaluation-2026</a:t>
+            </a:r>
+          </a:p>
+          <a:p>
+            <a:pPr>
+              <a:spcBef>
+                <a:spcPts val="600"/>
+              </a:spcBef>
+              <a:spcAft>
+                <a:spcPts val="100"/>
+              </a:spcAft>
+              <a:buNone/>
+            </a:pPr>
+            <a:r>
+              <a:rPr sz="1300" b="1">
+                <a:solidFill>
+                  <a:srgbClr val="C8102E"/>
+                </a:solidFill>
+                <a:latin typeface="Arial"/>
+              </a:rPr>
+              <a:t>Example code  —  </a:t>
+            </a:r>
+            <a:r>
+              <a:rPr sz="1300" b="0">
+                <a:solidFill>
+                  <a:srgbClr val="2A2E30"/>
+                </a:solidFill>
+                <a:latin typeface="Arial"/>
+              </a:rPr>
+              <a:t>Python entry template</a:t>
+            </a:r>
+          </a:p>
+          <a:p>
+            <a:pPr algn="l">
+              <a:spcBef>
+                <a:spcPts val="0"/>
+              </a:spcBef>
+              <a:spcAft>
+                <a:spcPts val="600"/>
+              </a:spcAft>
+              <a:buNone/>
+            </a:pPr>
+            <a:r>
+              <a:rPr sz="1100" b="0" i="0">
+                <a:solidFill>
+                  <a:srgbClr val="346583"/>
+                </a:solidFill>
+                <a:latin typeface="Arial"/>
+              </a:rPr>
+              <a:t>github.com/physionetchallenges/python-example-2026</a:t>
+            </a:r>
+          </a:p>
+          <a:p>
+            <a:pPr>
+              <a:spcBef>
+                <a:spcPts val="600"/>
+              </a:spcBef>
+              <a:spcAft>
+                <a:spcPts val="100"/>
+              </a:spcAft>
+              <a:buNone/>
+            </a:pPr>
+            <a:r>
+              <a:rPr sz="1300" b="1">
+                <a:solidFill>
+                  <a:srgbClr val="C8102E"/>
+                </a:solidFill>
+                <a:latin typeface="Arial"/>
+              </a:rPr>
+              <a:t>This deck  —  </a:t>
+            </a:r>
+            <a:r>
+              <a:rPr sz="1300" b="0">
+                <a:solidFill>
+                  <a:srgbClr val="2A2E30"/>
+                </a:solidFill>
+                <a:latin typeface="Arial"/>
+              </a:rPr>
+              <a:t>Metric definitions taken directly from evaluate_model.py in our repository</a:t>
+            </a:r>
+          </a:p>
+        </p:txBody>
+      </p:sp>
+      <p:sp>
+        <p:nvSpPr>
+          <p:cNvPr id="6" name="TextBox 5"/>
           <p:cNvSpPr txBox="1"/>
           <p:nvPr/>
         </p:nvSpPr>
@@ -28267,14 +28927,22 @@
           <a:noFill/>
         </p:spPr>
         <p:txBody>
-          <a:bodyPr wrap="square">
+          <a:bodyPr wrap="square" anchor="t" lIns="45720" rIns="45720" tIns="18288" bIns="18288">
             <a:spAutoFit/>
           </a:bodyPr>
           <a:lstStyle/>
           <a:p>
-            <a:pPr algn="l"/>
-            <a:r>
-              <a:rPr sz="800" b="0">
+            <a:pPr algn="l">
+              <a:spcBef>
+                <a:spcPts val="0"/>
+              </a:spcBef>
+              <a:spcAft>
+                <a:spcPts val="0"/>
+              </a:spcAft>
+              <a:buNone/>
+            </a:pPr>
+            <a:r>
+              <a:rPr sz="800" b="0" i="0">
                 <a:solidFill>
                   <a:srgbClr val="898D8D"/>
                 </a:solidFill>
@@ -28319,7 +28987,174 @@
           <a:lstStyle/>
           <a:p>
             <a:r>
-              <a:t>Which features actually separate the groups?</a:t>
+              <a:rPr b="1">
+                <a:solidFill>
+                  <a:srgbClr val="FFFFFF"/>
+                </a:solidFill>
+                <a:latin typeface="Arial"/>
+              </a:rPr>
+              <a:t>Questions?</a:t>
+            </a:r>
+          </a:p>
+        </p:txBody>
+      </p:sp>
+      <p:sp>
+        <p:nvSpPr>
+          <p:cNvPr id="3" name="TextBox 2"/>
+          <p:cNvSpPr txBox="1"/>
+          <p:nvPr/>
+        </p:nvSpPr>
+        <p:spPr>
+          <a:xfrm>
+            <a:off x="548640" y="1417320"/>
+            <a:ext cx="7863840" cy="1280160"/>
+          </a:xfrm>
+          <a:prstGeom prst="rect">
+            <a:avLst/>
+          </a:prstGeom>
+          <a:noFill/>
+        </p:spPr>
+        <p:txBody>
+          <a:bodyPr wrap="square" anchor="t" lIns="45720" rIns="45720" tIns="18288" bIns="18288">
+            <a:spAutoFit/>
+          </a:bodyPr>
+          <a:lstStyle/>
+          <a:p>
+            <a:pPr algn="l">
+              <a:spcBef>
+                <a:spcPts val="0"/>
+              </a:spcBef>
+              <a:spcAft>
+                <a:spcPts val="400"/>
+              </a:spcAft>
+              <a:buNone/>
+            </a:pPr>
+            <a:r>
+              <a:rPr sz="1200" b="1" i="0">
+                <a:solidFill>
+                  <a:srgbClr val="CEB888"/>
+                </a:solidFill>
+                <a:latin typeface="Arial"/>
+              </a:rPr>
+              <a:t>Key takeaway</a:t>
+            </a:r>
+          </a:p>
+          <a:p>
+            <a:pPr algn="l">
+              <a:spcBef>
+                <a:spcPts val="0"/>
+              </a:spcBef>
+              <a:spcAft>
+                <a:spcPts val="600"/>
+              </a:spcAft>
+              <a:buNone/>
+            </a:pPr>
+            <a:r>
+              <a:rPr sz="1700" b="1" i="0">
+                <a:solidFill>
+                  <a:srgbClr val="FFFFFF"/>
+                </a:solidFill>
+                <a:latin typeface="Arial"/>
+              </a:rPr>
+              <a:t>Optimize for the Reward — catch the rare cases, and don't lean on age.</a:t>
+            </a:r>
+          </a:p>
+          <a:p>
+            <a:pPr algn="l">
+              <a:spcBef>
+                <a:spcPts val="0"/>
+              </a:spcBef>
+              <a:spcAft>
+                <a:spcPts val="0"/>
+              </a:spcAft>
+              <a:buNone/>
+            </a:pPr>
+            <a:r>
+              <a:rPr sz="1100" b="0" i="0">
+                <a:solidFill>
+                  <a:srgbClr val="FFFFFF"/>
+                </a:solidFill>
+                <a:latin typeface="Arial"/>
+              </a:rPr>
+              <a:t>Arshia Ilaty  ·  SDG  ·  PhysioNet Challenge 2026</a:t>
+            </a:r>
+          </a:p>
+        </p:txBody>
+      </p:sp>
+    </p:spTree>
+  </p:cSld>
+  <p:clrMapOvr>
+    <a:masterClrMapping/>
+  </p:clrMapOvr>
+</p:sld>
+</file>
+
+<file path=ppt/slides/slide28.xml><?xml version="1.0" encoding="utf-8"?>
+<p:sld xmlns:a="http://schemas.openxmlformats.org/drawingml/2006/main" xmlns:p="http://schemas.openxmlformats.org/presentationml/2006/main" xmlns:r="http://schemas.openxmlformats.org/officeDocument/2006/relationships">
+  <p:cSld>
+    <p:spTree>
+      <p:nvGrpSpPr>
+        <p:cNvPr id="1" name=""/>
+        <p:cNvGrpSpPr/>
+        <p:nvPr/>
+      </p:nvGrpSpPr>
+      <p:grpSpPr/>
+      <p:sp>
+        <p:nvSpPr>
+          <p:cNvPr id="2" name="Title 1"/>
+          <p:cNvSpPr>
+            <a:spLocks noGrp="1"/>
+          </p:cNvSpPr>
+          <p:nvPr>
+            <p:ph type="title"/>
+          </p:nvPr>
+        </p:nvSpPr>
+        <p:spPr/>
+        <p:txBody>
+          <a:bodyPr/>
+          <a:lstStyle/>
+          <a:p>
+            <a:r>
+              <a:t>Our approach &amp; results</a:t>
+            </a:r>
+          </a:p>
+        </p:txBody>
+      </p:sp>
+    </p:spTree>
+  </p:cSld>
+  <p:clrMapOvr>
+    <a:masterClrMapping/>
+  </p:clrMapOvr>
+</p:sld>
+</file>
+
+<file path=ppt/slides/slide29.xml><?xml version="1.0" encoding="utf-8"?>
+<p:sld xmlns:a="http://schemas.openxmlformats.org/drawingml/2006/main" xmlns:p="http://schemas.openxmlformats.org/presentationml/2006/main" xmlns:r="http://schemas.openxmlformats.org/officeDocument/2006/relationships">
+  <p:cSld>
+    <p:spTree>
+      <p:nvGrpSpPr>
+        <p:cNvPr id="1" name=""/>
+        <p:cNvGrpSpPr/>
+        <p:nvPr/>
+      </p:nvGrpSpPr>
+      <p:grpSpPr/>
+      <p:sp>
+        <p:nvSpPr>
+          <p:cNvPr id="2" name="Title 1"/>
+          <p:cNvSpPr>
+            <a:spLocks noGrp="1"/>
+          </p:cNvSpPr>
+          <p:nvPr>
+            <p:ph type="title"/>
+          </p:nvPr>
+        </p:nvSpPr>
+        <p:spPr/>
+        <p:txBody>
+          <a:bodyPr/>
+          <a:lstStyle/>
+          <a:p>
+            <a:r>
+              <a:t>From raw PSG to a calibrated risk score</a:t>
             </a:r>
           </a:p>
         </p:txBody>
@@ -28371,14 +29206,14 @@
                 </a:solidFill>
                 <a:latin typeface="Arial"/>
               </a:rPr>
-              <a:t>DATASET · FEATURE SIGNIFICANCE (χ² / t-test, FDR-corrected)</a:t>
+              <a:t>APPROACH · END-TO-END PIPELINE</a:t>
             </a:r>
           </a:p>
         </p:txBody>
       </p:sp>
       <p:pic>
         <p:nvPicPr>
-          <p:cNvPr id="5" name="Picture 4" descr="fig8_feature_significance.png"/>
+          <p:cNvPr id="5" name="Picture 4" descr="fig_slide_pipeline.png"/>
           <p:cNvPicPr>
             <a:picLocks noChangeAspect="1"/>
           </p:cNvPicPr>
@@ -28392,8 +29227,8 @@
         </p:blipFill>
         <p:spPr>
           <a:xfrm>
-            <a:off x="457200" y="1481328"/>
-            <a:ext cx="3520440" cy="2260299"/>
+            <a:off x="663819" y="1417320"/>
+            <a:ext cx="6170441" cy="2651760"/>
           </a:xfrm>
           <a:prstGeom prst="rect">
             <a:avLst/>
@@ -28408,8 +29243,8 @@
         </p:nvSpPr>
         <p:spPr>
           <a:xfrm>
-            <a:off x="4160520" y="1572768"/>
-            <a:ext cx="2834640" cy="777240"/>
+            <a:off x="548640" y="4160520"/>
+            <a:ext cx="6492240" cy="777240"/>
           </a:xfrm>
           <a:prstGeom prst="rect">
             <a:avLst/>
@@ -28426,11 +29261,11 @@
             <a:r>
               <a:rPr sz="1200" b="1">
                 <a:solidFill>
-                  <a:srgbClr val="2A2E30"/>
+                  <a:srgbClr val="C8102E"/>
                 </a:solidFill>
                 <a:latin typeface="Arial"/>
               </a:rPr>
-              <a:t>14 of 48 features</a:t>
+              <a:t>Two feature streams fuse leakage-safe</a:t>
             </a:r>
             <a:r>
               <a:rPr sz="1200" b="0">
@@ -28439,42 +29274,16 @@
                 </a:solidFill>
                 <a:latin typeface="Arial"/>
               </a:rPr>
-              <a:t> are significant at FDR q&lt;0.05.</a:t>
-            </a:r>
-          </a:p>
-        </p:txBody>
-      </p:sp>
-      <p:sp>
-        <p:nvSpPr>
-          <p:cNvPr id="7" name="TextBox 6"/>
-          <p:cNvSpPr txBox="1"/>
-          <p:nvPr/>
-        </p:nvSpPr>
-        <p:spPr>
-          <a:xfrm>
-            <a:off x="4160520" y="2194560"/>
-            <a:ext cx="2834640" cy="777240"/>
-          </a:xfrm>
-          <a:prstGeom prst="rect">
-            <a:avLst/>
-          </a:prstGeom>
-          <a:noFill/>
-        </p:spPr>
-        <p:txBody>
-          <a:bodyPr wrap="square">
-            <a:spAutoFit/>
-          </a:bodyPr>
-          <a:lstStyle/>
-          <a:p>
-            <a:pPr algn="l"/>
+              <a:t> (PCA &amp; selection fit in-fold), feed a </a:t>
+            </a:r>
             <a:r>
               <a:rPr sz="1200" b="1">
                 <a:solidFill>
-                  <a:srgbClr val="C8102E"/>
+                  <a:srgbClr val="2A2E30"/>
                 </a:solidFill>
                 <a:latin typeface="Arial"/>
               </a:rPr>
-              <a:t>Age dominates</a:t>
+              <a:t>per-site mixture-of-experts</a:t>
             </a:r>
             <a:r>
               <a:rPr sz="1200" b="0">
@@ -28483,146 +29292,14 @@
                 </a:solidFill>
                 <a:latin typeface="Arial"/>
               </a:rPr>
-              <a:t> (Cohen d = 1.08) — exactly why the metric discounts it.</a:t>
-            </a:r>
-          </a:p>
-        </p:txBody>
-      </p:sp>
-      <p:sp>
-        <p:nvSpPr>
-          <p:cNvPr id="8" name="TextBox 7"/>
-          <p:cNvSpPr txBox="1"/>
-          <p:nvPr/>
-        </p:nvSpPr>
-        <p:spPr>
-          <a:xfrm>
-            <a:off x="4160520" y="2816352"/>
-            <a:ext cx="2834640" cy="777240"/>
-          </a:xfrm>
-          <a:prstGeom prst="rect">
-            <a:avLst/>
-          </a:prstGeom>
-          <a:noFill/>
-        </p:spPr>
-        <p:txBody>
-          <a:bodyPr wrap="square">
-            <a:spAutoFit/>
-          </a:bodyPr>
-          <a:lstStyle/>
-          <a:p>
-            <a:pPr algn="l"/>
-            <a:r>
-              <a:rPr sz="1200" b="0">
-                <a:solidFill>
-                  <a:srgbClr val="505759"/>
-                </a:solidFill>
-                <a:latin typeface="Arial"/>
-              </a:rPr>
-              <a:t>Then: </a:t>
-            </a:r>
-            <a:r>
-              <a:rPr sz="1200" b="1">
-                <a:solidFill>
-                  <a:srgbClr val="2A2E30"/>
-                </a:solidFill>
-                <a:latin typeface="Arial"/>
-              </a:rPr>
-              <a:t>limb movements, ↓REM, ↑WASO/Wake, ↓efficiency &amp; entropy, fewer REM periods, ↓N3.</a:t>
-            </a:r>
-          </a:p>
-        </p:txBody>
-      </p:sp>
-      <p:sp>
-        <p:nvSpPr>
-          <p:cNvPr id="9" name="TextBox 8"/>
-          <p:cNvSpPr txBox="1"/>
-          <p:nvPr/>
-        </p:nvSpPr>
-        <p:spPr>
-          <a:xfrm>
-            <a:off x="4160520" y="3438144"/>
-            <a:ext cx="2834640" cy="777240"/>
-          </a:xfrm>
-          <a:prstGeom prst="rect">
-            <a:avLst/>
-          </a:prstGeom>
-          <a:noFill/>
-        </p:spPr>
-        <p:txBody>
-          <a:bodyPr wrap="square">
-            <a:spAutoFit/>
-          </a:bodyPr>
-          <a:lstStyle/>
-          <a:p>
-            <a:pPr algn="l"/>
-            <a:r>
-              <a:rPr sz="1200" b="1">
-                <a:solidFill>
-                  <a:srgbClr val="C8102E"/>
-                </a:solidFill>
-                <a:latin typeface="Arial"/>
-              </a:rPr>
-              <a:t>AHI is NOT significant</a:t>
-            </a:r>
-            <a:r>
-              <a:rPr sz="1200" b="0">
-                <a:solidFill>
-                  <a:srgbClr val="505759"/>
-                </a:solidFill>
-                <a:latin typeface="Arial"/>
-              </a:rPr>
-              <a:t> (d=0.19) — signal is in sleep architecture &amp; continuity, not apnea load.</a:t>
-            </a:r>
-          </a:p>
-        </p:txBody>
-      </p:sp>
-      <p:sp>
-        <p:nvSpPr>
-          <p:cNvPr id="10" name="TextBox 9"/>
-          <p:cNvSpPr txBox="1"/>
-          <p:nvPr/>
-        </p:nvSpPr>
-        <p:spPr>
-          <a:xfrm>
-            <a:off x="4160520" y="4059936"/>
-            <a:ext cx="2834640" cy="777240"/>
-          </a:xfrm>
-          <a:prstGeom prst="rect">
-            <a:avLst/>
-          </a:prstGeom>
-          <a:noFill/>
-        </p:spPr>
-        <p:txBody>
-          <a:bodyPr wrap="square">
-            <a:spAutoFit/>
-          </a:bodyPr>
-          <a:lstStyle/>
-          <a:p>
-            <a:pPr algn="l"/>
-            <a:r>
-              <a:rPr sz="1200" b="0">
-                <a:solidFill>
-                  <a:srgbClr val="505759"/>
-                </a:solidFill>
-                <a:latin typeface="Arial"/>
-              </a:rPr>
-              <a:t>Method: </a:t>
-            </a:r>
-            <a:r>
-              <a:rPr sz="1150" b="0">
-                <a:solidFill>
-                  <a:srgbClr val="505759"/>
-                </a:solidFill>
-                <a:latin typeface="Arial"/>
-              </a:rPr>
-              <a:t>Welch t (numeric) + χ² (categorical), Benjamini–Hochberg FDR.</a:t>
-            </a:r>
-          </a:p>
-        </p:txBody>
-      </p:sp>
-      <p:sp>
-        <p:nvSpPr>
-          <p:cNvPr id="11" name="TextBox 10"/>
+              <a:t> with a Kaiser fine-tune, and a Reward-optimal threshold; validated leave-one-site-out.</a:t>
+            </a:r>
+          </a:p>
+        </p:txBody>
+      </p:sp>
+      <p:sp>
+        <p:nvSpPr>
+          <p:cNvPr id="7" name="TextBox 6"/>
           <p:cNvSpPr txBox="1"/>
           <p:nvPr/>
         </p:nvSpPr>
@@ -28696,6 +29373,1395 @@
                 <a:latin typeface="Arial"/>
               </a:rPr>
               <a:t>The prediction task</a:t>
+            </a:r>
+          </a:p>
+        </p:txBody>
+      </p:sp>
+    </p:spTree>
+  </p:cSld>
+  <p:clrMapOvr>
+    <a:masterClrMapping/>
+  </p:clrMapOvr>
+</p:sld>
+</file>
+
+<file path=ppt/slides/slide30.xml><?xml version="1.0" encoding="utf-8"?>
+<p:sld xmlns:a="http://schemas.openxmlformats.org/drawingml/2006/main" xmlns:p="http://schemas.openxmlformats.org/presentationml/2006/main" xmlns:r="http://schemas.openxmlformats.org/officeDocument/2006/relationships">
+  <p:cSld>
+    <p:spTree>
+      <p:nvGrpSpPr>
+        <p:cNvPr id="1" name=""/>
+        <p:cNvGrpSpPr/>
+        <p:nvPr/>
+      </p:nvGrpSpPr>
+      <p:grpSpPr/>
+      <p:sp>
+        <p:nvSpPr>
+          <p:cNvPr id="2" name="Title 1"/>
+          <p:cNvSpPr>
+            <a:spLocks noGrp="1"/>
+          </p:cNvSpPr>
+          <p:nvPr>
+            <p:ph type="title"/>
+          </p:nvPr>
+        </p:nvSpPr>
+        <p:spPr/>
+        <p:txBody>
+          <a:bodyPr/>
+          <a:lstStyle/>
+          <a:p>
+            <a:r>
+              <a:t>337 engineered features across three families</a:t>
+            </a:r>
+          </a:p>
+        </p:txBody>
+      </p:sp>
+      <p:sp>
+        <p:nvSpPr>
+          <p:cNvPr id="3" name="Content Placeholder 2"/>
+          <p:cNvSpPr>
+            <a:spLocks noGrp="1"/>
+          </p:cNvSpPr>
+          <p:nvPr>
+            <p:ph idx="1"/>
+          </p:nvPr>
+        </p:nvSpPr>
+        <p:spPr/>
+        <p:txBody>
+          <a:bodyPr/>
+          <a:lstStyle/>
+          <a:p/>
+        </p:txBody>
+      </p:sp>
+      <p:sp>
+        <p:nvSpPr>
+          <p:cNvPr id="4" name="TextBox 3"/>
+          <p:cNvSpPr txBox="1"/>
+          <p:nvPr/>
+        </p:nvSpPr>
+        <p:spPr>
+          <a:xfrm>
+            <a:off x="548640" y="1024128"/>
+            <a:ext cx="6446520" cy="274320"/>
+          </a:xfrm>
+          <a:prstGeom prst="rect">
+            <a:avLst/>
+          </a:prstGeom>
+          <a:noFill/>
+        </p:spPr>
+        <p:txBody>
+          <a:bodyPr wrap="square">
+            <a:spAutoFit/>
+          </a:bodyPr>
+          <a:lstStyle/>
+          <a:p>
+            <a:pPr algn="l"/>
+            <a:r>
+              <a:rPr sz="1100" b="1">
+                <a:solidFill>
+                  <a:srgbClr val="C8102E"/>
+                </a:solidFill>
+                <a:latin typeface="Arial"/>
+              </a:rPr>
+              <a:t>APPROACH · FEATURE ENGINEERING</a:t>
+            </a:r>
+          </a:p>
+        </p:txBody>
+      </p:sp>
+      <p:pic>
+        <p:nvPicPr>
+          <p:cNvPr id="5" name="Picture 4" descr="fig_slide_features.png"/>
+          <p:cNvPicPr>
+            <a:picLocks noChangeAspect="1"/>
+          </p:cNvPicPr>
+          <p:nvPr/>
+        </p:nvPicPr>
+        <p:blipFill>
+          <a:blip r:embed="rId2"/>
+          <a:stretch>
+            <a:fillRect/>
+          </a:stretch>
+        </p:blipFill>
+        <p:spPr>
+          <a:xfrm>
+            <a:off x="1442347" y="1600200"/>
+            <a:ext cx="4613385" cy="2331720"/>
+          </a:xfrm>
+          <a:prstGeom prst="rect">
+            <a:avLst/>
+          </a:prstGeom>
+        </p:spPr>
+      </p:pic>
+      <p:sp>
+        <p:nvSpPr>
+          <p:cNvPr id="6" name="TextBox 5"/>
+          <p:cNvSpPr txBox="1"/>
+          <p:nvPr/>
+        </p:nvSpPr>
+        <p:spPr>
+          <a:xfrm>
+            <a:off x="548640" y="4023360"/>
+            <a:ext cx="6492240" cy="868680"/>
+          </a:xfrm>
+          <a:prstGeom prst="rect">
+            <a:avLst/>
+          </a:prstGeom>
+          <a:noFill/>
+        </p:spPr>
+        <p:txBody>
+          <a:bodyPr wrap="square">
+            <a:spAutoFit/>
+          </a:bodyPr>
+          <a:lstStyle/>
+          <a:p>
+            <a:pPr algn="l"/>
+            <a:r>
+              <a:rPr sz="1200" b="1">
+                <a:solidFill>
+                  <a:srgbClr val="C8102E"/>
+                </a:solidFill>
+                <a:latin typeface="Arial"/>
+              </a:rPr>
+              <a:t>Stage-resolved by design</a:t>
+            </a:r>
+            <a:r>
+              <a:rPr sz="1200" b="0">
+                <a:solidFill>
+                  <a:srgbClr val="505759"/>
+                </a:solidFill>
+                <a:latin typeface="Arial"/>
+              </a:rPr>
+              <a:t> — cognitive impairment shows as blunted modulation across sleep stages, so features are computed per stage and the flagship ones are cross-stage contrasts. </a:t>
+            </a:r>
+            <a:r>
+              <a:rPr sz="1200" b="1">
+                <a:solidFill>
+                  <a:srgbClr val="2A2E30"/>
+                </a:solidFill>
+                <a:latin typeface="Arial"/>
+              </a:rPr>
+              <a:t>Age is excluded from training.</a:t>
+            </a:r>
+          </a:p>
+        </p:txBody>
+      </p:sp>
+      <p:sp>
+        <p:nvSpPr>
+          <p:cNvPr id="7" name="TextBox 6"/>
+          <p:cNvSpPr txBox="1"/>
+          <p:nvPr/>
+        </p:nvSpPr>
+        <p:spPr>
+          <a:xfrm>
+            <a:off x="548640" y="4828032"/>
+            <a:ext cx="6035040" cy="228600"/>
+          </a:xfrm>
+          <a:prstGeom prst="rect">
+            <a:avLst/>
+          </a:prstGeom>
+          <a:noFill/>
+        </p:spPr>
+        <p:txBody>
+          <a:bodyPr wrap="square">
+            <a:spAutoFit/>
+          </a:bodyPr>
+          <a:lstStyle/>
+          <a:p>
+            <a:pPr algn="l"/>
+            <a:r>
+              <a:rPr sz="800" b="0">
+                <a:solidFill>
+                  <a:srgbClr val="898D8D"/>
+                </a:solidFill>
+                <a:latin typeface="Arial"/>
+              </a:rPr>
+              <a:t>PhysioNet Challenge 2026  ·  Scoring Metrics</a:t>
+            </a:r>
+          </a:p>
+        </p:txBody>
+      </p:sp>
+    </p:spTree>
+  </p:cSld>
+  <p:clrMapOvr>
+    <a:masterClrMapping/>
+  </p:clrMapOvr>
+</p:sld>
+</file>
+
+<file path=ppt/slides/slide31.xml><?xml version="1.0" encoding="utf-8"?>
+<p:sld xmlns:a="http://schemas.openxmlformats.org/drawingml/2006/main" xmlns:p="http://schemas.openxmlformats.org/presentationml/2006/main" xmlns:r="http://schemas.openxmlformats.org/officeDocument/2006/relationships">
+  <p:cSld>
+    <p:spTree>
+      <p:nvGrpSpPr>
+        <p:cNvPr id="1" name=""/>
+        <p:cNvGrpSpPr/>
+        <p:nvPr/>
+      </p:nvGrpSpPr>
+      <p:grpSpPr/>
+      <p:sp>
+        <p:nvSpPr>
+          <p:cNvPr id="2" name="Title 1"/>
+          <p:cNvSpPr>
+            <a:spLocks noGrp="1"/>
+          </p:cNvSpPr>
+          <p:nvPr>
+            <p:ph type="title"/>
+          </p:nvPr>
+        </p:nvSpPr>
+        <p:spPr/>
+        <p:txBody>
+          <a:bodyPr/>
+          <a:lstStyle/>
+          <a:p>
+            <a:r>
+              <a:t>A model built for site shift and class imbalance</a:t>
+            </a:r>
+          </a:p>
+        </p:txBody>
+      </p:sp>
+      <p:sp>
+        <p:nvSpPr>
+          <p:cNvPr id="3" name="Content Placeholder 2"/>
+          <p:cNvSpPr>
+            <a:spLocks noGrp="1"/>
+          </p:cNvSpPr>
+          <p:nvPr>
+            <p:ph idx="1"/>
+          </p:nvPr>
+        </p:nvSpPr>
+        <p:spPr/>
+        <p:txBody>
+          <a:bodyPr/>
+          <a:lstStyle/>
+          <a:p/>
+        </p:txBody>
+      </p:sp>
+      <p:sp>
+        <p:nvSpPr>
+          <p:cNvPr id="4" name="TextBox 3"/>
+          <p:cNvSpPr txBox="1"/>
+          <p:nvPr/>
+        </p:nvSpPr>
+        <p:spPr>
+          <a:xfrm>
+            <a:off x="548640" y="1024128"/>
+            <a:ext cx="6446520" cy="274320"/>
+          </a:xfrm>
+          <a:prstGeom prst="rect">
+            <a:avLst/>
+          </a:prstGeom>
+          <a:noFill/>
+        </p:spPr>
+        <p:txBody>
+          <a:bodyPr wrap="square">
+            <a:spAutoFit/>
+          </a:bodyPr>
+          <a:lstStyle/>
+          <a:p>
+            <a:pPr algn="l"/>
+            <a:r>
+              <a:rPr sz="1100" b="1">
+                <a:solidFill>
+                  <a:srgbClr val="C8102E"/>
+                </a:solidFill>
+                <a:latin typeface="Arial"/>
+              </a:rPr>
+              <a:t>APPROACH · THE MODEL</a:t>
+            </a:r>
+          </a:p>
+        </p:txBody>
+      </p:sp>
+      <p:sp>
+        <p:nvSpPr>
+          <p:cNvPr id="5" name="Rounded Rectangle 4"/>
+          <p:cNvSpPr/>
+          <p:nvPr/>
+        </p:nvSpPr>
+        <p:spPr>
+          <a:xfrm>
+            <a:off x="548640" y="1508760"/>
+            <a:ext cx="3154680" cy="1463040"/>
+          </a:xfrm>
+          <a:prstGeom prst="roundRect">
+            <a:avLst>
+              <a:gd name="adj" fmla="val 6000"/>
+            </a:avLst>
+          </a:prstGeom>
+          <a:solidFill>
+            <a:srgbClr val="F2F4F4"/>
+          </a:solidFill>
+          <a:ln>
+            <a:noFill/>
+          </a:ln>
+          <a:effectLst/>
+        </p:spPr>
+        <p:style>
+          <a:lnRef idx="1">
+            <a:schemeClr val="accent1"/>
+          </a:lnRef>
+          <a:fillRef idx="3">
+            <a:schemeClr val="accent1"/>
+          </a:fillRef>
+          <a:effectRef idx="2">
+            <a:schemeClr val="accent1"/>
+          </a:effectRef>
+          <a:fontRef idx="minor">
+            <a:schemeClr val="lt1"/>
+          </a:fontRef>
+        </p:style>
+        <p:txBody>
+          <a:bodyPr rtlCol="0" anchor="ctr"/>
+          <a:lstStyle/>
+          <a:p>
+            <a:pPr algn="ctr"/>
+          </a:p>
+        </p:txBody>
+      </p:sp>
+      <p:sp>
+        <p:nvSpPr>
+          <p:cNvPr id="6" name="TextBox 5"/>
+          <p:cNvSpPr txBox="1"/>
+          <p:nvPr/>
+        </p:nvSpPr>
+        <p:spPr>
+          <a:xfrm>
+            <a:off x="713232" y="1618488"/>
+            <a:ext cx="2825496" cy="1243584"/>
+          </a:xfrm>
+          <a:prstGeom prst="rect">
+            <a:avLst/>
+          </a:prstGeom>
+          <a:noFill/>
+        </p:spPr>
+        <p:txBody>
+          <a:bodyPr wrap="square">
+            <a:spAutoFit/>
+          </a:bodyPr>
+          <a:lstStyle/>
+          <a:p>
+            <a:pPr algn="l"/>
+            <a:r>
+              <a:rPr sz="1300" b="1">
+                <a:solidFill>
+                  <a:srgbClr val="346583"/>
+                </a:solidFill>
+                <a:latin typeface="Arial"/>
+              </a:rPr>
+              <a:t>Site mixture-of-experts</a:t>
+            </a:r>
+          </a:p>
+          <a:p>
+            <a:pPr algn="l"/>
+            <a:r>
+              <a:rPr sz="1050" b="0">
+                <a:solidFill>
+                  <a:srgbClr val="505759"/>
+                </a:solidFill>
+                <a:latin typeface="Arial"/>
+              </a:rPr>
+              <a:t>A HistGradientBoosting classifier per site (BIDMC · Kaiser · Emory) with a global fallback — so each hospital's montage &amp; population is modeled on its own terms.</a:t>
+            </a:r>
+          </a:p>
+        </p:txBody>
+      </p:sp>
+      <p:sp>
+        <p:nvSpPr>
+          <p:cNvPr id="7" name="Rounded Rectangle 6"/>
+          <p:cNvSpPr/>
+          <p:nvPr/>
+        </p:nvSpPr>
+        <p:spPr>
+          <a:xfrm>
+            <a:off x="3886200" y="1508760"/>
+            <a:ext cx="3154680" cy="1463040"/>
+          </a:xfrm>
+          <a:prstGeom prst="roundRect">
+            <a:avLst>
+              <a:gd name="adj" fmla="val 6000"/>
+            </a:avLst>
+          </a:prstGeom>
+          <a:solidFill>
+            <a:srgbClr val="F2F4F4"/>
+          </a:solidFill>
+          <a:ln>
+            <a:noFill/>
+          </a:ln>
+          <a:effectLst/>
+        </p:spPr>
+        <p:style>
+          <a:lnRef idx="1">
+            <a:schemeClr val="accent1"/>
+          </a:lnRef>
+          <a:fillRef idx="3">
+            <a:schemeClr val="accent1"/>
+          </a:fillRef>
+          <a:effectRef idx="2">
+            <a:schemeClr val="accent1"/>
+          </a:effectRef>
+          <a:fontRef idx="minor">
+            <a:schemeClr val="lt1"/>
+          </a:fontRef>
+        </p:style>
+        <p:txBody>
+          <a:bodyPr rtlCol="0" anchor="ctr"/>
+          <a:lstStyle/>
+          <a:p>
+            <a:pPr algn="ctr"/>
+          </a:p>
+        </p:txBody>
+      </p:sp>
+      <p:sp>
+        <p:nvSpPr>
+          <p:cNvPr id="8" name="TextBox 7"/>
+          <p:cNvSpPr txBox="1"/>
+          <p:nvPr/>
+        </p:nvSpPr>
+        <p:spPr>
+          <a:xfrm>
+            <a:off x="4050791" y="1618488"/>
+            <a:ext cx="2825496" cy="1243584"/>
+          </a:xfrm>
+          <a:prstGeom prst="rect">
+            <a:avLst/>
+          </a:prstGeom>
+          <a:noFill/>
+        </p:spPr>
+        <p:txBody>
+          <a:bodyPr wrap="square">
+            <a:spAutoFit/>
+          </a:bodyPr>
+          <a:lstStyle/>
+          <a:p>
+            <a:pPr algn="l"/>
+            <a:r>
+              <a:rPr sz="1300" b="1">
+                <a:solidFill>
+                  <a:srgbClr val="346583"/>
+                </a:solidFill>
+                <a:latin typeface="Arial"/>
+              </a:rPr>
+              <a:t>Kaiser fine-tune</a:t>
+            </a:r>
+          </a:p>
+          <a:p>
+            <a:pPr algn="l"/>
+            <a:r>
+              <a:rPr sz="1050" b="0">
+                <a:solidFill>
+                  <a:srgbClr val="505759"/>
+                </a:solidFill>
+                <a:latin typeface="Arial"/>
+              </a:rPr>
+              <a:t>A dedicated fine-tuned head for the Kaiser site, the hardest to generalize to, layered on top of the shared model.</a:t>
+            </a:r>
+          </a:p>
+        </p:txBody>
+      </p:sp>
+      <p:sp>
+        <p:nvSpPr>
+          <p:cNvPr id="9" name="Rounded Rectangle 8"/>
+          <p:cNvSpPr/>
+          <p:nvPr/>
+        </p:nvSpPr>
+        <p:spPr>
+          <a:xfrm>
+            <a:off x="548640" y="3172968"/>
+            <a:ext cx="3154680" cy="1463040"/>
+          </a:xfrm>
+          <a:prstGeom prst="roundRect">
+            <a:avLst>
+              <a:gd name="adj" fmla="val 6000"/>
+            </a:avLst>
+          </a:prstGeom>
+          <a:solidFill>
+            <a:srgbClr val="F2F4F4"/>
+          </a:solidFill>
+          <a:ln>
+            <a:noFill/>
+          </a:ln>
+          <a:effectLst/>
+        </p:spPr>
+        <p:style>
+          <a:lnRef idx="1">
+            <a:schemeClr val="accent1"/>
+          </a:lnRef>
+          <a:fillRef idx="3">
+            <a:schemeClr val="accent1"/>
+          </a:fillRef>
+          <a:effectRef idx="2">
+            <a:schemeClr val="accent1"/>
+          </a:effectRef>
+          <a:fontRef idx="minor">
+            <a:schemeClr val="lt1"/>
+          </a:fontRef>
+        </p:style>
+        <p:txBody>
+          <a:bodyPr rtlCol="0" anchor="ctr"/>
+          <a:lstStyle/>
+          <a:p>
+            <a:pPr algn="ctr"/>
+          </a:p>
+        </p:txBody>
+      </p:sp>
+      <p:sp>
+        <p:nvSpPr>
+          <p:cNvPr id="10" name="TextBox 9"/>
+          <p:cNvSpPr txBox="1"/>
+          <p:nvPr/>
+        </p:nvSpPr>
+        <p:spPr>
+          <a:xfrm>
+            <a:off x="713232" y="3282696"/>
+            <a:ext cx="2825496" cy="1243584"/>
+          </a:xfrm>
+          <a:prstGeom prst="rect">
+            <a:avLst/>
+          </a:prstGeom>
+          <a:noFill/>
+        </p:spPr>
+        <p:txBody>
+          <a:bodyPr wrap="square">
+            <a:spAutoFit/>
+          </a:bodyPr>
+          <a:lstStyle/>
+          <a:p>
+            <a:pPr algn="l"/>
+            <a:r>
+              <a:rPr sz="1300" b="1">
+                <a:solidFill>
+                  <a:srgbClr val="346583"/>
+                </a:solidFill>
+                <a:latin typeface="Arial"/>
+              </a:rPr>
+              <a:t>BMI imputation</a:t>
+            </a:r>
+          </a:p>
+          <a:p>
+            <a:pPr algn="l"/>
+            <a:r>
+              <a:rPr sz="1050" b="0">
+                <a:solidFill>
+                  <a:srgbClr val="505759"/>
+                </a:solidFill>
+                <a:latin typeface="Arial"/>
+              </a:rPr>
+              <a:t>BMI is missing for 76% of patients, so it is imputed per site rather than dropped — no feature is allowed to silently vanish.</a:t>
+            </a:r>
+          </a:p>
+        </p:txBody>
+      </p:sp>
+      <p:sp>
+        <p:nvSpPr>
+          <p:cNvPr id="11" name="Rounded Rectangle 10"/>
+          <p:cNvSpPr/>
+          <p:nvPr/>
+        </p:nvSpPr>
+        <p:spPr>
+          <a:xfrm>
+            <a:off x="3886200" y="3172968"/>
+            <a:ext cx="3154680" cy="1463040"/>
+          </a:xfrm>
+          <a:prstGeom prst="roundRect">
+            <a:avLst>
+              <a:gd name="adj" fmla="val 6000"/>
+            </a:avLst>
+          </a:prstGeom>
+          <a:solidFill>
+            <a:srgbClr val="F2F4F4"/>
+          </a:solidFill>
+          <a:ln>
+            <a:noFill/>
+          </a:ln>
+          <a:effectLst/>
+        </p:spPr>
+        <p:style>
+          <a:lnRef idx="1">
+            <a:schemeClr val="accent1"/>
+          </a:lnRef>
+          <a:fillRef idx="3">
+            <a:schemeClr val="accent1"/>
+          </a:fillRef>
+          <a:effectRef idx="2">
+            <a:schemeClr val="accent1"/>
+          </a:effectRef>
+          <a:fontRef idx="minor">
+            <a:schemeClr val="lt1"/>
+          </a:fontRef>
+        </p:style>
+        <p:txBody>
+          <a:bodyPr rtlCol="0" anchor="ctr"/>
+          <a:lstStyle/>
+          <a:p>
+            <a:pPr algn="ctr"/>
+          </a:p>
+        </p:txBody>
+      </p:sp>
+      <p:sp>
+        <p:nvSpPr>
+          <p:cNvPr id="12" name="TextBox 11"/>
+          <p:cNvSpPr txBox="1"/>
+          <p:nvPr/>
+        </p:nvSpPr>
+        <p:spPr>
+          <a:xfrm>
+            <a:off x="4050791" y="3282696"/>
+            <a:ext cx="2825496" cy="1243584"/>
+          </a:xfrm>
+          <a:prstGeom prst="rect">
+            <a:avLst/>
+          </a:prstGeom>
+          <a:noFill/>
+        </p:spPr>
+        <p:txBody>
+          <a:bodyPr wrap="square">
+            <a:spAutoFit/>
+          </a:bodyPr>
+          <a:lstStyle/>
+          <a:p>
+            <a:pPr algn="l"/>
+            <a:r>
+              <a:rPr sz="1300" b="1">
+                <a:solidFill>
+                  <a:srgbClr val="346583"/>
+                </a:solidFill>
+                <a:latin typeface="Arial"/>
+              </a:rPr>
+              <a:t>Reward-optimal threshold</a:t>
+            </a:r>
+          </a:p>
+          <a:p>
+            <a:pPr algn="l"/>
+            <a:r>
+              <a:rPr sz="1050" b="0">
+                <a:solidFill>
+                  <a:srgbClr val="505759"/>
+                </a:solidFill>
+                <a:latin typeface="Arial"/>
+              </a:rPr>
+              <a:t>Predict positive when the probability clears the age-specific prevalence — the Bayes-optimal rule for the prevalence-weighted Reward, tuned by site &amp; decade on validation.</a:t>
+            </a:r>
+          </a:p>
+        </p:txBody>
+      </p:sp>
+      <p:sp>
+        <p:nvSpPr>
+          <p:cNvPr id="13" name="TextBox 12"/>
+          <p:cNvSpPr txBox="1"/>
+          <p:nvPr/>
+        </p:nvSpPr>
+        <p:spPr>
+          <a:xfrm>
+            <a:off x="548640" y="4828032"/>
+            <a:ext cx="6035040" cy="228600"/>
+          </a:xfrm>
+          <a:prstGeom prst="rect">
+            <a:avLst/>
+          </a:prstGeom>
+          <a:noFill/>
+        </p:spPr>
+        <p:txBody>
+          <a:bodyPr wrap="square">
+            <a:spAutoFit/>
+          </a:bodyPr>
+          <a:lstStyle/>
+          <a:p>
+            <a:pPr algn="l"/>
+            <a:r>
+              <a:rPr sz="800" b="0">
+                <a:solidFill>
+                  <a:srgbClr val="898D8D"/>
+                </a:solidFill>
+                <a:latin typeface="Arial"/>
+              </a:rPr>
+              <a:t>PhysioNet Challenge 2026  ·  Scoring Metrics</a:t>
+            </a:r>
+          </a:p>
+        </p:txBody>
+      </p:sp>
+    </p:spTree>
+  </p:cSld>
+  <p:clrMapOvr>
+    <a:masterClrMapping/>
+  </p:clrMapOvr>
+</p:sld>
+</file>
+
+<file path=ppt/slides/slide32.xml><?xml version="1.0" encoding="utf-8"?>
+<p:sld xmlns:a="http://schemas.openxmlformats.org/drawingml/2006/main" xmlns:p="http://schemas.openxmlformats.org/presentationml/2006/main" xmlns:r="http://schemas.openxmlformats.org/officeDocument/2006/relationships">
+  <p:cSld>
+    <p:spTree>
+      <p:nvGrpSpPr>
+        <p:cNvPr id="1" name=""/>
+        <p:cNvGrpSpPr/>
+        <p:nvPr/>
+      </p:nvGrpSpPr>
+      <p:grpSpPr/>
+      <p:sp>
+        <p:nvSpPr>
+          <p:cNvPr id="2" name="Title 1"/>
+          <p:cNvSpPr>
+            <a:spLocks noGrp="1"/>
+          </p:cNvSpPr>
+          <p:nvPr>
+            <p:ph type="title"/>
+          </p:nvPr>
+        </p:nvSpPr>
+        <p:spPr/>
+        <p:txBody>
+          <a:bodyPr/>
+          <a:lstStyle/>
+          <a:p>
+            <a:r>
+              <a:t>Engineered features nearly doubled the internal reward</a:t>
+            </a:r>
+          </a:p>
+        </p:txBody>
+      </p:sp>
+      <p:sp>
+        <p:nvSpPr>
+          <p:cNvPr id="3" name="Content Placeholder 2"/>
+          <p:cNvSpPr>
+            <a:spLocks noGrp="1"/>
+          </p:cNvSpPr>
+          <p:nvPr>
+            <p:ph idx="1"/>
+          </p:nvPr>
+        </p:nvSpPr>
+        <p:spPr/>
+        <p:txBody>
+          <a:bodyPr/>
+          <a:lstStyle/>
+          <a:p/>
+        </p:txBody>
+      </p:sp>
+      <p:sp>
+        <p:nvSpPr>
+          <p:cNvPr id="4" name="TextBox 3"/>
+          <p:cNvSpPr txBox="1"/>
+          <p:nvPr/>
+        </p:nvSpPr>
+        <p:spPr>
+          <a:xfrm>
+            <a:off x="548640" y="1024128"/>
+            <a:ext cx="6446520" cy="274320"/>
+          </a:xfrm>
+          <a:prstGeom prst="rect">
+            <a:avLst/>
+          </a:prstGeom>
+          <a:noFill/>
+        </p:spPr>
+        <p:txBody>
+          <a:bodyPr wrap="square">
+            <a:spAutoFit/>
+          </a:bodyPr>
+          <a:lstStyle/>
+          <a:p>
+            <a:pPr algn="l"/>
+            <a:r>
+              <a:rPr sz="1100" b="1">
+                <a:solidFill>
+                  <a:srgbClr val="C8102E"/>
+                </a:solidFill>
+                <a:latin typeface="Arial"/>
+              </a:rPr>
+              <a:t>RESULTS · INTERNAL LOSO BENCHMARK</a:t>
+            </a:r>
+          </a:p>
+        </p:txBody>
+      </p:sp>
+      <p:pic>
+        <p:nvPicPr>
+          <p:cNvPr id="5" name="Picture 4" descr="fig_slide_benchmark.png"/>
+          <p:cNvPicPr>
+            <a:picLocks noChangeAspect="1"/>
+          </p:cNvPicPr>
+          <p:nvPr/>
+        </p:nvPicPr>
+        <p:blipFill>
+          <a:blip r:embed="rId2"/>
+          <a:stretch>
+            <a:fillRect/>
+          </a:stretch>
+        </p:blipFill>
+        <p:spPr>
+          <a:xfrm>
+            <a:off x="457200" y="1463040"/>
+            <a:ext cx="3657600" cy="2460171"/>
+          </a:xfrm>
+          <a:prstGeom prst="rect">
+            <a:avLst/>
+          </a:prstGeom>
+        </p:spPr>
+      </p:pic>
+      <p:sp>
+        <p:nvSpPr>
+          <p:cNvPr id="6" name="TextBox 5"/>
+          <p:cNvSpPr txBox="1"/>
+          <p:nvPr/>
+        </p:nvSpPr>
+        <p:spPr>
+          <a:xfrm>
+            <a:off x="4297680" y="1554480"/>
+            <a:ext cx="2743200" cy="868680"/>
+          </a:xfrm>
+          <a:prstGeom prst="rect">
+            <a:avLst/>
+          </a:prstGeom>
+          <a:noFill/>
+        </p:spPr>
+        <p:txBody>
+          <a:bodyPr wrap="square">
+            <a:spAutoFit/>
+          </a:bodyPr>
+          <a:lstStyle/>
+          <a:p>
+            <a:pPr algn="l"/>
+            <a:r>
+              <a:rPr sz="1200" b="1">
+                <a:solidFill>
+                  <a:srgbClr val="2A2E30"/>
+                </a:solidFill>
+                <a:latin typeface="Arial"/>
+              </a:rPr>
+              <a:t>+ NeuroKit2 &amp; report features</a:t>
+            </a:r>
+            <a:r>
+              <a:rPr sz="1200" b="0">
+                <a:solidFill>
+                  <a:srgbClr val="505759"/>
+                </a:solidFill>
+                <a:latin typeface="Arial"/>
+              </a:rPr>
+              <a:t> lift pooled LOSO reward </a:t>
+            </a:r>
+            <a:r>
+              <a:rPr sz="1200" b="1">
+                <a:solidFill>
+                  <a:srgbClr val="C8102E"/>
+                </a:solidFill>
+                <a:latin typeface="Arial"/>
+              </a:rPr>
+              <a:t>0.098 → 0.176</a:t>
+            </a:r>
+            <a:r>
+              <a:rPr sz="1200" b="0">
+                <a:solidFill>
+                  <a:srgbClr val="505759"/>
+                </a:solidFill>
+                <a:latin typeface="Arial"/>
+              </a:rPr>
+              <a:t> on the same harness — improving every held-out site.</a:t>
+            </a:r>
+          </a:p>
+        </p:txBody>
+      </p:sp>
+      <p:sp>
+        <p:nvSpPr>
+          <p:cNvPr id="7" name="TextBox 6"/>
+          <p:cNvSpPr txBox="1"/>
+          <p:nvPr/>
+        </p:nvSpPr>
+        <p:spPr>
+          <a:xfrm>
+            <a:off x="4297680" y="2331720"/>
+            <a:ext cx="2743200" cy="868680"/>
+          </a:xfrm>
+          <a:prstGeom prst="rect">
+            <a:avLst/>
+          </a:prstGeom>
+          <a:noFill/>
+        </p:spPr>
+        <p:txBody>
+          <a:bodyPr wrap="square">
+            <a:spAutoFit/>
+          </a:bodyPr>
+          <a:lstStyle/>
+          <a:p>
+            <a:pPr algn="l"/>
+            <a:r>
+              <a:rPr sz="1200" b="1">
+                <a:solidFill>
+                  <a:srgbClr val="2A2E30"/>
+                </a:solidFill>
+                <a:latin typeface="Arial"/>
+              </a:rPr>
+              <a:t>Reward 0.168 is the verified submission</a:t>
+            </a:r>
+            <a:r>
+              <a:rPr sz="1200" b="0">
+                <a:solidFill>
+                  <a:srgbClr val="505759"/>
+                </a:solidFill>
+                <a:latin typeface="Arial"/>
+              </a:rPr>
+              <a:t> (official evaluate_model.py).</a:t>
+            </a:r>
+          </a:p>
+        </p:txBody>
+      </p:sp>
+      <p:sp>
+        <p:nvSpPr>
+          <p:cNvPr id="8" name="TextBox 7"/>
+          <p:cNvSpPr txBox="1"/>
+          <p:nvPr/>
+        </p:nvSpPr>
+        <p:spPr>
+          <a:xfrm>
+            <a:off x="4297680" y="3108960"/>
+            <a:ext cx="2743200" cy="868680"/>
+          </a:xfrm>
+          <a:prstGeom prst="rect">
+            <a:avLst/>
+          </a:prstGeom>
+          <a:noFill/>
+        </p:spPr>
+        <p:txBody>
+          <a:bodyPr wrap="square">
+            <a:spAutoFit/>
+          </a:bodyPr>
+          <a:lstStyle/>
+          <a:p>
+            <a:pPr algn="l"/>
+            <a:r>
+              <a:rPr sz="1200" b="1">
+                <a:solidFill>
+                  <a:srgbClr val="C8102E"/>
+                </a:solidFill>
+                <a:latin typeface="Arial"/>
+              </a:rPr>
+              <a:t>The raw 337-feature union overfits</a:t>
+            </a:r>
+            <a:r>
+              <a:rPr sz="1200" b="0">
+                <a:solidFill>
+                  <a:srgbClr val="505759"/>
+                </a:solidFill>
+                <a:latin typeface="Arial"/>
+              </a:rPr>
+              <a:t> — feature selection is the next lever (below).</a:t>
+            </a:r>
+          </a:p>
+        </p:txBody>
+      </p:sp>
+      <p:sp>
+        <p:nvSpPr>
+          <p:cNvPr id="9" name="TextBox 8"/>
+          <p:cNvSpPr txBox="1"/>
+          <p:nvPr/>
+        </p:nvSpPr>
+        <p:spPr>
+          <a:xfrm>
+            <a:off x="4297680" y="3886200"/>
+            <a:ext cx="2743200" cy="868680"/>
+          </a:xfrm>
+          <a:prstGeom prst="rect">
+            <a:avLst/>
+          </a:prstGeom>
+          <a:noFill/>
+        </p:spPr>
+        <p:txBody>
+          <a:bodyPr wrap="square">
+            <a:spAutoFit/>
+          </a:bodyPr>
+          <a:lstStyle/>
+          <a:p>
+            <a:pPr algn="l"/>
+            <a:r>
+              <a:rPr sz="1200" b="1">
+                <a:solidFill>
+                  <a:srgbClr val="2A2E30"/>
+                </a:solidFill>
+                <a:latin typeface="Arial"/>
+              </a:rPr>
+              <a:t>Caveat:</a:t>
+            </a:r>
+            <a:r>
+              <a:rPr sz="1100" b="0">
+                <a:solidFill>
+                  <a:srgbClr val="505759"/>
+                </a:solidFill>
+                <a:latin typeface="Arial"/>
+              </a:rPr>
+              <a:t> this internal harness scores the baseline at 0.098, not 0.168 — the relative lift is trustworthy; the absolute number needs reconciling before quoting vs the leaderboard.</a:t>
+            </a:r>
+          </a:p>
+        </p:txBody>
+      </p:sp>
+      <p:sp>
+        <p:nvSpPr>
+          <p:cNvPr id="10" name="TextBox 9"/>
+          <p:cNvSpPr txBox="1"/>
+          <p:nvPr/>
+        </p:nvSpPr>
+        <p:spPr>
+          <a:xfrm>
+            <a:off x="548640" y="4828032"/>
+            <a:ext cx="6035040" cy="228600"/>
+          </a:xfrm>
+          <a:prstGeom prst="rect">
+            <a:avLst/>
+          </a:prstGeom>
+          <a:noFill/>
+        </p:spPr>
+        <p:txBody>
+          <a:bodyPr wrap="square">
+            <a:spAutoFit/>
+          </a:bodyPr>
+          <a:lstStyle/>
+          <a:p>
+            <a:pPr algn="l"/>
+            <a:r>
+              <a:rPr sz="800" b="0">
+                <a:solidFill>
+                  <a:srgbClr val="898D8D"/>
+                </a:solidFill>
+                <a:latin typeface="Arial"/>
+              </a:rPr>
+              <a:t>PhysioNet Challenge 2026  ·  Scoring Metrics</a:t>
+            </a:r>
+          </a:p>
+        </p:txBody>
+      </p:sp>
+    </p:spTree>
+  </p:cSld>
+  <p:clrMapOvr>
+    <a:masterClrMapping/>
+  </p:clrMapOvr>
+</p:sld>
+</file>
+
+<file path=ppt/slides/slide33.xml><?xml version="1.0" encoding="utf-8"?>
+<p:sld xmlns:a="http://schemas.openxmlformats.org/drawingml/2006/main" xmlns:p="http://schemas.openxmlformats.org/presentationml/2006/main" xmlns:r="http://schemas.openxmlformats.org/officeDocument/2006/relationships">
+  <p:cSld>
+    <p:spTree>
+      <p:nvGrpSpPr>
+        <p:cNvPr id="1" name=""/>
+        <p:cNvGrpSpPr/>
+        <p:nvPr/>
+      </p:nvGrpSpPr>
+      <p:grpSpPr/>
+      <p:sp>
+        <p:nvSpPr>
+          <p:cNvPr id="2" name="Title 1"/>
+          <p:cNvSpPr>
+            <a:spLocks noGrp="1"/>
+          </p:cNvSpPr>
+          <p:nvPr>
+            <p:ph type="title"/>
+          </p:nvPr>
+        </p:nvSpPr>
+        <p:spPr/>
+        <p:txBody>
+          <a:bodyPr/>
+          <a:lstStyle/>
+          <a:p>
+            <a:r>
+              <a:t>Can a foundation model add more? Not yet.</a:t>
+            </a:r>
+          </a:p>
+        </p:txBody>
+      </p:sp>
+      <p:sp>
+        <p:nvSpPr>
+          <p:cNvPr id="3" name="Content Placeholder 2"/>
+          <p:cNvSpPr>
+            <a:spLocks noGrp="1"/>
+          </p:cNvSpPr>
+          <p:nvPr>
+            <p:ph idx="1"/>
+          </p:nvPr>
+        </p:nvSpPr>
+        <p:spPr/>
+        <p:txBody>
+          <a:bodyPr/>
+          <a:lstStyle/>
+          <a:p/>
+        </p:txBody>
+      </p:sp>
+      <p:sp>
+        <p:nvSpPr>
+          <p:cNvPr id="4" name="TextBox 3"/>
+          <p:cNvSpPr txBox="1"/>
+          <p:nvPr/>
+        </p:nvSpPr>
+        <p:spPr>
+          <a:xfrm>
+            <a:off x="548640" y="1024128"/>
+            <a:ext cx="6446520" cy="274320"/>
+          </a:xfrm>
+          <a:prstGeom prst="rect">
+            <a:avLst/>
+          </a:prstGeom>
+          <a:noFill/>
+        </p:spPr>
+        <p:txBody>
+          <a:bodyPr wrap="square">
+            <a:spAutoFit/>
+          </a:bodyPr>
+          <a:lstStyle/>
+          <a:p>
+            <a:pPr algn="l"/>
+            <a:r>
+              <a:rPr sz="1100" b="1">
+                <a:solidFill>
+                  <a:srgbClr val="C8102E"/>
+                </a:solidFill>
+                <a:latin typeface="Arial"/>
+              </a:rPr>
+              <a:t>RESULTS · SLEEPFM EMBEDDING FUSION (in progress)</a:t>
+            </a:r>
+          </a:p>
+        </p:txBody>
+      </p:sp>
+      <p:pic>
+        <p:nvPicPr>
+          <p:cNvPr id="5" name="Picture 4" descr="fig_slide_forest.png"/>
+          <p:cNvPicPr>
+            <a:picLocks noChangeAspect="1"/>
+          </p:cNvPicPr>
+          <p:nvPr/>
+        </p:nvPicPr>
+        <p:blipFill>
+          <a:blip r:embed="rId2"/>
+          <a:stretch>
+            <a:fillRect/>
+          </a:stretch>
+        </p:blipFill>
+        <p:spPr>
+          <a:xfrm>
+            <a:off x="457200" y="1444752"/>
+            <a:ext cx="4069080" cy="1434647"/>
+          </a:xfrm>
+          <a:prstGeom prst="rect">
+            <a:avLst/>
+          </a:prstGeom>
+        </p:spPr>
+      </p:pic>
+      <p:sp>
+        <p:nvSpPr>
+          <p:cNvPr id="6" name="TextBox 5"/>
+          <p:cNvSpPr txBox="1"/>
+          <p:nvPr/>
+        </p:nvSpPr>
+        <p:spPr>
+          <a:xfrm>
+            <a:off x="4663440" y="1517904"/>
+            <a:ext cx="2377440" cy="914400"/>
+          </a:xfrm>
+          <a:prstGeom prst="rect">
+            <a:avLst/>
+          </a:prstGeom>
+          <a:noFill/>
+        </p:spPr>
+        <p:txBody>
+          <a:bodyPr wrap="square">
+            <a:spAutoFit/>
+          </a:bodyPr>
+          <a:lstStyle/>
+          <a:p>
+            <a:pPr algn="l"/>
+            <a:r>
+              <a:rPr sz="1200" b="1">
+                <a:solidFill>
+                  <a:srgbClr val="2A2E30"/>
+                </a:solidFill>
+                <a:latin typeface="Arial"/>
+              </a:rPr>
+              <a:t>SleepFM embeddings</a:t>
+            </a:r>
+            <a:r>
+              <a:rPr sz="1200" b="0">
+                <a:solidFill>
+                  <a:srgbClr val="505759"/>
+                </a:solidFill>
+                <a:latin typeface="Arial"/>
+              </a:rPr>
+              <a:t> (self-supervised, no CI labels) fused leakage-safe with our features.</a:t>
+            </a:r>
+          </a:p>
+        </p:txBody>
+      </p:sp>
+      <p:sp>
+        <p:nvSpPr>
+          <p:cNvPr id="7" name="TextBox 6"/>
+          <p:cNvSpPr txBox="1"/>
+          <p:nvPr/>
+        </p:nvSpPr>
+        <p:spPr>
+          <a:xfrm>
+            <a:off x="4663440" y="2304288"/>
+            <a:ext cx="2377440" cy="914400"/>
+          </a:xfrm>
+          <a:prstGeom prst="rect">
+            <a:avLst/>
+          </a:prstGeom>
+          <a:noFill/>
+        </p:spPr>
+        <p:txBody>
+          <a:bodyPr wrap="square">
+            <a:spAutoFit/>
+          </a:bodyPr>
+          <a:lstStyle/>
+          <a:p>
+            <a:pPr algn="l"/>
+            <a:r>
+              <a:rPr sz="1200" b="1">
+                <a:solidFill>
+                  <a:srgbClr val="C8102E"/>
+                </a:solidFill>
+                <a:latin typeface="Arial"/>
+              </a:rPr>
+              <a:t>Best point estimate 0.253</a:t>
+            </a:r>
+            <a:r>
+              <a:rPr sz="1200" b="0">
+                <a:solidFill>
+                  <a:srgbClr val="505759"/>
+                </a:solidFill>
+                <a:latin typeface="Arial"/>
+              </a:rPr>
+              <a:t> LOSO — but its 95% CI still includes 0.</a:t>
+            </a:r>
+          </a:p>
+        </p:txBody>
+      </p:sp>
+      <p:sp>
+        <p:nvSpPr>
+          <p:cNvPr id="8" name="TextBox 7"/>
+          <p:cNvSpPr txBox="1"/>
+          <p:nvPr/>
+        </p:nvSpPr>
+        <p:spPr>
+          <a:xfrm>
+            <a:off x="4663440" y="3090672"/>
+            <a:ext cx="2377440" cy="914400"/>
+          </a:xfrm>
+          <a:prstGeom prst="rect">
+            <a:avLst/>
+          </a:prstGeom>
+          <a:noFill/>
+        </p:spPr>
+        <p:txBody>
+          <a:bodyPr wrap="square">
+            <a:spAutoFit/>
+          </a:bodyPr>
+          <a:lstStyle/>
+          <a:p>
+            <a:pPr algn="l"/>
+            <a:r>
+              <a:rPr sz="1200" b="1">
+                <a:solidFill>
+                  <a:srgbClr val="2A2E30"/>
+                </a:solidFill>
+                <a:latin typeface="Arial"/>
+              </a:rPr>
+              <a:t>Paired test is the verdict:</a:t>
+            </a:r>
+            <a:r>
+              <a:rPr sz="1200" b="0">
+                <a:solidFill>
+                  <a:srgbClr val="505759"/>
+                </a:solidFill>
+                <a:latin typeface="Arial"/>
+              </a:rPr>
+              <a:t> adding embeddings on top of feature selection gives </a:t>
+            </a:r>
+            <a:r>
+              <a:rPr sz="1200" b="1">
+                <a:solidFill>
+                  <a:srgbClr val="2A2E30"/>
+                </a:solidFill>
+                <a:latin typeface="Arial"/>
+              </a:rPr>
+              <a:t>Δ = −0.10 [−1.32, +0.66]</a:t>
+            </a:r>
+            <a:r>
+              <a:rPr sz="1200" b="0">
+                <a:solidFill>
+                  <a:srgbClr val="505759"/>
+                </a:solidFill>
+                <a:latin typeface="Arial"/>
+              </a:rPr>
+              <a:t> — not distinguishable from selection alone.</a:t>
+            </a:r>
+          </a:p>
+        </p:txBody>
+      </p:sp>
+      <p:sp>
+        <p:nvSpPr>
+          <p:cNvPr id="9" name="TextBox 8"/>
+          <p:cNvSpPr txBox="1"/>
+          <p:nvPr/>
+        </p:nvSpPr>
+        <p:spPr>
+          <a:xfrm>
+            <a:off x="4663440" y="3877056"/>
+            <a:ext cx="2377440" cy="914400"/>
+          </a:xfrm>
+          <a:prstGeom prst="rect">
+            <a:avLst/>
+          </a:prstGeom>
+          <a:noFill/>
+        </p:spPr>
+        <p:txBody>
+          <a:bodyPr wrap="square">
+            <a:spAutoFit/>
+          </a:bodyPr>
+          <a:lstStyle/>
+          <a:p>
+            <a:pPr algn="l"/>
+            <a:r>
+              <a:rPr sz="1200" b="1">
+                <a:solidFill>
+                  <a:srgbClr val="346583"/>
+                </a:solidFill>
+                <a:latin typeface="Arial"/>
+              </a:rPr>
+              <a:t>Next:</a:t>
+            </a:r>
+            <a:r>
+              <a:rPr sz="1200" b="0">
+                <a:solidFill>
+                  <a:srgbClr val="505759"/>
+                </a:solidFill>
+                <a:latin typeface="Arial"/>
+              </a:rPr>
+              <a:t> per-stage PCA, late-fusion/stacking, and more labeled data to shrink the CIs (84 positives is the binding constraint).</a:t>
+            </a:r>
+          </a:p>
+        </p:txBody>
+      </p:sp>
+      <p:sp>
+        <p:nvSpPr>
+          <p:cNvPr id="10" name="TextBox 9"/>
+          <p:cNvSpPr txBox="1"/>
+          <p:nvPr/>
+        </p:nvSpPr>
+        <p:spPr>
+          <a:xfrm>
+            <a:off x="548640" y="4828032"/>
+            <a:ext cx="6035040" cy="228600"/>
+          </a:xfrm>
+          <a:prstGeom prst="rect">
+            <a:avLst/>
+          </a:prstGeom>
+          <a:noFill/>
+        </p:spPr>
+        <p:txBody>
+          <a:bodyPr wrap="square">
+            <a:spAutoFit/>
+          </a:bodyPr>
+          <a:lstStyle/>
+          <a:p>
+            <a:pPr algn="l"/>
+            <a:r>
+              <a:rPr sz="800" b="0">
+                <a:solidFill>
+                  <a:srgbClr val="898D8D"/>
+                </a:solidFill>
+                <a:latin typeface="Arial"/>
+              </a:rPr>
+              <a:t>PhysioNet Challenge 2026  ·  Scoring Metrics</a:t>
             </a:r>
           </a:p>
         </p:txBody>
